--- a/audit-examples/FCRM_RA_FY2025_Process_Workflows.pptx
+++ b/audit-examples/FCRM_RA_FY2025_Process_Workflows.pptx
@@ -1470,8 +1470,8 @@
         </p:nvSpPr>
         <p:spPr>
           <a:xfrm>
-            <a:off x="365760" y="1325880"/>
-            <a:ext cx="2000250" cy="868680"/>
+            <a:off x="365760" y="1760220"/>
+            <a:ext cx="2000250" cy="1188720"/>
           </a:xfrm>
           <a:prstGeom prst="rect">
             <a:avLst/>
@@ -1495,8 +1495,8 @@
         </p:nvSpPr>
         <p:spPr>
           <a:xfrm>
-            <a:off x="365760" y="1325880"/>
-            <a:ext cx="73152" cy="868680"/>
+            <a:off x="365760" y="1760220"/>
+            <a:ext cx="73152" cy="1188720"/>
           </a:xfrm>
           <a:prstGeom prst="rect">
             <a:avLst/>
@@ -1520,7 +1520,7 @@
         </p:nvSpPr>
         <p:spPr>
           <a:xfrm>
-            <a:off x="530352" y="1417320"/>
+            <a:off x="530352" y="1851660"/>
             <a:ext cx="384048" cy="384048"/>
           </a:xfrm>
           <a:prstGeom prst="ellipse">
@@ -1545,7 +1545,7 @@
         </p:nvSpPr>
         <p:spPr>
           <a:xfrm>
-            <a:off x="530352" y="1417320"/>
+            <a:off x="530352" y="1851660"/>
             <a:ext cx="384048" cy="384048"/>
           </a:xfrm>
           <a:prstGeom prst="rect">
@@ -1584,8 +1584,8 @@
         </p:nvSpPr>
         <p:spPr>
           <a:xfrm>
-            <a:off x="969264" y="1399032"/>
-            <a:ext cx="1287018" cy="722376"/>
+            <a:off x="969264" y="1833372"/>
+            <a:ext cx="1287018" cy="457200"/>
           </a:xfrm>
           <a:prstGeom prst="rect">
             <a:avLst/>
@@ -1601,7 +1601,7 @@
               <a:buNone/>
             </a:pPr>
             <a:r>
-              <a:rPr lang="en-US" sz="1150" b="1" dirty="0">
+              <a:rPr lang="en-US" sz="1100" b="1" dirty="0">
                 <a:solidFill>
                   <a:srgbClr val="1A2530"/>
                 </a:solidFill>
@@ -1611,19 +1611,97 @@
               </a:rPr>
               <a:t>Intake Request</a:t>
             </a:r>
-            <a:endParaRPr lang="en-US" sz="1150" dirty="0"/>
-          </a:p>
-        </p:txBody>
-      </p:sp>
-      <p:sp>
-        <p:nvSpPr>
-          <p:cNvPr id="11" name="Shape 9"/>
+            <a:endParaRPr lang="en-US" sz="1100" dirty="0"/>
+          </a:p>
+        </p:txBody>
+      </p:sp>
+      <p:sp>
+        <p:nvSpPr>
+          <p:cNvPr id="11" name="Text 9"/>
+          <p:cNvSpPr/>
+          <p:nvPr/>
+        </p:nvSpPr>
+        <p:spPr>
+          <a:xfrm>
+            <a:off x="530352" y="2382012"/>
+            <a:ext cx="1725930" cy="219456"/>
+          </a:xfrm>
+          <a:prstGeom prst="rect">
+            <a:avLst/>
+          </a:prstGeom>
+          <a:noFill/>
+          <a:ln/>
+        </p:spPr>
+        <p:txBody>
+          <a:bodyPr wrap="square" lIns="0" tIns="0" rIns="0" bIns="0" rtlCol="0" anchor="ctr"/>
+          <a:lstStyle/>
+          <a:p>
+            <a:pPr algn="l" indent="0" marL="0">
+              <a:buNone/>
+            </a:pPr>
+            <a:r>
+              <a:rPr lang="en-US" sz="900" i="1" dirty="0">
+                <a:solidFill>
+                  <a:srgbClr val="1A5DB0"/>
+                </a:solidFill>
+                <a:latin typeface="Arial" pitchFamily="34" charset="0"/>
+                <a:ea typeface="Arial" pitchFamily="34" charset="-122"/>
+                <a:cs typeface="Arial" pitchFamily="34" charset="-120"/>
+              </a:rPr>
+              <a:t>→ DCT</a:t>
+            </a:r>
+            <a:endParaRPr lang="en-US" sz="900" dirty="0"/>
+          </a:p>
+        </p:txBody>
+      </p:sp>
+      <p:sp>
+        <p:nvSpPr>
+          <p:cNvPr id="12" name="Text 10"/>
+          <p:cNvSpPr/>
+          <p:nvPr/>
+        </p:nvSpPr>
+        <p:spPr>
+          <a:xfrm>
+            <a:off x="530352" y="2601468"/>
+            <a:ext cx="1725930" cy="219456"/>
+          </a:xfrm>
+          <a:prstGeom prst="rect">
+            <a:avLst/>
+          </a:prstGeom>
+          <a:noFill/>
+          <a:ln/>
+        </p:spPr>
+        <p:txBody>
+          <a:bodyPr wrap="square" lIns="0" tIns="0" rIns="0" bIns="0" rtlCol="0" anchor="ctr"/>
+          <a:lstStyle/>
+          <a:p>
+            <a:pPr algn="l" indent="0" marL="0">
+              <a:buNone/>
+            </a:pPr>
+            <a:r>
+              <a:rPr lang="en-US" sz="900" i="1" dirty="0">
+                <a:solidFill>
+                  <a:srgbClr val="1A5DB0"/>
+                </a:solidFill>
+                <a:latin typeface="Arial" pitchFamily="34" charset="0"/>
+                <a:ea typeface="Arial" pitchFamily="34" charset="-122"/>
+                <a:cs typeface="Arial" pitchFamily="34" charset="-120"/>
+              </a:rPr>
+              <a:t>→ Jira Board</a:t>
+            </a:r>
+            <a:endParaRPr lang="en-US" sz="900" dirty="0"/>
+          </a:p>
+        </p:txBody>
+      </p:sp>
+      <p:sp>
+        <p:nvSpPr>
+          <p:cNvPr id="13" name="Shape 11"/>
           <p:cNvSpPr/>
           <p:nvPr/>
         </p:nvSpPr>
         <p:spPr>
           <a:xfrm rot="5400000">
-            <a:off x="2375154" y="1696212"/>
+            <a:off x="2375154" y="2290572"/>
             <a:ext cx="118872" cy="128016"/>
           </a:xfrm>
           <a:prstGeom prst="rtTriangle">
@@ -1642,14 +1720,14 @@
       </p:sp>
       <p:sp>
         <p:nvSpPr>
-          <p:cNvPr id="12" name="Shape 10"/>
-          <p:cNvSpPr/>
-          <p:nvPr/>
-        </p:nvSpPr>
-        <p:spPr>
-          <a:xfrm>
-            <a:off x="2503170" y="1325880"/>
-            <a:ext cx="2000250" cy="868680"/>
+          <p:cNvPr id="14" name="Shape 12"/>
+          <p:cNvSpPr/>
+          <p:nvPr/>
+        </p:nvSpPr>
+        <p:spPr>
+          <a:xfrm>
+            <a:off x="2503170" y="1760220"/>
+            <a:ext cx="2000250" cy="1188720"/>
           </a:xfrm>
           <a:prstGeom prst="rect">
             <a:avLst/>
@@ -1667,14 +1745,14 @@
       </p:sp>
       <p:sp>
         <p:nvSpPr>
-          <p:cNvPr id="13" name="Shape 11"/>
-          <p:cNvSpPr/>
-          <p:nvPr/>
-        </p:nvSpPr>
-        <p:spPr>
-          <a:xfrm>
-            <a:off x="2503170" y="1325880"/>
-            <a:ext cx="73152" cy="868680"/>
+          <p:cNvPr id="15" name="Shape 13"/>
+          <p:cNvSpPr/>
+          <p:nvPr/>
+        </p:nvSpPr>
+        <p:spPr>
+          <a:xfrm>
+            <a:off x="2503170" y="1760220"/>
+            <a:ext cx="73152" cy="1188720"/>
           </a:xfrm>
           <a:prstGeom prst="rect">
             <a:avLst/>
@@ -1692,13 +1770,13 @@
       </p:sp>
       <p:sp>
         <p:nvSpPr>
-          <p:cNvPr id="14" name="Shape 12"/>
-          <p:cNvSpPr/>
-          <p:nvPr/>
-        </p:nvSpPr>
-        <p:spPr>
-          <a:xfrm>
-            <a:off x="2667762" y="1417320"/>
+          <p:cNvPr id="16" name="Shape 14"/>
+          <p:cNvSpPr/>
+          <p:nvPr/>
+        </p:nvSpPr>
+        <p:spPr>
+          <a:xfrm>
+            <a:off x="2667762" y="1851660"/>
             <a:ext cx="384048" cy="384048"/>
           </a:xfrm>
           <a:prstGeom prst="ellipse">
@@ -1717,13 +1795,13 @@
       </p:sp>
       <p:sp>
         <p:nvSpPr>
-          <p:cNvPr id="15" name="Text 13"/>
-          <p:cNvSpPr/>
-          <p:nvPr/>
-        </p:nvSpPr>
-        <p:spPr>
-          <a:xfrm>
-            <a:off x="2667762" y="1417320"/>
+          <p:cNvPr id="17" name="Text 15"/>
+          <p:cNvSpPr/>
+          <p:nvPr/>
+        </p:nvSpPr>
+        <p:spPr>
+          <a:xfrm>
+            <a:off x="2667762" y="1851660"/>
             <a:ext cx="384048" cy="384048"/>
           </a:xfrm>
           <a:prstGeom prst="rect">
@@ -1756,14 +1834,14 @@
       </p:sp>
       <p:sp>
         <p:nvSpPr>
-          <p:cNvPr id="16" name="Text 14"/>
-          <p:cNvSpPr/>
-          <p:nvPr/>
-        </p:nvSpPr>
-        <p:spPr>
-          <a:xfrm>
-            <a:off x="3106674" y="1399032"/>
-            <a:ext cx="1287018" cy="722376"/>
+          <p:cNvPr id="18" name="Text 16"/>
+          <p:cNvSpPr/>
+          <p:nvPr/>
+        </p:nvSpPr>
+        <p:spPr>
+          <a:xfrm>
+            <a:off x="3106674" y="1833372"/>
+            <a:ext cx="1287018" cy="457200"/>
           </a:xfrm>
           <a:prstGeom prst="rect">
             <a:avLst/>
@@ -1779,7 +1857,7 @@
               <a:buNone/>
             </a:pPr>
             <a:r>
-              <a:rPr lang="en-US" sz="1150" b="1" dirty="0">
+              <a:rPr lang="en-US" sz="1100" b="1" dirty="0">
                 <a:solidFill>
                   <a:srgbClr val="1A2530"/>
                 </a:solidFill>
@@ -1789,19 +1867,97 @@
               </a:rPr>
               <a:t>Scope / Requirement Definition</a:t>
             </a:r>
-            <a:endParaRPr lang="en-US" sz="1150" dirty="0"/>
-          </a:p>
-        </p:txBody>
-      </p:sp>
-      <p:sp>
-        <p:nvSpPr>
-          <p:cNvPr id="17" name="Shape 15"/>
+            <a:endParaRPr lang="en-US" sz="1100" dirty="0"/>
+          </a:p>
+        </p:txBody>
+      </p:sp>
+      <p:sp>
+        <p:nvSpPr>
+          <p:cNvPr id="19" name="Text 17"/>
+          <p:cNvSpPr/>
+          <p:nvPr/>
+        </p:nvSpPr>
+        <p:spPr>
+          <a:xfrm>
+            <a:off x="2667762" y="2382012"/>
+            <a:ext cx="1725930" cy="219456"/>
+          </a:xfrm>
+          <a:prstGeom prst="rect">
+            <a:avLst/>
+          </a:prstGeom>
+          <a:noFill/>
+          <a:ln/>
+        </p:spPr>
+        <p:txBody>
+          <a:bodyPr wrap="square" lIns="0" tIns="0" rIns="0" bIns="0" rtlCol="0" anchor="ctr"/>
+          <a:lstStyle/>
+          <a:p>
+            <a:pPr algn="l" indent="0" marL="0">
+              <a:buNone/>
+            </a:pPr>
+            <a:r>
+              <a:rPr lang="en-US" sz="900" i="1" dirty="0">
+                <a:solidFill>
+                  <a:srgbClr val="1A5DB0"/>
+                </a:solidFill>
+                <a:latin typeface="Arial" pitchFamily="34" charset="0"/>
+                <a:ea typeface="Arial" pitchFamily="34" charset="-122"/>
+                <a:cs typeface="Arial" pitchFamily="34" charset="-120"/>
+              </a:rPr>
+              <a:t>→ Scope and Requirements Document</a:t>
+            </a:r>
+            <a:endParaRPr lang="en-US" sz="900" dirty="0"/>
+          </a:p>
+        </p:txBody>
+      </p:sp>
+      <p:sp>
+        <p:nvSpPr>
+          <p:cNvPr id="20" name="Text 18"/>
+          <p:cNvSpPr/>
+          <p:nvPr/>
+        </p:nvSpPr>
+        <p:spPr>
+          <a:xfrm>
+            <a:off x="2667762" y="2601468"/>
+            <a:ext cx="1725930" cy="219456"/>
+          </a:xfrm>
+          <a:prstGeom prst="rect">
+            <a:avLst/>
+          </a:prstGeom>
+          <a:noFill/>
+          <a:ln/>
+        </p:spPr>
+        <p:txBody>
+          <a:bodyPr wrap="square" lIns="0" tIns="0" rIns="0" bIns="0" rtlCol="0" anchor="ctr"/>
+          <a:lstStyle/>
+          <a:p>
+            <a:pPr algn="l" indent="0" marL="0">
+              <a:buNone/>
+            </a:pPr>
+            <a:r>
+              <a:rPr lang="en-US" sz="900" i="1" dirty="0">
+                <a:solidFill>
+                  <a:srgbClr val="1A5DB0"/>
+                </a:solidFill>
+                <a:latin typeface="Arial" pitchFamily="34" charset="0"/>
+                <a:ea typeface="Arial" pitchFamily="34" charset="-122"/>
+                <a:cs typeface="Arial" pitchFamily="34" charset="-120"/>
+              </a:rPr>
+              <a:t>→ Scope Statement of Work (Live).docx</a:t>
+            </a:r>
+            <a:endParaRPr lang="en-US" sz="900" dirty="0"/>
+          </a:p>
+        </p:txBody>
+      </p:sp>
+      <p:sp>
+        <p:nvSpPr>
+          <p:cNvPr id="21" name="Shape 19"/>
           <p:cNvSpPr/>
           <p:nvPr/>
         </p:nvSpPr>
         <p:spPr>
           <a:xfrm rot="5400000">
-            <a:off x="4512564" y="1696212"/>
+            <a:off x="4512564" y="2290572"/>
             <a:ext cx="118872" cy="128016"/>
           </a:xfrm>
           <a:prstGeom prst="rtTriangle">
@@ -1820,14 +1976,14 @@
       </p:sp>
       <p:sp>
         <p:nvSpPr>
-          <p:cNvPr id="18" name="Shape 16"/>
-          <p:cNvSpPr/>
-          <p:nvPr/>
-        </p:nvSpPr>
-        <p:spPr>
-          <a:xfrm>
-            <a:off x="4640580" y="1325880"/>
-            <a:ext cx="2000250" cy="868680"/>
+          <p:cNvPr id="22" name="Shape 20"/>
+          <p:cNvSpPr/>
+          <p:nvPr/>
+        </p:nvSpPr>
+        <p:spPr>
+          <a:xfrm>
+            <a:off x="4640580" y="1760220"/>
+            <a:ext cx="2000250" cy="1188720"/>
           </a:xfrm>
           <a:prstGeom prst="rect">
             <a:avLst/>
@@ -1845,14 +2001,14 @@
       </p:sp>
       <p:sp>
         <p:nvSpPr>
-          <p:cNvPr id="19" name="Shape 17"/>
-          <p:cNvSpPr/>
-          <p:nvPr/>
-        </p:nvSpPr>
-        <p:spPr>
-          <a:xfrm>
-            <a:off x="4640580" y="1325880"/>
-            <a:ext cx="73152" cy="868680"/>
+          <p:cNvPr id="23" name="Shape 21"/>
+          <p:cNvSpPr/>
+          <p:nvPr/>
+        </p:nvSpPr>
+        <p:spPr>
+          <a:xfrm>
+            <a:off x="4640580" y="1760220"/>
+            <a:ext cx="73152" cy="1188720"/>
           </a:xfrm>
           <a:prstGeom prst="rect">
             <a:avLst/>
@@ -1870,13 +2026,13 @@
       </p:sp>
       <p:sp>
         <p:nvSpPr>
-          <p:cNvPr id="20" name="Shape 18"/>
-          <p:cNvSpPr/>
-          <p:nvPr/>
-        </p:nvSpPr>
-        <p:spPr>
-          <a:xfrm>
-            <a:off x="4805172" y="1417320"/>
+          <p:cNvPr id="24" name="Shape 22"/>
+          <p:cNvSpPr/>
+          <p:nvPr/>
+        </p:nvSpPr>
+        <p:spPr>
+          <a:xfrm>
+            <a:off x="4805172" y="1851660"/>
             <a:ext cx="384048" cy="384048"/>
           </a:xfrm>
           <a:prstGeom prst="ellipse">
@@ -1895,13 +2051,13 @@
       </p:sp>
       <p:sp>
         <p:nvSpPr>
-          <p:cNvPr id="21" name="Text 19"/>
-          <p:cNvSpPr/>
-          <p:nvPr/>
-        </p:nvSpPr>
-        <p:spPr>
-          <a:xfrm>
-            <a:off x="4805172" y="1417320"/>
+          <p:cNvPr id="25" name="Text 23"/>
+          <p:cNvSpPr/>
+          <p:nvPr/>
+        </p:nvSpPr>
+        <p:spPr>
+          <a:xfrm>
+            <a:off x="4805172" y="1851660"/>
             <a:ext cx="384048" cy="384048"/>
           </a:xfrm>
           <a:prstGeom prst="rect">
@@ -1934,14 +2090,14 @@
       </p:sp>
       <p:sp>
         <p:nvSpPr>
-          <p:cNvPr id="22" name="Text 20"/>
-          <p:cNvSpPr/>
-          <p:nvPr/>
-        </p:nvSpPr>
-        <p:spPr>
-          <a:xfrm>
-            <a:off x="5244084" y="1399032"/>
-            <a:ext cx="1287018" cy="722376"/>
+          <p:cNvPr id="26" name="Text 24"/>
+          <p:cNvSpPr/>
+          <p:nvPr/>
+        </p:nvSpPr>
+        <p:spPr>
+          <a:xfrm>
+            <a:off x="5244084" y="1833372"/>
+            <a:ext cx="1287018" cy="457200"/>
           </a:xfrm>
           <a:prstGeom prst="rect">
             <a:avLst/>
@@ -1957,7 +2113,7 @@
               <a:buNone/>
             </a:pPr>
             <a:r>
-              <a:rPr lang="en-US" sz="1150" b="1" dirty="0">
+              <a:rPr lang="en-US" sz="1100" b="1" dirty="0">
                 <a:solidFill>
                   <a:srgbClr val="1A2530"/>
                 </a:solidFill>
@@ -1967,19 +2123,58 @@
               </a:rPr>
               <a:t>Data Acquisition</a:t>
             </a:r>
-            <a:endParaRPr lang="en-US" sz="1150" dirty="0"/>
-          </a:p>
-        </p:txBody>
-      </p:sp>
-      <p:sp>
-        <p:nvSpPr>
-          <p:cNvPr id="23" name="Shape 21"/>
+            <a:endParaRPr lang="en-US" sz="1100" dirty="0"/>
+          </a:p>
+        </p:txBody>
+      </p:sp>
+      <p:sp>
+        <p:nvSpPr>
+          <p:cNvPr id="27" name="Text 25"/>
+          <p:cNvSpPr/>
+          <p:nvPr/>
+        </p:nvSpPr>
+        <p:spPr>
+          <a:xfrm>
+            <a:off x="4805172" y="2382012"/>
+            <a:ext cx="1725930" cy="219456"/>
+          </a:xfrm>
+          <a:prstGeom prst="rect">
+            <a:avLst/>
+          </a:prstGeom>
+          <a:noFill/>
+          <a:ln/>
+        </p:spPr>
+        <p:txBody>
+          <a:bodyPr wrap="square" lIns="0" tIns="0" rIns="0" bIns="0" rtlCol="0" anchor="ctr"/>
+          <a:lstStyle/>
+          <a:p>
+            <a:pPr algn="l" indent="0" marL="0">
+              <a:buNone/>
+            </a:pPr>
+            <a:r>
+              <a:rPr lang="en-US" sz="900" i="1" dirty="0">
+                <a:solidFill>
+                  <a:srgbClr val="1A5DB0"/>
+                </a:solidFill>
+                <a:latin typeface="Arial" pitchFamily="34" charset="0"/>
+                <a:ea typeface="Arial" pitchFamily="34" charset="-122"/>
+                <a:cs typeface="Arial" pitchFamily="34" charset="-120"/>
+              </a:rPr>
+              <a:t>→ Notebooks or ExtractionScripts</a:t>
+            </a:r>
+            <a:endParaRPr lang="en-US" sz="900" dirty="0"/>
+          </a:p>
+        </p:txBody>
+      </p:sp>
+      <p:sp>
+        <p:nvSpPr>
+          <p:cNvPr id="28" name="Shape 26"/>
           <p:cNvSpPr/>
           <p:nvPr/>
         </p:nvSpPr>
         <p:spPr>
           <a:xfrm rot="5400000">
-            <a:off x="6649974" y="1696212"/>
+            <a:off x="6649974" y="2290572"/>
             <a:ext cx="118872" cy="128016"/>
           </a:xfrm>
           <a:prstGeom prst="rtTriangle">
@@ -1998,14 +2193,14 @@
       </p:sp>
       <p:sp>
         <p:nvSpPr>
-          <p:cNvPr id="24" name="Shape 22"/>
-          <p:cNvSpPr/>
-          <p:nvPr/>
-        </p:nvSpPr>
-        <p:spPr>
-          <a:xfrm>
-            <a:off x="6777990" y="1325880"/>
-            <a:ext cx="2000250" cy="868680"/>
+          <p:cNvPr id="29" name="Shape 27"/>
+          <p:cNvSpPr/>
+          <p:nvPr/>
+        </p:nvSpPr>
+        <p:spPr>
+          <a:xfrm>
+            <a:off x="6777990" y="1760220"/>
+            <a:ext cx="2000250" cy="1188720"/>
           </a:xfrm>
           <a:prstGeom prst="rect">
             <a:avLst/>
@@ -2023,14 +2218,14 @@
       </p:sp>
       <p:sp>
         <p:nvSpPr>
-          <p:cNvPr id="25" name="Shape 23"/>
-          <p:cNvSpPr/>
-          <p:nvPr/>
-        </p:nvSpPr>
-        <p:spPr>
-          <a:xfrm>
-            <a:off x="6777990" y="1325880"/>
-            <a:ext cx="73152" cy="868680"/>
+          <p:cNvPr id="30" name="Shape 28"/>
+          <p:cNvSpPr/>
+          <p:nvPr/>
+        </p:nvSpPr>
+        <p:spPr>
+          <a:xfrm>
+            <a:off x="6777990" y="1760220"/>
+            <a:ext cx="73152" cy="1188720"/>
           </a:xfrm>
           <a:prstGeom prst="rect">
             <a:avLst/>
@@ -2048,13 +2243,13 @@
       </p:sp>
       <p:sp>
         <p:nvSpPr>
-          <p:cNvPr id="26" name="Shape 24"/>
-          <p:cNvSpPr/>
-          <p:nvPr/>
-        </p:nvSpPr>
-        <p:spPr>
-          <a:xfrm>
-            <a:off x="6942582" y="1417320"/>
+          <p:cNvPr id="31" name="Shape 29"/>
+          <p:cNvSpPr/>
+          <p:nvPr/>
+        </p:nvSpPr>
+        <p:spPr>
+          <a:xfrm>
+            <a:off x="6942582" y="1851660"/>
             <a:ext cx="384048" cy="384048"/>
           </a:xfrm>
           <a:prstGeom prst="ellipse">
@@ -2073,13 +2268,13 @@
       </p:sp>
       <p:sp>
         <p:nvSpPr>
-          <p:cNvPr id="27" name="Text 25"/>
-          <p:cNvSpPr/>
-          <p:nvPr/>
-        </p:nvSpPr>
-        <p:spPr>
-          <a:xfrm>
-            <a:off x="6942582" y="1417320"/>
+          <p:cNvPr id="32" name="Text 30"/>
+          <p:cNvSpPr/>
+          <p:nvPr/>
+        </p:nvSpPr>
+        <p:spPr>
+          <a:xfrm>
+            <a:off x="6942582" y="1851660"/>
             <a:ext cx="384048" cy="384048"/>
           </a:xfrm>
           <a:prstGeom prst="rect">
@@ -2112,14 +2307,14 @@
       </p:sp>
       <p:sp>
         <p:nvSpPr>
-          <p:cNvPr id="28" name="Text 26"/>
-          <p:cNvSpPr/>
-          <p:nvPr/>
-        </p:nvSpPr>
-        <p:spPr>
-          <a:xfrm>
-            <a:off x="7381494" y="1399032"/>
-            <a:ext cx="1287018" cy="722376"/>
+          <p:cNvPr id="33" name="Text 31"/>
+          <p:cNvSpPr/>
+          <p:nvPr/>
+        </p:nvSpPr>
+        <p:spPr>
+          <a:xfrm>
+            <a:off x="7381494" y="1833372"/>
+            <a:ext cx="1287018" cy="457200"/>
           </a:xfrm>
           <a:prstGeom prst="rect">
             <a:avLst/>
@@ -2135,7 +2330,7 @@
               <a:buNone/>
             </a:pPr>
             <a:r>
-              <a:rPr lang="en-US" sz="1150" b="1" dirty="0">
+              <a:rPr lang="en-US" sz="1100" b="1" dirty="0">
                 <a:solidFill>
                   <a:srgbClr val="1A2530"/>
                 </a:solidFill>
@@ -2145,19 +2340,58 @@
               </a:rPr>
               <a:t>Logic Dev</a:t>
             </a:r>
-            <a:endParaRPr lang="en-US" sz="1150" dirty="0"/>
-          </a:p>
-        </p:txBody>
-      </p:sp>
-      <p:sp>
-        <p:nvSpPr>
-          <p:cNvPr id="29" name="Shape 27"/>
+            <a:endParaRPr lang="en-US" sz="1100" dirty="0"/>
+          </a:p>
+        </p:txBody>
+      </p:sp>
+      <p:sp>
+        <p:nvSpPr>
+          <p:cNvPr id="34" name="Text 32"/>
+          <p:cNvSpPr/>
+          <p:nvPr/>
+        </p:nvSpPr>
+        <p:spPr>
+          <a:xfrm>
+            <a:off x="6942582" y="2382012"/>
+            <a:ext cx="1725930" cy="219456"/>
+          </a:xfrm>
+          <a:prstGeom prst="rect">
+            <a:avLst/>
+          </a:prstGeom>
+          <a:noFill/>
+          <a:ln/>
+        </p:spPr>
+        <p:txBody>
+          <a:bodyPr wrap="square" lIns="0" tIns="0" rIns="0" bIns="0" rtlCol="0" anchor="ctr"/>
+          <a:lstStyle/>
+          <a:p>
+            <a:pPr algn="l" indent="0" marL="0">
+              <a:buNone/>
+            </a:pPr>
+            <a:r>
+              <a:rPr lang="en-US" sz="900" i="1" dirty="0">
+                <a:solidFill>
+                  <a:srgbClr val="1A5DB0"/>
+                </a:solidFill>
+                <a:latin typeface="Arial" pitchFamily="34" charset="0"/>
+                <a:ea typeface="Arial" pitchFamily="34" charset="-122"/>
+                <a:cs typeface="Arial" pitchFamily="34" charset="-120"/>
+              </a:rPr>
+              <a:t>→ Notebooks or Code Files</a:t>
+            </a:r>
+            <a:endParaRPr lang="en-US" sz="900" dirty="0"/>
+          </a:p>
+        </p:txBody>
+      </p:sp>
+      <p:sp>
+        <p:nvSpPr>
+          <p:cNvPr id="35" name="Shape 33"/>
           <p:cNvSpPr/>
           <p:nvPr/>
         </p:nvSpPr>
         <p:spPr>
           <a:xfrm rot="10800000">
-            <a:off x="8641080" y="2235708"/>
+            <a:off x="8641080" y="2990088"/>
             <a:ext cx="146304" cy="146304"/>
           </a:xfrm>
           <a:prstGeom prst="rtTriangle">
@@ -2176,14 +2410,14 @@
       </p:sp>
       <p:sp>
         <p:nvSpPr>
-          <p:cNvPr id="30" name="Shape 28"/>
-          <p:cNvSpPr/>
-          <p:nvPr/>
-        </p:nvSpPr>
-        <p:spPr>
-          <a:xfrm>
-            <a:off x="365760" y="2423160"/>
-            <a:ext cx="1572768" cy="868680"/>
+          <p:cNvPr id="36" name="Shape 34"/>
+          <p:cNvSpPr/>
+          <p:nvPr/>
+        </p:nvSpPr>
+        <p:spPr>
+          <a:xfrm>
+            <a:off x="365760" y="3177540"/>
+            <a:ext cx="1572768" cy="1188720"/>
           </a:xfrm>
           <a:prstGeom prst="rect">
             <a:avLst/>
@@ -2201,14 +2435,14 @@
       </p:sp>
       <p:sp>
         <p:nvSpPr>
-          <p:cNvPr id="31" name="Shape 29"/>
-          <p:cNvSpPr/>
-          <p:nvPr/>
-        </p:nvSpPr>
-        <p:spPr>
-          <a:xfrm>
-            <a:off x="365760" y="2423160"/>
-            <a:ext cx="73152" cy="868680"/>
+          <p:cNvPr id="37" name="Shape 35"/>
+          <p:cNvSpPr/>
+          <p:nvPr/>
+        </p:nvSpPr>
+        <p:spPr>
+          <a:xfrm>
+            <a:off x="365760" y="3177540"/>
+            <a:ext cx="73152" cy="1188720"/>
           </a:xfrm>
           <a:prstGeom prst="rect">
             <a:avLst/>
@@ -2226,13 +2460,13 @@
       </p:sp>
       <p:sp>
         <p:nvSpPr>
-          <p:cNvPr id="32" name="Shape 30"/>
-          <p:cNvSpPr/>
-          <p:nvPr/>
-        </p:nvSpPr>
-        <p:spPr>
-          <a:xfrm>
-            <a:off x="530352" y="2514600"/>
+          <p:cNvPr id="38" name="Shape 36"/>
+          <p:cNvSpPr/>
+          <p:nvPr/>
+        </p:nvSpPr>
+        <p:spPr>
+          <a:xfrm>
+            <a:off x="530352" y="3268980"/>
             <a:ext cx="384048" cy="384048"/>
           </a:xfrm>
           <a:prstGeom prst="ellipse">
@@ -2251,13 +2485,13 @@
       </p:sp>
       <p:sp>
         <p:nvSpPr>
-          <p:cNvPr id="33" name="Text 31"/>
-          <p:cNvSpPr/>
-          <p:nvPr/>
-        </p:nvSpPr>
-        <p:spPr>
-          <a:xfrm>
-            <a:off x="530352" y="2514600"/>
+          <p:cNvPr id="39" name="Text 37"/>
+          <p:cNvSpPr/>
+          <p:nvPr/>
+        </p:nvSpPr>
+        <p:spPr>
+          <a:xfrm>
+            <a:off x="530352" y="3268980"/>
             <a:ext cx="384048" cy="384048"/>
           </a:xfrm>
           <a:prstGeom prst="rect">
@@ -2290,14 +2524,14 @@
       </p:sp>
       <p:sp>
         <p:nvSpPr>
-          <p:cNvPr id="34" name="Text 32"/>
-          <p:cNvSpPr/>
-          <p:nvPr/>
-        </p:nvSpPr>
-        <p:spPr>
-          <a:xfrm>
-            <a:off x="969264" y="2496312"/>
-            <a:ext cx="859536" cy="722376"/>
+          <p:cNvPr id="40" name="Text 38"/>
+          <p:cNvSpPr/>
+          <p:nvPr/>
+        </p:nvSpPr>
+        <p:spPr>
+          <a:xfrm>
+            <a:off x="969264" y="3250692"/>
+            <a:ext cx="859536" cy="457200"/>
           </a:xfrm>
           <a:prstGeom prst="rect">
             <a:avLst/>
@@ -2313,7 +2547,7 @@
               <a:buNone/>
             </a:pPr>
             <a:r>
-              <a:rPr lang="en-US" sz="1150" b="1" dirty="0">
+              <a:rPr lang="en-US" sz="1100" b="1" dirty="0">
                 <a:solidFill>
                   <a:srgbClr val="1A2530"/>
                 </a:solidFill>
@@ -2323,19 +2557,58 @@
               </a:rPr>
               <a:t>Technical Spec Doc</a:t>
             </a:r>
-            <a:endParaRPr lang="en-US" sz="1150" dirty="0"/>
-          </a:p>
-        </p:txBody>
-      </p:sp>
-      <p:sp>
-        <p:nvSpPr>
-          <p:cNvPr id="35" name="Shape 33"/>
+            <a:endParaRPr lang="en-US" sz="1100" dirty="0"/>
+          </a:p>
+        </p:txBody>
+      </p:sp>
+      <p:sp>
+        <p:nvSpPr>
+          <p:cNvPr id="41" name="Text 39"/>
+          <p:cNvSpPr/>
+          <p:nvPr/>
+        </p:nvSpPr>
+        <p:spPr>
+          <a:xfrm>
+            <a:off x="530352" y="3799332"/>
+            <a:ext cx="1298448" cy="219456"/>
+          </a:xfrm>
+          <a:prstGeom prst="rect">
+            <a:avLst/>
+          </a:prstGeom>
+          <a:noFill/>
+          <a:ln/>
+        </p:spPr>
+        <p:txBody>
+          <a:bodyPr wrap="square" lIns="0" tIns="0" rIns="0" bIns="0" rtlCol="0" anchor="ctr"/>
+          <a:lstStyle/>
+          <a:p>
+            <a:pPr algn="l" indent="0" marL="0">
+              <a:buNone/>
+            </a:pPr>
+            <a:r>
+              <a:rPr lang="en-US" sz="900" i="1" dirty="0">
+                <a:solidFill>
+                  <a:srgbClr val="1A5DB0"/>
+                </a:solidFill>
+                <a:latin typeface="Arial" pitchFamily="34" charset="0"/>
+                <a:ea typeface="Arial" pitchFamily="34" charset="-122"/>
+                <a:cs typeface="Arial" pitchFamily="34" charset="-120"/>
+              </a:rPr>
+              <a:t>→ DCT</a:t>
+            </a:r>
+            <a:endParaRPr lang="en-US" sz="900" dirty="0"/>
+          </a:p>
+        </p:txBody>
+      </p:sp>
+      <p:sp>
+        <p:nvSpPr>
+          <p:cNvPr id="42" name="Shape 40"/>
           <p:cNvSpPr/>
           <p:nvPr/>
         </p:nvSpPr>
         <p:spPr>
           <a:xfrm rot="5400000">
-            <a:off x="1947672" y="2793492"/>
+            <a:off x="1947672" y="3707892"/>
             <a:ext cx="118872" cy="128016"/>
           </a:xfrm>
           <a:prstGeom prst="rtTriangle">
@@ -2354,14 +2627,14 @@
       </p:sp>
       <p:sp>
         <p:nvSpPr>
-          <p:cNvPr id="36" name="Shape 34"/>
-          <p:cNvSpPr/>
-          <p:nvPr/>
-        </p:nvSpPr>
-        <p:spPr>
-          <a:xfrm>
-            <a:off x="2075688" y="2423160"/>
-            <a:ext cx="1572768" cy="868680"/>
+          <p:cNvPr id="43" name="Shape 41"/>
+          <p:cNvSpPr/>
+          <p:nvPr/>
+        </p:nvSpPr>
+        <p:spPr>
+          <a:xfrm>
+            <a:off x="2075688" y="3177540"/>
+            <a:ext cx="1572768" cy="1188720"/>
           </a:xfrm>
           <a:prstGeom prst="rect">
             <a:avLst/>
@@ -2379,14 +2652,14 @@
       </p:sp>
       <p:sp>
         <p:nvSpPr>
-          <p:cNvPr id="37" name="Shape 35"/>
-          <p:cNvSpPr/>
-          <p:nvPr/>
-        </p:nvSpPr>
-        <p:spPr>
-          <a:xfrm>
-            <a:off x="2075688" y="2423160"/>
-            <a:ext cx="73152" cy="868680"/>
+          <p:cNvPr id="44" name="Shape 42"/>
+          <p:cNvSpPr/>
+          <p:nvPr/>
+        </p:nvSpPr>
+        <p:spPr>
+          <a:xfrm>
+            <a:off x="2075688" y="3177540"/>
+            <a:ext cx="73152" cy="1188720"/>
           </a:xfrm>
           <a:prstGeom prst="rect">
             <a:avLst/>
@@ -2404,13 +2677,13 @@
       </p:sp>
       <p:sp>
         <p:nvSpPr>
-          <p:cNvPr id="38" name="Shape 36"/>
-          <p:cNvSpPr/>
-          <p:nvPr/>
-        </p:nvSpPr>
-        <p:spPr>
-          <a:xfrm>
-            <a:off x="2240280" y="2514600"/>
+          <p:cNvPr id="45" name="Shape 43"/>
+          <p:cNvSpPr/>
+          <p:nvPr/>
+        </p:nvSpPr>
+        <p:spPr>
+          <a:xfrm>
+            <a:off x="2240280" y="3268980"/>
             <a:ext cx="384048" cy="384048"/>
           </a:xfrm>
           <a:prstGeom prst="ellipse">
@@ -2429,13 +2702,13 @@
       </p:sp>
       <p:sp>
         <p:nvSpPr>
-          <p:cNvPr id="39" name="Text 37"/>
-          <p:cNvSpPr/>
-          <p:nvPr/>
-        </p:nvSpPr>
-        <p:spPr>
-          <a:xfrm>
-            <a:off x="2240280" y="2514600"/>
+          <p:cNvPr id="46" name="Text 44"/>
+          <p:cNvSpPr/>
+          <p:nvPr/>
+        </p:nvSpPr>
+        <p:spPr>
+          <a:xfrm>
+            <a:off x="2240280" y="3268980"/>
             <a:ext cx="384048" cy="384048"/>
           </a:xfrm>
           <a:prstGeom prst="rect">
@@ -2468,14 +2741,14 @@
       </p:sp>
       <p:sp>
         <p:nvSpPr>
-          <p:cNvPr id="40" name="Text 38"/>
-          <p:cNvSpPr/>
-          <p:nvPr/>
-        </p:nvSpPr>
-        <p:spPr>
-          <a:xfrm>
-            <a:off x="2679192" y="2496312"/>
-            <a:ext cx="859536" cy="722376"/>
+          <p:cNvPr id="47" name="Text 45"/>
+          <p:cNvSpPr/>
+          <p:nvPr/>
+        </p:nvSpPr>
+        <p:spPr>
+          <a:xfrm>
+            <a:off x="2679192" y="3250692"/>
+            <a:ext cx="859536" cy="457200"/>
           </a:xfrm>
           <a:prstGeom prst="rect">
             <a:avLst/>
@@ -2491,7 +2764,7 @@
               <a:buNone/>
             </a:pPr>
             <a:r>
-              <a:rPr lang="en-US" sz="1150" b="1" dirty="0">
+              <a:rPr lang="en-US" sz="1100" b="1" dirty="0">
                 <a:solidFill>
                   <a:srgbClr val="1A2530"/>
                 </a:solidFill>
@@ -2501,19 +2774,97 @@
               </a:rPr>
               <a:t>Output Validation</a:t>
             </a:r>
-            <a:endParaRPr lang="en-US" sz="1150" dirty="0"/>
-          </a:p>
-        </p:txBody>
-      </p:sp>
-      <p:sp>
-        <p:nvSpPr>
-          <p:cNvPr id="41" name="Shape 39"/>
+            <a:endParaRPr lang="en-US" sz="1100" dirty="0"/>
+          </a:p>
+        </p:txBody>
+      </p:sp>
+      <p:sp>
+        <p:nvSpPr>
+          <p:cNvPr id="48" name="Text 46"/>
+          <p:cNvSpPr/>
+          <p:nvPr/>
+        </p:nvSpPr>
+        <p:spPr>
+          <a:xfrm>
+            <a:off x="2240280" y="3799332"/>
+            <a:ext cx="1298448" cy="219456"/>
+          </a:xfrm>
+          <a:prstGeom prst="rect">
+            <a:avLst/>
+          </a:prstGeom>
+          <a:noFill/>
+          <a:ln/>
+        </p:spPr>
+        <p:txBody>
+          <a:bodyPr wrap="square" lIns="0" tIns="0" rIns="0" bIns="0" rtlCol="0" anchor="ctr"/>
+          <a:lstStyle/>
+          <a:p>
+            <a:pPr algn="l" indent="0" marL="0">
+              <a:buNone/>
+            </a:pPr>
+            <a:r>
+              <a:rPr lang="en-US" sz="900" i="1" dirty="0">
+                <a:solidFill>
+                  <a:srgbClr val="1A5DB0"/>
+                </a:solidFill>
+                <a:latin typeface="Arial" pitchFamily="34" charset="0"/>
+                <a:ea typeface="Arial" pitchFamily="34" charset="-122"/>
+                <a:cs typeface="Arial" pitchFamily="34" charset="-120"/>
+              </a:rPr>
+              <a:t>→ DCT</a:t>
+            </a:r>
+            <a:endParaRPr lang="en-US" sz="900" dirty="0"/>
+          </a:p>
+        </p:txBody>
+      </p:sp>
+      <p:sp>
+        <p:nvSpPr>
+          <p:cNvPr id="49" name="Text 47"/>
+          <p:cNvSpPr/>
+          <p:nvPr/>
+        </p:nvSpPr>
+        <p:spPr>
+          <a:xfrm>
+            <a:off x="2240280" y="4018788"/>
+            <a:ext cx="1298448" cy="219456"/>
+          </a:xfrm>
+          <a:prstGeom prst="rect">
+            <a:avLst/>
+          </a:prstGeom>
+          <a:noFill/>
+          <a:ln/>
+        </p:spPr>
+        <p:txBody>
+          <a:bodyPr wrap="square" lIns="0" tIns="0" rIns="0" bIns="0" rtlCol="0" anchor="ctr"/>
+          <a:lstStyle/>
+          <a:p>
+            <a:pPr algn="l" indent="0" marL="0">
+              <a:buNone/>
+            </a:pPr>
+            <a:r>
+              <a:rPr lang="en-US" sz="900" i="1" dirty="0">
+                <a:solidFill>
+                  <a:srgbClr val="1A5DB0"/>
+                </a:solidFill>
+                <a:latin typeface="Arial" pitchFamily="34" charset="0"/>
+                <a:ea typeface="Arial" pitchFamily="34" charset="-122"/>
+                <a:cs typeface="Arial" pitchFamily="34" charset="-120"/>
+              </a:rPr>
+              <a:t>→ DEV Query Static Sheet</a:t>
+            </a:r>
+            <a:endParaRPr lang="en-US" sz="900" dirty="0"/>
+          </a:p>
+        </p:txBody>
+      </p:sp>
+      <p:sp>
+        <p:nvSpPr>
+          <p:cNvPr id="50" name="Shape 48"/>
           <p:cNvSpPr/>
           <p:nvPr/>
         </p:nvSpPr>
         <p:spPr>
           <a:xfrm rot="5400000">
-            <a:off x="3657600" y="2793492"/>
+            <a:off x="3657600" y="3707892"/>
             <a:ext cx="118872" cy="128016"/>
           </a:xfrm>
           <a:prstGeom prst="rtTriangle">
@@ -2532,14 +2883,14 @@
       </p:sp>
       <p:sp>
         <p:nvSpPr>
-          <p:cNvPr id="42" name="Shape 40"/>
-          <p:cNvSpPr/>
-          <p:nvPr/>
-        </p:nvSpPr>
-        <p:spPr>
-          <a:xfrm>
-            <a:off x="3785616" y="2423160"/>
-            <a:ext cx="1572768" cy="868680"/>
+          <p:cNvPr id="51" name="Shape 49"/>
+          <p:cNvSpPr/>
+          <p:nvPr/>
+        </p:nvSpPr>
+        <p:spPr>
+          <a:xfrm>
+            <a:off x="3785616" y="3177540"/>
+            <a:ext cx="1572768" cy="1188720"/>
           </a:xfrm>
           <a:prstGeom prst="rect">
             <a:avLst/>
@@ -2557,14 +2908,14 @@
       </p:sp>
       <p:sp>
         <p:nvSpPr>
-          <p:cNvPr id="43" name="Shape 41"/>
-          <p:cNvSpPr/>
-          <p:nvPr/>
-        </p:nvSpPr>
-        <p:spPr>
-          <a:xfrm>
-            <a:off x="3785616" y="2423160"/>
-            <a:ext cx="73152" cy="868680"/>
+          <p:cNvPr id="52" name="Shape 50"/>
+          <p:cNvSpPr/>
+          <p:nvPr/>
+        </p:nvSpPr>
+        <p:spPr>
+          <a:xfrm>
+            <a:off x="3785616" y="3177540"/>
+            <a:ext cx="73152" cy="1188720"/>
           </a:xfrm>
           <a:prstGeom prst="rect">
             <a:avLst/>
@@ -2582,13 +2933,13 @@
       </p:sp>
       <p:sp>
         <p:nvSpPr>
-          <p:cNvPr id="44" name="Shape 42"/>
-          <p:cNvSpPr/>
-          <p:nvPr/>
-        </p:nvSpPr>
-        <p:spPr>
-          <a:xfrm>
-            <a:off x="3950208" y="2514600"/>
+          <p:cNvPr id="53" name="Shape 51"/>
+          <p:cNvSpPr/>
+          <p:nvPr/>
+        </p:nvSpPr>
+        <p:spPr>
+          <a:xfrm>
+            <a:off x="3950208" y="3268980"/>
             <a:ext cx="384048" cy="384048"/>
           </a:xfrm>
           <a:prstGeom prst="ellipse">
@@ -2607,13 +2958,13 @@
       </p:sp>
       <p:sp>
         <p:nvSpPr>
-          <p:cNvPr id="45" name="Text 43"/>
-          <p:cNvSpPr/>
-          <p:nvPr/>
-        </p:nvSpPr>
-        <p:spPr>
-          <a:xfrm>
-            <a:off x="3950208" y="2514600"/>
+          <p:cNvPr id="54" name="Text 52"/>
+          <p:cNvSpPr/>
+          <p:nvPr/>
+        </p:nvSpPr>
+        <p:spPr>
+          <a:xfrm>
+            <a:off x="3950208" y="3268980"/>
             <a:ext cx="384048" cy="384048"/>
           </a:xfrm>
           <a:prstGeom prst="rect">
@@ -2646,14 +2997,14 @@
       </p:sp>
       <p:sp>
         <p:nvSpPr>
-          <p:cNvPr id="46" name="Text 44"/>
-          <p:cNvSpPr/>
-          <p:nvPr/>
-        </p:nvSpPr>
-        <p:spPr>
-          <a:xfrm>
-            <a:off x="4389120" y="2496312"/>
-            <a:ext cx="859536" cy="722376"/>
+          <p:cNvPr id="55" name="Text 53"/>
+          <p:cNvSpPr/>
+          <p:nvPr/>
+        </p:nvSpPr>
+        <p:spPr>
+          <a:xfrm>
+            <a:off x="4389120" y="3250692"/>
+            <a:ext cx="859536" cy="457200"/>
           </a:xfrm>
           <a:prstGeom prst="rect">
             <a:avLst/>
@@ -2669,7 +3020,7 @@
               <a:buNone/>
             </a:pPr>
             <a:r>
-              <a:rPr lang="en-US" sz="1150" b="1" dirty="0">
+              <a:rPr lang="en-US" sz="1100" b="1" dirty="0">
                 <a:solidFill>
                   <a:srgbClr val="1A2530"/>
                 </a:solidFill>
@@ -2679,19 +3030,58 @@
               </a:rPr>
               <a:t>Approval</a:t>
             </a:r>
-            <a:endParaRPr lang="en-US" sz="1150" dirty="0"/>
-          </a:p>
-        </p:txBody>
-      </p:sp>
-      <p:sp>
-        <p:nvSpPr>
-          <p:cNvPr id="47" name="Shape 45"/>
+            <a:endParaRPr lang="en-US" sz="1100" dirty="0"/>
+          </a:p>
+        </p:txBody>
+      </p:sp>
+      <p:sp>
+        <p:nvSpPr>
+          <p:cNvPr id="56" name="Text 54"/>
+          <p:cNvSpPr/>
+          <p:nvPr/>
+        </p:nvSpPr>
+        <p:spPr>
+          <a:xfrm>
+            <a:off x="3950208" y="3799332"/>
+            <a:ext cx="1298448" cy="219456"/>
+          </a:xfrm>
+          <a:prstGeom prst="rect">
+            <a:avLst/>
+          </a:prstGeom>
+          <a:noFill/>
+          <a:ln/>
+        </p:spPr>
+        <p:txBody>
+          <a:bodyPr wrap="square" lIns="0" tIns="0" rIns="0" bIns="0" rtlCol="0" anchor="ctr"/>
+          <a:lstStyle/>
+          <a:p>
+            <a:pPr algn="l" indent="0" marL="0">
+              <a:buNone/>
+            </a:pPr>
+            <a:r>
+              <a:rPr lang="en-US" sz="900" i="1" dirty="0">
+                <a:solidFill>
+                  <a:srgbClr val="1A5DB0"/>
+                </a:solidFill>
+                <a:latin typeface="Arial" pitchFamily="34" charset="0"/>
+                <a:ea typeface="Arial" pitchFamily="34" charset="-122"/>
+                <a:cs typeface="Arial" pitchFamily="34" charset="-120"/>
+              </a:rPr>
+              <a:t>→ Jira Board</a:t>
+            </a:r>
+            <a:endParaRPr lang="en-US" sz="900" dirty="0"/>
+          </a:p>
+        </p:txBody>
+      </p:sp>
+      <p:sp>
+        <p:nvSpPr>
+          <p:cNvPr id="57" name="Shape 55"/>
           <p:cNvSpPr/>
           <p:nvPr/>
         </p:nvSpPr>
         <p:spPr>
           <a:xfrm rot="5400000">
-            <a:off x="5367528" y="2793492"/>
+            <a:off x="5367528" y="3707892"/>
             <a:ext cx="118872" cy="128016"/>
           </a:xfrm>
           <a:prstGeom prst="rtTriangle">
@@ -2710,14 +3100,14 @@
       </p:sp>
       <p:sp>
         <p:nvSpPr>
-          <p:cNvPr id="48" name="Shape 46"/>
-          <p:cNvSpPr/>
-          <p:nvPr/>
-        </p:nvSpPr>
-        <p:spPr>
-          <a:xfrm>
-            <a:off x="5495544" y="2423160"/>
-            <a:ext cx="1572768" cy="868680"/>
+          <p:cNvPr id="58" name="Shape 56"/>
+          <p:cNvSpPr/>
+          <p:nvPr/>
+        </p:nvSpPr>
+        <p:spPr>
+          <a:xfrm>
+            <a:off x="5495544" y="3177540"/>
+            <a:ext cx="1572768" cy="1188720"/>
           </a:xfrm>
           <a:prstGeom prst="rect">
             <a:avLst/>
@@ -2735,14 +3125,14 @@
       </p:sp>
       <p:sp>
         <p:nvSpPr>
-          <p:cNvPr id="49" name="Shape 47"/>
-          <p:cNvSpPr/>
-          <p:nvPr/>
-        </p:nvSpPr>
-        <p:spPr>
-          <a:xfrm>
-            <a:off x="5495544" y="2423160"/>
-            <a:ext cx="73152" cy="868680"/>
+          <p:cNvPr id="59" name="Shape 57"/>
+          <p:cNvSpPr/>
+          <p:nvPr/>
+        </p:nvSpPr>
+        <p:spPr>
+          <a:xfrm>
+            <a:off x="5495544" y="3177540"/>
+            <a:ext cx="73152" cy="1188720"/>
           </a:xfrm>
           <a:prstGeom prst="rect">
             <a:avLst/>
@@ -2760,13 +3150,13 @@
       </p:sp>
       <p:sp>
         <p:nvSpPr>
-          <p:cNvPr id="50" name="Shape 48"/>
-          <p:cNvSpPr/>
-          <p:nvPr/>
-        </p:nvSpPr>
-        <p:spPr>
-          <a:xfrm>
-            <a:off x="5660136" y="2514600"/>
+          <p:cNvPr id="60" name="Shape 58"/>
+          <p:cNvSpPr/>
+          <p:nvPr/>
+        </p:nvSpPr>
+        <p:spPr>
+          <a:xfrm>
+            <a:off x="5660136" y="3268980"/>
             <a:ext cx="384048" cy="384048"/>
           </a:xfrm>
           <a:prstGeom prst="ellipse">
@@ -2785,13 +3175,13 @@
       </p:sp>
       <p:sp>
         <p:nvSpPr>
-          <p:cNvPr id="51" name="Text 49"/>
-          <p:cNvSpPr/>
-          <p:nvPr/>
-        </p:nvSpPr>
-        <p:spPr>
-          <a:xfrm>
-            <a:off x="5660136" y="2514600"/>
+          <p:cNvPr id="61" name="Text 59"/>
+          <p:cNvSpPr/>
+          <p:nvPr/>
+        </p:nvSpPr>
+        <p:spPr>
+          <a:xfrm>
+            <a:off x="5660136" y="3268980"/>
             <a:ext cx="384048" cy="384048"/>
           </a:xfrm>
           <a:prstGeom prst="rect">
@@ -2824,14 +3214,14 @@
       </p:sp>
       <p:sp>
         <p:nvSpPr>
-          <p:cNvPr id="52" name="Text 50"/>
-          <p:cNvSpPr/>
-          <p:nvPr/>
-        </p:nvSpPr>
-        <p:spPr>
-          <a:xfrm>
-            <a:off x="6099048" y="2496312"/>
-            <a:ext cx="859536" cy="722376"/>
+          <p:cNvPr id="62" name="Text 60"/>
+          <p:cNvSpPr/>
+          <p:nvPr/>
+        </p:nvSpPr>
+        <p:spPr>
+          <a:xfrm>
+            <a:off x="6099048" y="3250692"/>
+            <a:ext cx="859536" cy="457200"/>
           </a:xfrm>
           <a:prstGeom prst="rect">
             <a:avLst/>
@@ -2847,7 +3237,7 @@
               <a:buNone/>
             </a:pPr>
             <a:r>
-              <a:rPr lang="en-US" sz="1150" b="1" dirty="0">
+              <a:rPr lang="en-US" sz="1100" b="1" dirty="0">
                 <a:solidFill>
                   <a:srgbClr val="1A2530"/>
                 </a:solidFill>
@@ -2857,19 +3247,58 @@
               </a:rPr>
               <a:t>Deployment</a:t>
             </a:r>
-            <a:endParaRPr lang="en-US" sz="1150" dirty="0"/>
-          </a:p>
-        </p:txBody>
-      </p:sp>
-      <p:sp>
-        <p:nvSpPr>
-          <p:cNvPr id="53" name="Shape 51"/>
+            <a:endParaRPr lang="en-US" sz="1100" dirty="0"/>
+          </a:p>
+        </p:txBody>
+      </p:sp>
+      <p:sp>
+        <p:nvSpPr>
+          <p:cNvPr id="63" name="Text 61"/>
+          <p:cNvSpPr/>
+          <p:nvPr/>
+        </p:nvSpPr>
+        <p:spPr>
+          <a:xfrm>
+            <a:off x="5660136" y="3799332"/>
+            <a:ext cx="1298448" cy="219456"/>
+          </a:xfrm>
+          <a:prstGeom prst="rect">
+            <a:avLst/>
+          </a:prstGeom>
+          <a:noFill/>
+          <a:ln/>
+        </p:spPr>
+        <p:txBody>
+          <a:bodyPr wrap="square" lIns="0" tIns="0" rIns="0" bIns="0" rtlCol="0" anchor="ctr"/>
+          <a:lstStyle/>
+          <a:p>
+            <a:pPr algn="l" indent="0" marL="0">
+              <a:buNone/>
+            </a:pPr>
+            <a:r>
+              <a:rPr lang="en-US" sz="900" i="1" dirty="0">
+                <a:solidFill>
+                  <a:srgbClr val="1A5DB0"/>
+                </a:solidFill>
+                <a:latin typeface="Arial" pitchFamily="34" charset="0"/>
+                <a:ea typeface="Arial" pitchFamily="34" charset="-122"/>
+                <a:cs typeface="Arial" pitchFamily="34" charset="-120"/>
+              </a:rPr>
+              <a:t>→ Evidence</a:t>
+            </a:r>
+            <a:endParaRPr lang="en-US" sz="900" dirty="0"/>
+          </a:p>
+        </p:txBody>
+      </p:sp>
+      <p:sp>
+        <p:nvSpPr>
+          <p:cNvPr id="64" name="Shape 62"/>
           <p:cNvSpPr/>
           <p:nvPr/>
         </p:nvSpPr>
         <p:spPr>
           <a:xfrm rot="5400000">
-            <a:off x="7077456" y="2793492"/>
+            <a:off x="7077456" y="3707892"/>
             <a:ext cx="118872" cy="128016"/>
           </a:xfrm>
           <a:prstGeom prst="rtTriangle">
@@ -2888,14 +3317,14 @@
       </p:sp>
       <p:sp>
         <p:nvSpPr>
-          <p:cNvPr id="54" name="Shape 52"/>
-          <p:cNvSpPr/>
-          <p:nvPr/>
-        </p:nvSpPr>
-        <p:spPr>
-          <a:xfrm>
-            <a:off x="7205472" y="2423160"/>
-            <a:ext cx="1572768" cy="868680"/>
+          <p:cNvPr id="65" name="Shape 63"/>
+          <p:cNvSpPr/>
+          <p:nvPr/>
+        </p:nvSpPr>
+        <p:spPr>
+          <a:xfrm>
+            <a:off x="7205472" y="3177540"/>
+            <a:ext cx="1572768" cy="1188720"/>
           </a:xfrm>
           <a:prstGeom prst="rect">
             <a:avLst/>
@@ -2913,14 +3342,14 @@
       </p:sp>
       <p:sp>
         <p:nvSpPr>
-          <p:cNvPr id="55" name="Shape 53"/>
-          <p:cNvSpPr/>
-          <p:nvPr/>
-        </p:nvSpPr>
-        <p:spPr>
-          <a:xfrm>
-            <a:off x="7205472" y="2423160"/>
-            <a:ext cx="73152" cy="868680"/>
+          <p:cNvPr id="66" name="Shape 64"/>
+          <p:cNvSpPr/>
+          <p:nvPr/>
+        </p:nvSpPr>
+        <p:spPr>
+          <a:xfrm>
+            <a:off x="7205472" y="3177540"/>
+            <a:ext cx="73152" cy="1188720"/>
           </a:xfrm>
           <a:prstGeom prst="rect">
             <a:avLst/>
@@ -2938,13 +3367,13 @@
       </p:sp>
       <p:sp>
         <p:nvSpPr>
-          <p:cNvPr id="56" name="Shape 54"/>
-          <p:cNvSpPr/>
-          <p:nvPr/>
-        </p:nvSpPr>
-        <p:spPr>
-          <a:xfrm>
-            <a:off x="7370064" y="2514600"/>
+          <p:cNvPr id="67" name="Shape 65"/>
+          <p:cNvSpPr/>
+          <p:nvPr/>
+        </p:nvSpPr>
+        <p:spPr>
+          <a:xfrm>
+            <a:off x="7370064" y="3268980"/>
             <a:ext cx="384048" cy="384048"/>
           </a:xfrm>
           <a:prstGeom prst="ellipse">
@@ -2963,13 +3392,13 @@
       </p:sp>
       <p:sp>
         <p:nvSpPr>
-          <p:cNvPr id="57" name="Text 55"/>
-          <p:cNvSpPr/>
-          <p:nvPr/>
-        </p:nvSpPr>
-        <p:spPr>
-          <a:xfrm>
-            <a:off x="7370064" y="2514600"/>
+          <p:cNvPr id="68" name="Text 66"/>
+          <p:cNvSpPr/>
+          <p:nvPr/>
+        </p:nvSpPr>
+        <p:spPr>
+          <a:xfrm>
+            <a:off x="7370064" y="3268980"/>
             <a:ext cx="384048" cy="384048"/>
           </a:xfrm>
           <a:prstGeom prst="rect">
@@ -3002,14 +3431,14 @@
       </p:sp>
       <p:sp>
         <p:nvSpPr>
-          <p:cNvPr id="58" name="Text 56"/>
-          <p:cNvSpPr/>
-          <p:nvPr/>
-        </p:nvSpPr>
-        <p:spPr>
-          <a:xfrm>
-            <a:off x="7808976" y="2496312"/>
-            <a:ext cx="859536" cy="722376"/>
+          <p:cNvPr id="69" name="Text 67"/>
+          <p:cNvSpPr/>
+          <p:nvPr/>
+        </p:nvSpPr>
+        <p:spPr>
+          <a:xfrm>
+            <a:off x="7808976" y="3250692"/>
+            <a:ext cx="859536" cy="457200"/>
           </a:xfrm>
           <a:prstGeom prst="rect">
             <a:avLst/>
@@ -3025,7 +3454,7 @@
               <a:buNone/>
             </a:pPr>
             <a:r>
-              <a:rPr lang="en-US" sz="1150" b="1" dirty="0">
+              <a:rPr lang="en-US" sz="1100" b="1" dirty="0">
                 <a:solidFill>
                   <a:srgbClr val="1A2530"/>
                 </a:solidFill>
@@ -3035,45 +3464,20 @@
               </a:rPr>
               <a:t>Delivery / Document Output</a:t>
             </a:r>
-            <a:endParaRPr lang="en-US" sz="1150" dirty="0"/>
-          </a:p>
-        </p:txBody>
-      </p:sp>
-      <p:sp>
-        <p:nvSpPr>
-          <p:cNvPr id="59" name="Shape 57"/>
-          <p:cNvSpPr/>
-          <p:nvPr/>
-        </p:nvSpPr>
-        <p:spPr>
-          <a:xfrm>
-            <a:off x="365760" y="3611880"/>
-            <a:ext cx="8412480" cy="1188720"/>
-          </a:xfrm>
-          <a:prstGeom prst="rect">
-            <a:avLst/>
-          </a:prstGeom>
-          <a:solidFill>
-            <a:srgbClr val="F4F6F8"/>
-          </a:solidFill>
-          <a:ln w="6350">
-            <a:solidFill>
-              <a:srgbClr val="D6DBE2"/>
-            </a:solidFill>
-            <a:prstDash val="solid"/>
-          </a:ln>
-        </p:spPr>
-      </p:sp>
-      <p:sp>
-        <p:nvSpPr>
-          <p:cNvPr id="60" name="Text 58"/>
-          <p:cNvSpPr/>
-          <p:nvPr/>
-        </p:nvSpPr>
-        <p:spPr>
-          <a:xfrm>
-            <a:off x="502920" y="3657600"/>
-            <a:ext cx="1828800" cy="228600"/>
+            <a:endParaRPr lang="en-US" sz="1100" dirty="0"/>
+          </a:p>
+        </p:txBody>
+      </p:sp>
+      <p:sp>
+        <p:nvSpPr>
+          <p:cNvPr id="70" name="Text 68"/>
+          <p:cNvSpPr/>
+          <p:nvPr/>
+        </p:nvSpPr>
+        <p:spPr>
+          <a:xfrm>
+            <a:off x="7370064" y="3799332"/>
+            <a:ext cx="1298448" cy="219456"/>
           </a:xfrm>
           <a:prstGeom prst="rect">
             <a:avLst/>
@@ -3089,266 +3493,42 @@
               <a:buNone/>
             </a:pPr>
             <a:r>
-              <a:rPr lang="en-US" sz="1000" b="1" dirty="0">
-                <a:solidFill>
-                  <a:srgbClr val="1B365D"/>
-                </a:solidFill>
-                <a:latin typeface="Arial" pitchFamily="34" charset="0"/>
-                <a:ea typeface="Arial" pitchFamily="34" charset="-122"/>
-                <a:cs typeface="Arial" pitchFamily="34" charset="-120"/>
-              </a:rPr>
-              <a:t>Key Artifacts</a:t>
-            </a:r>
-            <a:endParaRPr lang="en-US" sz="1000" dirty="0"/>
-          </a:p>
-        </p:txBody>
-      </p:sp>
-      <p:sp>
-        <p:nvSpPr>
-          <p:cNvPr id="61" name="Text 59"/>
-          <p:cNvSpPr/>
-          <p:nvPr/>
-        </p:nvSpPr>
-        <p:spPr>
-          <a:xfrm>
-            <a:off x="502920" y="3904488"/>
-            <a:ext cx="4023360" cy="868680"/>
-          </a:xfrm>
-          <a:prstGeom prst="rect">
-            <a:avLst/>
-          </a:prstGeom>
-          <a:noFill/>
-          <a:ln/>
-        </p:spPr>
-        <p:txBody>
-          <a:bodyPr wrap="square" lIns="0" tIns="0" rIns="0" bIns="0" rtlCol="0" anchor="t"/>
+              <a:rPr lang="en-US" sz="900" i="1" dirty="0">
+                <a:solidFill>
+                  <a:srgbClr val="1A5DB0"/>
+                </a:solidFill>
+                <a:latin typeface="Arial" pitchFamily="34" charset="0"/>
+                <a:ea typeface="Arial" pitchFamily="34" charset="-122"/>
+                <a:cs typeface="Arial" pitchFamily="34" charset="-120"/>
+              </a:rPr>
+              <a:t>→ Evidence</a:t>
+            </a:r>
+            <a:endParaRPr lang="en-US" sz="900" dirty="0"/>
+          </a:p>
+        </p:txBody>
+      </p:sp>
+      <p:sp>
+        <p:nvSpPr>
+          <p:cNvPr id="71" name="Text 69"/>
+          <p:cNvSpPr/>
+          <p:nvPr/>
+        </p:nvSpPr>
+        <p:spPr>
+          <a:xfrm>
+            <a:off x="365760" y="4850892"/>
+            <a:ext cx="7315200" cy="201168"/>
+          </a:xfrm>
+          <a:prstGeom prst="rect">
+            <a:avLst/>
+          </a:prstGeom>
+          <a:noFill/>
+          <a:ln/>
+        </p:spPr>
+        <p:txBody>
+          <a:bodyPr wrap="square" lIns="0" tIns="0" rIns="0" bIns="0" rtlCol="0" anchor="ctr"/>
           <a:lstStyle/>
           <a:p>
             <a:pPr algn="l" indent="0" marL="0">
-              <a:spcAft>
-                <a:spcPts val="100"/>
-              </a:spcAft>
-              <a:buNone/>
-            </a:pPr>
-            <a:r>
-              <a:rPr lang="en-US" sz="850" dirty="0">
-                <a:solidFill>
-                  <a:srgbClr val="1A2530"/>
-                </a:solidFill>
-                <a:latin typeface="Arial" pitchFamily="34" charset="0"/>
-                <a:ea typeface="Arial" pitchFamily="34" charset="-122"/>
-                <a:cs typeface="Arial" pitchFamily="34" charset="-120"/>
-              </a:rPr>
-              <a:t>0.  Jira intake ticket · DCT</a:t>
-            </a:r>
-            <a:endParaRPr lang="en-US" sz="850" dirty="0"/>
-          </a:p>
-          <a:p>
-            <a:pPr algn="l" indent="0" marL="0">
-              <a:spcAft>
-                <a:spcPts val="100"/>
-              </a:spcAft>
-              <a:buNone/>
-            </a:pPr>
-            <a:r>
-              <a:rPr lang="en-US" sz="850" dirty="0">
-                <a:solidFill>
-                  <a:srgbClr val="1A2530"/>
-                </a:solidFill>
-                <a:latin typeface="Arial" pitchFamily="34" charset="0"/>
-                <a:ea typeface="Arial" pitchFamily="34" charset="-122"/>
-                <a:cs typeface="Arial" pitchFamily="34" charset="-120"/>
-              </a:rPr>
-              <a:t>1.  Scope &amp; Requirements doc · SOW</a:t>
-            </a:r>
-            <a:endParaRPr lang="en-US" sz="850" dirty="0"/>
-          </a:p>
-          <a:p>
-            <a:pPr algn="l" indent="0" marL="0">
-              <a:spcAft>
-                <a:spcPts val="100"/>
-              </a:spcAft>
-              <a:buNone/>
-            </a:pPr>
-            <a:r>
-              <a:rPr lang="en-US" sz="850" dirty="0">
-                <a:solidFill>
-                  <a:srgbClr val="1A2530"/>
-                </a:solidFill>
-                <a:latin typeface="Arial" pitchFamily="34" charset="0"/>
-                <a:ea typeface="Arial" pitchFamily="34" charset="-122"/>
-                <a:cs typeface="Arial" pitchFamily="34" charset="-120"/>
-              </a:rPr>
-              <a:t>2.  Extracted datasets (CA AZ) · extraction logs</a:t>
-            </a:r>
-            <a:endParaRPr lang="en-US" sz="850" dirty="0"/>
-          </a:p>
-          <a:p>
-            <a:pPr algn="l" indent="0" marL="0">
-              <a:spcAft>
-                <a:spcPts val="100"/>
-              </a:spcAft>
-              <a:buNone/>
-            </a:pPr>
-            <a:r>
-              <a:rPr lang="en-US" sz="850" dirty="0">
-                <a:solidFill>
-                  <a:srgbClr val="1A2530"/>
-                </a:solidFill>
-                <a:latin typeface="Arial" pitchFamily="34" charset="0"/>
-                <a:ea typeface="Arial" pitchFamily="34" charset="-122"/>
-                <a:cs typeface="Arial" pitchFamily="34" charset="-120"/>
-              </a:rPr>
-              <a:t>3.  Python-SQL code in Git · Databricks notebooks</a:t>
-            </a:r>
-            <a:endParaRPr lang="en-US" sz="850" dirty="0"/>
-          </a:p>
-          <a:p>
-            <a:pPr algn="l" indent="0" marL="0">
-              <a:spcAft>
-                <a:spcPts val="100"/>
-              </a:spcAft>
-              <a:buNone/>
-            </a:pPr>
-            <a:r>
-              <a:rPr lang="en-US" sz="850" dirty="0">
-                <a:solidFill>
-                  <a:srgbClr val="1A2530"/>
-                </a:solidFill>
-                <a:latin typeface="Arial" pitchFamily="34" charset="0"/>
-                <a:ea typeface="Arial" pitchFamily="34" charset="-122"/>
-                <a:cs typeface="Arial" pitchFamily="34" charset="-120"/>
-              </a:rPr>
-              <a:t>4.  Tech Spec doc · source-to-report mapping</a:t>
-            </a:r>
-            <a:endParaRPr lang="en-US" sz="850" dirty="0"/>
-          </a:p>
-        </p:txBody>
-      </p:sp>
-      <p:sp>
-        <p:nvSpPr>
-          <p:cNvPr id="62" name="Text 60"/>
-          <p:cNvSpPr/>
-          <p:nvPr/>
-        </p:nvSpPr>
-        <p:spPr>
-          <a:xfrm>
-            <a:off x="4709160" y="3904488"/>
-            <a:ext cx="4023360" cy="868680"/>
-          </a:xfrm>
-          <a:prstGeom prst="rect">
-            <a:avLst/>
-          </a:prstGeom>
-          <a:noFill/>
-          <a:ln/>
-        </p:spPr>
-        <p:txBody>
-          <a:bodyPr wrap="square" lIns="0" tIns="0" rIns="0" bIns="0" rtlCol="0" anchor="t"/>
-          <a:lstStyle/>
-          <a:p>
-            <a:pPr algn="l" indent="0" marL="0">
-              <a:spcAft>
-                <a:spcPts val="100"/>
-              </a:spcAft>
-              <a:buNone/>
-            </a:pPr>
-            <a:r>
-              <a:rPr lang="en-US" sz="850" dirty="0">
-                <a:solidFill>
-                  <a:srgbClr val="1A2530"/>
-                </a:solidFill>
-                <a:latin typeface="Arial" pitchFamily="34" charset="0"/>
-                <a:ea typeface="Arial" pitchFamily="34" charset="-122"/>
-                <a:cs typeface="Arial" pitchFamily="34" charset="-120"/>
-              </a:rPr>
-              <a:t>5.  Output validation report · static sheet</a:t>
-            </a:r>
-            <a:endParaRPr lang="en-US" sz="850" dirty="0"/>
-          </a:p>
-          <a:p>
-            <a:pPr algn="l" indent="0" marL="0">
-              <a:spcAft>
-                <a:spcPts val="100"/>
-              </a:spcAft>
-              <a:buNone/>
-            </a:pPr>
-            <a:r>
-              <a:rPr lang="en-US" sz="850" dirty="0">
-                <a:solidFill>
-                  <a:srgbClr val="1A2530"/>
-                </a:solidFill>
-                <a:latin typeface="Arial" pitchFamily="34" charset="0"/>
-                <a:ea typeface="Arial" pitchFamily="34" charset="-122"/>
-                <a:cs typeface="Arial" pitchFamily="34" charset="-120"/>
-              </a:rPr>
-              <a:t>6.  PO APPROVED Jira state · approval record</a:t>
-            </a:r>
-            <a:endParaRPr lang="en-US" sz="850" dirty="0"/>
-          </a:p>
-          <a:p>
-            <a:pPr algn="l" indent="0" marL="0">
-              <a:spcAft>
-                <a:spcPts val="100"/>
-              </a:spcAft>
-              <a:buNone/>
-            </a:pPr>
-            <a:r>
-              <a:rPr lang="en-US" sz="850" dirty="0">
-                <a:solidFill>
-                  <a:srgbClr val="1A2530"/>
-                </a:solidFill>
-                <a:latin typeface="Arial" pitchFamily="34" charset="0"/>
-                <a:ea typeface="Arial" pitchFamily="34" charset="-122"/>
-                <a:cs typeface="Arial" pitchFamily="34" charset="-120"/>
-              </a:rPr>
-              <a:t>7.  Deployment log · release record</a:t>
-            </a:r>
-            <a:endParaRPr lang="en-US" sz="850" dirty="0"/>
-          </a:p>
-          <a:p>
-            <a:pPr algn="l" indent="0" marL="0">
-              <a:spcAft>
-                <a:spcPts val="100"/>
-              </a:spcAft>
-              <a:buNone/>
-            </a:pPr>
-            <a:r>
-              <a:rPr lang="en-US" sz="850" dirty="0">
-                <a:solidFill>
-                  <a:srgbClr val="1A2530"/>
-                </a:solidFill>
-                <a:latin typeface="Arial" pitchFamily="34" charset="0"/>
-                <a:ea typeface="Arial" pitchFamily="34" charset="-122"/>
-                <a:cs typeface="Arial" pitchFamily="34" charset="-120"/>
-              </a:rPr>
-              <a:t>8.  Final output files · delivery confirmation</a:t>
-            </a:r>
-            <a:endParaRPr lang="en-US" sz="850" dirty="0"/>
-          </a:p>
-        </p:txBody>
-      </p:sp>
-      <p:sp>
-        <p:nvSpPr>
-          <p:cNvPr id="63" name="Text 61"/>
-          <p:cNvSpPr/>
-          <p:nvPr/>
-        </p:nvSpPr>
-        <p:spPr>
-          <a:xfrm>
-            <a:off x="365760" y="4850892"/>
-            <a:ext cx="5486400" cy="201168"/>
-          </a:xfrm>
-          <a:prstGeom prst="rect">
-            <a:avLst/>
-          </a:prstGeom>
-          <a:noFill/>
-          <a:ln/>
-        </p:spPr>
-        <p:txBody>
-          <a:bodyPr wrap="square" lIns="0" tIns="0" rIns="0" bIns="0" rtlCol="0" anchor="ctr"/>
-          <a:lstStyle/>
-          <a:p>
-            <a:pPr algn="l" indent="0" marL="0">
               <a:buNone/>
             </a:pPr>
             <a:r>
@@ -3360,7 +3540,7 @@
                 <a:ea typeface="Arial" pitchFamily="34" charset="-122"/>
                 <a:cs typeface="Arial" pitchFamily="34" charset="-120"/>
               </a:rPr>
-              <a:t>FCRM Risk Assessment FY2025 · MCC Team · Internal</a:t>
+              <a:t>FCRM Risk Assessment FY2025 · MCC Team · Internal · Right-click any → label to add a hyperlink</a:t>
             </a:r>
             <a:endParaRPr lang="en-US" sz="800" dirty="0"/>
           </a:p>
@@ -3368,7 +3548,7 @@
       </p:sp>
       <p:sp>
         <p:nvSpPr>
-          <p:cNvPr id="64" name="Text 62"/>
+          <p:cNvPr id="72" name="Text 70"/>
           <p:cNvSpPr/>
           <p:nvPr/>
         </p:nvSpPr>
@@ -3587,8 +3767,8 @@
         </p:nvSpPr>
         <p:spPr>
           <a:xfrm>
-            <a:off x="365760" y="1325880"/>
-            <a:ext cx="2000250" cy="868680"/>
+            <a:off x="365760" y="1760220"/>
+            <a:ext cx="2000250" cy="1188720"/>
           </a:xfrm>
           <a:prstGeom prst="rect">
             <a:avLst/>
@@ -3612,8 +3792,8 @@
         </p:nvSpPr>
         <p:spPr>
           <a:xfrm>
-            <a:off x="365760" y="1325880"/>
-            <a:ext cx="73152" cy="868680"/>
+            <a:off x="365760" y="1760220"/>
+            <a:ext cx="73152" cy="1188720"/>
           </a:xfrm>
           <a:prstGeom prst="rect">
             <a:avLst/>
@@ -3637,7 +3817,7 @@
         </p:nvSpPr>
         <p:spPr>
           <a:xfrm>
-            <a:off x="530352" y="1417320"/>
+            <a:off x="530352" y="1851660"/>
             <a:ext cx="384048" cy="384048"/>
           </a:xfrm>
           <a:prstGeom prst="ellipse">
@@ -3662,7 +3842,7 @@
         </p:nvSpPr>
         <p:spPr>
           <a:xfrm>
-            <a:off x="530352" y="1417320"/>
+            <a:off x="530352" y="1851660"/>
             <a:ext cx="384048" cy="384048"/>
           </a:xfrm>
           <a:prstGeom prst="rect">
@@ -3701,8 +3881,8 @@
         </p:nvSpPr>
         <p:spPr>
           <a:xfrm>
-            <a:off x="969264" y="1399032"/>
-            <a:ext cx="1287018" cy="722376"/>
+            <a:off x="969264" y="1833372"/>
+            <a:ext cx="1287018" cy="457200"/>
           </a:xfrm>
           <a:prstGeom prst="rect">
             <a:avLst/>
@@ -3718,7 +3898,7 @@
               <a:buNone/>
             </a:pPr>
             <a:r>
-              <a:rPr lang="en-US" sz="1150" b="1" dirty="0">
+              <a:rPr lang="en-US" sz="1100" b="1" dirty="0">
                 <a:solidFill>
                   <a:srgbClr val="1A2530"/>
                 </a:solidFill>
@@ -3728,19 +3908,78 @@
               </a:rPr>
               <a:t>Validation Planning</a:t>
             </a:r>
-            <a:endParaRPr lang="en-US" sz="1150" dirty="0"/>
-          </a:p>
-        </p:txBody>
-      </p:sp>
-      <p:sp>
-        <p:nvSpPr>
-          <p:cNvPr id="11" name="Shape 9"/>
+            <a:endParaRPr lang="en-US" sz="1100" dirty="0"/>
+          </a:p>
+        </p:txBody>
+      </p:sp>
+      <p:sp>
+        <p:nvSpPr>
+          <p:cNvPr id="11" name="Text 9"/>
+          <p:cNvSpPr/>
+          <p:nvPr/>
+        </p:nvSpPr>
+        <p:spPr>
+          <a:xfrm>
+            <a:off x="530352" y="2382012"/>
+            <a:ext cx="1689354" cy="512064"/>
+          </a:xfrm>
+          <a:prstGeom prst="rect">
+            <a:avLst/>
+          </a:prstGeom>
+          <a:noFill/>
+          <a:ln/>
+        </p:spPr>
+        <p:txBody>
+          <a:bodyPr wrap="square" lIns="0" tIns="0" rIns="0" bIns="0" rtlCol="0" anchor="t"/>
+          <a:lstStyle/>
+          <a:p>
+            <a:pPr algn="l" indent="0" marL="0">
+              <a:lnSpc>
+                <a:spcPct val="95000"/>
+              </a:lnSpc>
+              <a:buNone/>
+            </a:pPr>
+            <a:r>
+              <a:rPr lang="en-US" sz="850" b="1" dirty="0">
+                <a:solidFill>
+                  <a:srgbClr val="6B7785"/>
+                </a:solidFill>
+                <a:latin typeface="Arial" pitchFamily="34" charset="0"/>
+                <a:ea typeface="Arial" pitchFamily="34" charset="-122"/>
+                <a:cs typeface="Arial" pitchFamily="34" charset="-120"/>
+              </a:rPr>
+              <a:t>Key artifacts:  </a:t>
+            </a:r>
+            <a:pPr algn="l" indent="0" marL="0">
+              <a:lnSpc>
+                <a:spcPct val="95000"/>
+              </a:lnSpc>
+              <a:buNone/>
+            </a:pPr>
+            <a:r>
+              <a:rPr lang="en-US" sz="850" dirty="0">
+                <a:solidFill>
+                  <a:srgbClr val="6B7785"/>
+                </a:solidFill>
+                <a:latin typeface="Arial" pitchFamily="34" charset="0"/>
+                <a:ea typeface="Arial" pitchFamily="34" charset="-122"/>
+                <a:cs typeface="Arial" pitchFamily="34" charset="-120"/>
+              </a:rPr>
+              <a:t>Validation Plan, Risk Assessment Matrix</a:t>
+            </a:r>
+            <a:endParaRPr lang="en-US" sz="850" dirty="0"/>
+          </a:p>
+        </p:txBody>
+      </p:sp>
+      <p:sp>
+        <p:nvSpPr>
+          <p:cNvPr id="12" name="Shape 10"/>
           <p:cNvSpPr/>
           <p:nvPr/>
         </p:nvSpPr>
         <p:spPr>
           <a:xfrm rot="5400000">
-            <a:off x="2375154" y="1696212"/>
+            <a:off x="2375154" y="2290572"/>
             <a:ext cx="118872" cy="128016"/>
           </a:xfrm>
           <a:prstGeom prst="rtTriangle">
@@ -3759,14 +3998,14 @@
       </p:sp>
       <p:sp>
         <p:nvSpPr>
-          <p:cNvPr id="12" name="Shape 10"/>
-          <p:cNvSpPr/>
-          <p:nvPr/>
-        </p:nvSpPr>
-        <p:spPr>
-          <a:xfrm>
-            <a:off x="2503170" y="1325880"/>
-            <a:ext cx="2000250" cy="868680"/>
+          <p:cNvPr id="13" name="Shape 11"/>
+          <p:cNvSpPr/>
+          <p:nvPr/>
+        </p:nvSpPr>
+        <p:spPr>
+          <a:xfrm>
+            <a:off x="2503170" y="1760220"/>
+            <a:ext cx="2000250" cy="1188720"/>
           </a:xfrm>
           <a:prstGeom prst="rect">
             <a:avLst/>
@@ -3784,14 +4023,14 @@
       </p:sp>
       <p:sp>
         <p:nvSpPr>
-          <p:cNvPr id="13" name="Shape 11"/>
-          <p:cNvSpPr/>
-          <p:nvPr/>
-        </p:nvSpPr>
-        <p:spPr>
-          <a:xfrm>
-            <a:off x="2503170" y="1325880"/>
-            <a:ext cx="73152" cy="868680"/>
+          <p:cNvPr id="14" name="Shape 12"/>
+          <p:cNvSpPr/>
+          <p:nvPr/>
+        </p:nvSpPr>
+        <p:spPr>
+          <a:xfrm>
+            <a:off x="2503170" y="1760220"/>
+            <a:ext cx="73152" cy="1188720"/>
           </a:xfrm>
           <a:prstGeom prst="rect">
             <a:avLst/>
@@ -3809,13 +4048,13 @@
       </p:sp>
       <p:sp>
         <p:nvSpPr>
-          <p:cNvPr id="14" name="Shape 12"/>
-          <p:cNvSpPr/>
-          <p:nvPr/>
-        </p:nvSpPr>
-        <p:spPr>
-          <a:xfrm>
-            <a:off x="2667762" y="1417320"/>
+          <p:cNvPr id="15" name="Shape 13"/>
+          <p:cNvSpPr/>
+          <p:nvPr/>
+        </p:nvSpPr>
+        <p:spPr>
+          <a:xfrm>
+            <a:off x="2667762" y="1851660"/>
             <a:ext cx="384048" cy="384048"/>
           </a:xfrm>
           <a:prstGeom prst="ellipse">
@@ -3834,13 +4073,13 @@
       </p:sp>
       <p:sp>
         <p:nvSpPr>
-          <p:cNvPr id="15" name="Text 13"/>
-          <p:cNvSpPr/>
-          <p:nvPr/>
-        </p:nvSpPr>
-        <p:spPr>
-          <a:xfrm>
-            <a:off x="2667762" y="1417320"/>
+          <p:cNvPr id="16" name="Text 14"/>
+          <p:cNvSpPr/>
+          <p:nvPr/>
+        </p:nvSpPr>
+        <p:spPr>
+          <a:xfrm>
+            <a:off x="2667762" y="1851660"/>
             <a:ext cx="384048" cy="384048"/>
           </a:xfrm>
           <a:prstGeom prst="rect">
@@ -3873,14 +4112,14 @@
       </p:sp>
       <p:sp>
         <p:nvSpPr>
-          <p:cNvPr id="16" name="Text 14"/>
-          <p:cNvSpPr/>
-          <p:nvPr/>
-        </p:nvSpPr>
-        <p:spPr>
-          <a:xfrm>
-            <a:off x="3106674" y="1399032"/>
-            <a:ext cx="1287018" cy="722376"/>
+          <p:cNvPr id="17" name="Text 15"/>
+          <p:cNvSpPr/>
+          <p:nvPr/>
+        </p:nvSpPr>
+        <p:spPr>
+          <a:xfrm>
+            <a:off x="3106674" y="1833372"/>
+            <a:ext cx="1287018" cy="457200"/>
           </a:xfrm>
           <a:prstGeom prst="rect">
             <a:avLst/>
@@ -3896,7 +4135,7 @@
               <a:buNone/>
             </a:pPr>
             <a:r>
-              <a:rPr lang="en-US" sz="1150" b="1" dirty="0">
+              <a:rPr lang="en-US" sz="1100" b="1" dirty="0">
                 <a:solidFill>
                   <a:srgbClr val="1A2530"/>
                 </a:solidFill>
@@ -3906,19 +4145,78 @@
               </a:rPr>
               <a:t>Data Quality Checks</a:t>
             </a:r>
-            <a:endParaRPr lang="en-US" sz="1150" dirty="0"/>
-          </a:p>
-        </p:txBody>
-      </p:sp>
-      <p:sp>
-        <p:nvSpPr>
-          <p:cNvPr id="17" name="Shape 15"/>
+            <a:endParaRPr lang="en-US" sz="1100" dirty="0"/>
+          </a:p>
+        </p:txBody>
+      </p:sp>
+      <p:sp>
+        <p:nvSpPr>
+          <p:cNvPr id="18" name="Text 16"/>
+          <p:cNvSpPr/>
+          <p:nvPr/>
+        </p:nvSpPr>
+        <p:spPr>
+          <a:xfrm>
+            <a:off x="2667762" y="2382012"/>
+            <a:ext cx="1689354" cy="512064"/>
+          </a:xfrm>
+          <a:prstGeom prst="rect">
+            <a:avLst/>
+          </a:prstGeom>
+          <a:noFill/>
+          <a:ln/>
+        </p:spPr>
+        <p:txBody>
+          <a:bodyPr wrap="square" lIns="0" tIns="0" rIns="0" bIns="0" rtlCol="0" anchor="t"/>
+          <a:lstStyle/>
+          <a:p>
+            <a:pPr algn="l" indent="0" marL="0">
+              <a:lnSpc>
+                <a:spcPct val="95000"/>
+              </a:lnSpc>
+              <a:buNone/>
+            </a:pPr>
+            <a:r>
+              <a:rPr lang="en-US" sz="850" b="1" dirty="0">
+                <a:solidFill>
+                  <a:srgbClr val="6B7785"/>
+                </a:solidFill>
+                <a:latin typeface="Arial" pitchFamily="34" charset="0"/>
+                <a:ea typeface="Arial" pitchFamily="34" charset="-122"/>
+                <a:cs typeface="Arial" pitchFamily="34" charset="-120"/>
+              </a:rPr>
+              <a:t>Key artifacts:  </a:t>
+            </a:r>
+            <a:pPr algn="l" indent="0" marL="0">
+              <a:lnSpc>
+                <a:spcPct val="95000"/>
+              </a:lnSpc>
+              <a:buNone/>
+            </a:pPr>
+            <a:r>
+              <a:rPr lang="en-US" sz="850" dirty="0">
+                <a:solidFill>
+                  <a:srgbClr val="6B7785"/>
+                </a:solidFill>
+                <a:latin typeface="Arial" pitchFamily="34" charset="0"/>
+                <a:ea typeface="Arial" pitchFamily="34" charset="-122"/>
+                <a:cs typeface="Arial" pitchFamily="34" charset="-120"/>
+              </a:rPr>
+              <a:t>DQ % (availability_pct), queries used, profiling reports, issue log</a:t>
+            </a:r>
+            <a:endParaRPr lang="en-US" sz="850" dirty="0"/>
+          </a:p>
+        </p:txBody>
+      </p:sp>
+      <p:sp>
+        <p:nvSpPr>
+          <p:cNvPr id="19" name="Shape 17"/>
           <p:cNvSpPr/>
           <p:nvPr/>
         </p:nvSpPr>
         <p:spPr>
           <a:xfrm rot="5400000">
-            <a:off x="4512564" y="1696212"/>
+            <a:off x="4512564" y="2290572"/>
             <a:ext cx="118872" cy="128016"/>
           </a:xfrm>
           <a:prstGeom prst="rtTriangle">
@@ -3937,14 +4235,14 @@
       </p:sp>
       <p:sp>
         <p:nvSpPr>
-          <p:cNvPr id="18" name="Shape 16"/>
-          <p:cNvSpPr/>
-          <p:nvPr/>
-        </p:nvSpPr>
-        <p:spPr>
-          <a:xfrm>
-            <a:off x="4640580" y="1325880"/>
-            <a:ext cx="2000250" cy="868680"/>
+          <p:cNvPr id="20" name="Shape 18"/>
+          <p:cNvSpPr/>
+          <p:nvPr/>
+        </p:nvSpPr>
+        <p:spPr>
+          <a:xfrm>
+            <a:off x="4640580" y="1760220"/>
+            <a:ext cx="2000250" cy="1188720"/>
           </a:xfrm>
           <a:prstGeom prst="rect">
             <a:avLst/>
@@ -3962,14 +4260,14 @@
       </p:sp>
       <p:sp>
         <p:nvSpPr>
-          <p:cNvPr id="19" name="Shape 17"/>
-          <p:cNvSpPr/>
-          <p:nvPr/>
-        </p:nvSpPr>
-        <p:spPr>
-          <a:xfrm>
-            <a:off x="4640580" y="1325880"/>
-            <a:ext cx="73152" cy="868680"/>
+          <p:cNvPr id="21" name="Shape 19"/>
+          <p:cNvSpPr/>
+          <p:nvPr/>
+        </p:nvSpPr>
+        <p:spPr>
+          <a:xfrm>
+            <a:off x="4640580" y="1760220"/>
+            <a:ext cx="73152" cy="1188720"/>
           </a:xfrm>
           <a:prstGeom prst="rect">
             <a:avLst/>
@@ -3987,13 +4285,13 @@
       </p:sp>
       <p:sp>
         <p:nvSpPr>
-          <p:cNvPr id="20" name="Shape 18"/>
-          <p:cNvSpPr/>
-          <p:nvPr/>
-        </p:nvSpPr>
-        <p:spPr>
-          <a:xfrm>
-            <a:off x="4805172" y="1417320"/>
+          <p:cNvPr id="22" name="Shape 20"/>
+          <p:cNvSpPr/>
+          <p:nvPr/>
+        </p:nvSpPr>
+        <p:spPr>
+          <a:xfrm>
+            <a:off x="4805172" y="1851660"/>
             <a:ext cx="384048" cy="384048"/>
           </a:xfrm>
           <a:prstGeom prst="ellipse">
@@ -4012,13 +4310,13 @@
       </p:sp>
       <p:sp>
         <p:nvSpPr>
-          <p:cNvPr id="21" name="Text 19"/>
-          <p:cNvSpPr/>
-          <p:nvPr/>
-        </p:nvSpPr>
-        <p:spPr>
-          <a:xfrm>
-            <a:off x="4805172" y="1417320"/>
+          <p:cNvPr id="23" name="Text 21"/>
+          <p:cNvSpPr/>
+          <p:nvPr/>
+        </p:nvSpPr>
+        <p:spPr>
+          <a:xfrm>
+            <a:off x="4805172" y="1851660"/>
             <a:ext cx="384048" cy="384048"/>
           </a:xfrm>
           <a:prstGeom prst="rect">
@@ -4051,14 +4349,14 @@
       </p:sp>
       <p:sp>
         <p:nvSpPr>
-          <p:cNvPr id="22" name="Text 20"/>
-          <p:cNvSpPr/>
-          <p:nvPr/>
-        </p:nvSpPr>
-        <p:spPr>
-          <a:xfrm>
-            <a:off x="5244084" y="1399032"/>
-            <a:ext cx="1287018" cy="722376"/>
+          <p:cNvPr id="24" name="Text 22"/>
+          <p:cNvSpPr/>
+          <p:nvPr/>
+        </p:nvSpPr>
+        <p:spPr>
+          <a:xfrm>
+            <a:off x="5244084" y="1833372"/>
+            <a:ext cx="1287018" cy="457200"/>
           </a:xfrm>
           <a:prstGeom prst="rect">
             <a:avLst/>
@@ -4074,7 +4372,7 @@
               <a:buNone/>
             </a:pPr>
             <a:r>
-              <a:rPr lang="en-US" sz="1150" b="1" dirty="0">
+              <a:rPr lang="en-US" sz="1100" b="1" dirty="0">
                 <a:solidFill>
                   <a:srgbClr val="1A2530"/>
                 </a:solidFill>
@@ -4084,19 +4382,78 @@
               </a:rPr>
               <a:t>Reconciliation</a:t>
             </a:r>
-            <a:endParaRPr lang="en-US" sz="1150" dirty="0"/>
-          </a:p>
-        </p:txBody>
-      </p:sp>
-      <p:sp>
-        <p:nvSpPr>
-          <p:cNvPr id="23" name="Shape 21"/>
+            <a:endParaRPr lang="en-US" sz="1100" dirty="0"/>
+          </a:p>
+        </p:txBody>
+      </p:sp>
+      <p:sp>
+        <p:nvSpPr>
+          <p:cNvPr id="25" name="Text 23"/>
+          <p:cNvSpPr/>
+          <p:nvPr/>
+        </p:nvSpPr>
+        <p:spPr>
+          <a:xfrm>
+            <a:off x="4805172" y="2382012"/>
+            <a:ext cx="1689354" cy="512064"/>
+          </a:xfrm>
+          <a:prstGeom prst="rect">
+            <a:avLst/>
+          </a:prstGeom>
+          <a:noFill/>
+          <a:ln/>
+        </p:spPr>
+        <p:txBody>
+          <a:bodyPr wrap="square" lIns="0" tIns="0" rIns="0" bIns="0" rtlCol="0" anchor="t"/>
+          <a:lstStyle/>
+          <a:p>
+            <a:pPr algn="l" indent="0" marL="0">
+              <a:lnSpc>
+                <a:spcPct val="95000"/>
+              </a:lnSpc>
+              <a:buNone/>
+            </a:pPr>
+            <a:r>
+              <a:rPr lang="en-US" sz="850" b="1" dirty="0">
+                <a:solidFill>
+                  <a:srgbClr val="6B7785"/>
+                </a:solidFill>
+                <a:latin typeface="Arial" pitchFamily="34" charset="0"/>
+                <a:ea typeface="Arial" pitchFamily="34" charset="-122"/>
+                <a:cs typeface="Arial" pitchFamily="34" charset="-120"/>
+              </a:rPr>
+              <a:t>Key artifacts:  </a:t>
+            </a:r>
+            <a:pPr algn="l" indent="0" marL="0">
+              <a:lnSpc>
+                <a:spcPct val="95000"/>
+              </a:lnSpc>
+              <a:buNone/>
+            </a:pPr>
+            <a:r>
+              <a:rPr lang="en-US" sz="850" dirty="0">
+                <a:solidFill>
+                  <a:srgbClr val="6B7785"/>
+                </a:solidFill>
+                <a:latin typeface="Arial" pitchFamily="34" charset="0"/>
+                <a:ea typeface="Arial" pitchFamily="34" charset="-122"/>
+                <a:cs typeface="Arial" pitchFamily="34" charset="-120"/>
+              </a:rPr>
+              <a:t>Reconciliation reports, variance analysis, record counts</a:t>
+            </a:r>
+            <a:endParaRPr lang="en-US" sz="850" dirty="0"/>
+          </a:p>
+        </p:txBody>
+      </p:sp>
+      <p:sp>
+        <p:nvSpPr>
+          <p:cNvPr id="26" name="Shape 24"/>
           <p:cNvSpPr/>
           <p:nvPr/>
         </p:nvSpPr>
         <p:spPr>
           <a:xfrm rot="5400000">
-            <a:off x="6649974" y="1696212"/>
+            <a:off x="6649974" y="2290572"/>
             <a:ext cx="118872" cy="128016"/>
           </a:xfrm>
           <a:prstGeom prst="rtTriangle">
@@ -4115,14 +4472,14 @@
       </p:sp>
       <p:sp>
         <p:nvSpPr>
-          <p:cNvPr id="24" name="Shape 22"/>
-          <p:cNvSpPr/>
-          <p:nvPr/>
-        </p:nvSpPr>
-        <p:spPr>
-          <a:xfrm>
-            <a:off x="6777990" y="1325880"/>
-            <a:ext cx="2000250" cy="868680"/>
+          <p:cNvPr id="27" name="Shape 25"/>
+          <p:cNvSpPr/>
+          <p:nvPr/>
+        </p:nvSpPr>
+        <p:spPr>
+          <a:xfrm>
+            <a:off x="6777990" y="1760220"/>
+            <a:ext cx="2000250" cy="1188720"/>
           </a:xfrm>
           <a:prstGeom prst="rect">
             <a:avLst/>
@@ -4140,14 +4497,14 @@
       </p:sp>
       <p:sp>
         <p:nvSpPr>
-          <p:cNvPr id="25" name="Shape 23"/>
-          <p:cNvSpPr/>
-          <p:nvPr/>
-        </p:nvSpPr>
-        <p:spPr>
-          <a:xfrm>
-            <a:off x="6777990" y="1325880"/>
-            <a:ext cx="73152" cy="868680"/>
+          <p:cNvPr id="28" name="Shape 26"/>
+          <p:cNvSpPr/>
+          <p:nvPr/>
+        </p:nvSpPr>
+        <p:spPr>
+          <a:xfrm>
+            <a:off x="6777990" y="1760220"/>
+            <a:ext cx="73152" cy="1188720"/>
           </a:xfrm>
           <a:prstGeom prst="rect">
             <a:avLst/>
@@ -4165,13 +4522,13 @@
       </p:sp>
       <p:sp>
         <p:nvSpPr>
-          <p:cNvPr id="26" name="Shape 24"/>
-          <p:cNvSpPr/>
-          <p:nvPr/>
-        </p:nvSpPr>
-        <p:spPr>
-          <a:xfrm>
-            <a:off x="6942582" y="1417320"/>
+          <p:cNvPr id="29" name="Shape 27"/>
+          <p:cNvSpPr/>
+          <p:nvPr/>
+        </p:nvSpPr>
+        <p:spPr>
+          <a:xfrm>
+            <a:off x="6942582" y="1851660"/>
             <a:ext cx="384048" cy="384048"/>
           </a:xfrm>
           <a:prstGeom prst="ellipse">
@@ -4190,13 +4547,13 @@
       </p:sp>
       <p:sp>
         <p:nvSpPr>
-          <p:cNvPr id="27" name="Text 25"/>
-          <p:cNvSpPr/>
-          <p:nvPr/>
-        </p:nvSpPr>
-        <p:spPr>
-          <a:xfrm>
-            <a:off x="6942582" y="1417320"/>
+          <p:cNvPr id="30" name="Text 28"/>
+          <p:cNvSpPr/>
+          <p:nvPr/>
+        </p:nvSpPr>
+        <p:spPr>
+          <a:xfrm>
+            <a:off x="6942582" y="1851660"/>
             <a:ext cx="384048" cy="384048"/>
           </a:xfrm>
           <a:prstGeom prst="rect">
@@ -4229,14 +4586,14 @@
       </p:sp>
       <p:sp>
         <p:nvSpPr>
-          <p:cNvPr id="28" name="Text 26"/>
-          <p:cNvSpPr/>
-          <p:nvPr/>
-        </p:nvSpPr>
-        <p:spPr>
-          <a:xfrm>
-            <a:off x="7381494" y="1399032"/>
-            <a:ext cx="1287018" cy="722376"/>
+          <p:cNvPr id="31" name="Text 29"/>
+          <p:cNvSpPr/>
+          <p:nvPr/>
+        </p:nvSpPr>
+        <p:spPr>
+          <a:xfrm>
+            <a:off x="7381494" y="1833372"/>
+            <a:ext cx="1287018" cy="457200"/>
           </a:xfrm>
           <a:prstGeom prst="rect">
             <a:avLst/>
@@ -4252,7 +4609,7 @@
               <a:buNone/>
             </a:pPr>
             <a:r>
-              <a:rPr lang="en-US" sz="1150" b="1" dirty="0">
+              <a:rPr lang="en-US" sz="1100" b="1" dirty="0">
                 <a:solidFill>
                   <a:srgbClr val="1A2530"/>
                 </a:solidFill>
@@ -4262,19 +4619,78 @@
               </a:rPr>
               <a:t>Reasonability Analysis</a:t>
             </a:r>
-            <a:endParaRPr lang="en-US" sz="1150" dirty="0"/>
-          </a:p>
-        </p:txBody>
-      </p:sp>
-      <p:sp>
-        <p:nvSpPr>
-          <p:cNvPr id="29" name="Shape 27"/>
+            <a:endParaRPr lang="en-US" sz="1100" dirty="0"/>
+          </a:p>
+        </p:txBody>
+      </p:sp>
+      <p:sp>
+        <p:nvSpPr>
+          <p:cNvPr id="32" name="Text 30"/>
+          <p:cNvSpPr/>
+          <p:nvPr/>
+        </p:nvSpPr>
+        <p:spPr>
+          <a:xfrm>
+            <a:off x="6942582" y="2382012"/>
+            <a:ext cx="1689354" cy="512064"/>
+          </a:xfrm>
+          <a:prstGeom prst="rect">
+            <a:avLst/>
+          </a:prstGeom>
+          <a:noFill/>
+          <a:ln/>
+        </p:spPr>
+        <p:txBody>
+          <a:bodyPr wrap="square" lIns="0" tIns="0" rIns="0" bIns="0" rtlCol="0" anchor="t"/>
+          <a:lstStyle/>
+          <a:p>
+            <a:pPr algn="l" indent="0" marL="0">
+              <a:lnSpc>
+                <a:spcPct val="95000"/>
+              </a:lnSpc>
+              <a:buNone/>
+            </a:pPr>
+            <a:r>
+              <a:rPr lang="en-US" sz="850" b="1" dirty="0">
+                <a:solidFill>
+                  <a:srgbClr val="6B7785"/>
+                </a:solidFill>
+                <a:latin typeface="Arial" pitchFamily="34" charset="0"/>
+                <a:ea typeface="Arial" pitchFamily="34" charset="-122"/>
+                <a:cs typeface="Arial" pitchFamily="34" charset="-120"/>
+              </a:rPr>
+              <a:t>Key artifacts:  </a:t>
+            </a:r>
+            <a:pPr algn="l" indent="0" marL="0">
+              <a:lnSpc>
+                <a:spcPct val="95000"/>
+              </a:lnSpc>
+              <a:buNone/>
+            </a:pPr>
+            <a:r>
+              <a:rPr lang="en-US" sz="850" dirty="0">
+                <a:solidFill>
+                  <a:srgbClr val="6B7785"/>
+                </a:solidFill>
+                <a:latin typeface="Arial" pitchFamily="34" charset="0"/>
+                <a:ea typeface="Arial" pitchFamily="34" charset="-122"/>
+                <a:cs typeface="Arial" pitchFamily="34" charset="-120"/>
+              </a:rPr>
+              <a:t>Trend analysis, outlier detection, threshold validation</a:t>
+            </a:r>
+            <a:endParaRPr lang="en-US" sz="850" dirty="0"/>
+          </a:p>
+        </p:txBody>
+      </p:sp>
+      <p:sp>
+        <p:nvSpPr>
+          <p:cNvPr id="33" name="Shape 31"/>
           <p:cNvSpPr/>
           <p:nvPr/>
         </p:nvSpPr>
         <p:spPr>
           <a:xfrm rot="10800000">
-            <a:off x="8641080" y="2235708"/>
+            <a:off x="8641080" y="2990088"/>
             <a:ext cx="146304" cy="146304"/>
           </a:xfrm>
           <a:prstGeom prst="rtTriangle">
@@ -4293,14 +4709,14 @@
       </p:sp>
       <p:sp>
         <p:nvSpPr>
-          <p:cNvPr id="30" name="Shape 28"/>
-          <p:cNvSpPr/>
-          <p:nvPr/>
-        </p:nvSpPr>
-        <p:spPr>
-          <a:xfrm>
-            <a:off x="365760" y="2423160"/>
-            <a:ext cx="2000250" cy="868680"/>
+          <p:cNvPr id="34" name="Shape 32"/>
+          <p:cNvSpPr/>
+          <p:nvPr/>
+        </p:nvSpPr>
+        <p:spPr>
+          <a:xfrm>
+            <a:off x="365760" y="3177540"/>
+            <a:ext cx="2000250" cy="1188720"/>
           </a:xfrm>
           <a:prstGeom prst="rect">
             <a:avLst/>
@@ -4318,14 +4734,14 @@
       </p:sp>
       <p:sp>
         <p:nvSpPr>
-          <p:cNvPr id="31" name="Shape 29"/>
-          <p:cNvSpPr/>
-          <p:nvPr/>
-        </p:nvSpPr>
-        <p:spPr>
-          <a:xfrm>
-            <a:off x="365760" y="2423160"/>
-            <a:ext cx="73152" cy="868680"/>
+          <p:cNvPr id="35" name="Shape 33"/>
+          <p:cNvSpPr/>
+          <p:nvPr/>
+        </p:nvSpPr>
+        <p:spPr>
+          <a:xfrm>
+            <a:off x="365760" y="3177540"/>
+            <a:ext cx="73152" cy="1188720"/>
           </a:xfrm>
           <a:prstGeom prst="rect">
             <a:avLst/>
@@ -4343,13 +4759,13 @@
       </p:sp>
       <p:sp>
         <p:nvSpPr>
-          <p:cNvPr id="32" name="Shape 30"/>
-          <p:cNvSpPr/>
-          <p:nvPr/>
-        </p:nvSpPr>
-        <p:spPr>
-          <a:xfrm>
-            <a:off x="530352" y="2514600"/>
+          <p:cNvPr id="36" name="Shape 34"/>
+          <p:cNvSpPr/>
+          <p:nvPr/>
+        </p:nvSpPr>
+        <p:spPr>
+          <a:xfrm>
+            <a:off x="530352" y="3268980"/>
             <a:ext cx="384048" cy="384048"/>
           </a:xfrm>
           <a:prstGeom prst="ellipse">
@@ -4368,13 +4784,13 @@
       </p:sp>
       <p:sp>
         <p:nvSpPr>
-          <p:cNvPr id="33" name="Text 31"/>
-          <p:cNvSpPr/>
-          <p:nvPr/>
-        </p:nvSpPr>
-        <p:spPr>
-          <a:xfrm>
-            <a:off x="530352" y="2514600"/>
+          <p:cNvPr id="37" name="Text 35"/>
+          <p:cNvSpPr/>
+          <p:nvPr/>
+        </p:nvSpPr>
+        <p:spPr>
+          <a:xfrm>
+            <a:off x="530352" y="3268980"/>
             <a:ext cx="384048" cy="384048"/>
           </a:xfrm>
           <a:prstGeom prst="rect">
@@ -4407,14 +4823,14 @@
       </p:sp>
       <p:sp>
         <p:nvSpPr>
-          <p:cNvPr id="34" name="Text 32"/>
-          <p:cNvSpPr/>
-          <p:nvPr/>
-        </p:nvSpPr>
-        <p:spPr>
-          <a:xfrm>
-            <a:off x="969264" y="2496312"/>
-            <a:ext cx="1287018" cy="722376"/>
+          <p:cNvPr id="38" name="Text 36"/>
+          <p:cNvSpPr/>
+          <p:nvPr/>
+        </p:nvSpPr>
+        <p:spPr>
+          <a:xfrm>
+            <a:off x="969264" y="3250692"/>
+            <a:ext cx="1287018" cy="457200"/>
           </a:xfrm>
           <a:prstGeom prst="rect">
             <a:avLst/>
@@ -4430,7 +4846,7 @@
               <a:buNone/>
             </a:pPr>
             <a:r>
-              <a:rPr lang="en-US" sz="1150" b="1" dirty="0">
+              <a:rPr lang="en-US" sz="1100" b="1" dirty="0">
                 <a:solidFill>
                   <a:srgbClr val="1A2530"/>
                 </a:solidFill>
@@ -4440,19 +4856,78 @@
               </a:rPr>
               <a:t>Peer Review</a:t>
             </a:r>
-            <a:endParaRPr lang="en-US" sz="1150" dirty="0"/>
-          </a:p>
-        </p:txBody>
-      </p:sp>
-      <p:sp>
-        <p:nvSpPr>
-          <p:cNvPr id="35" name="Shape 33"/>
+            <a:endParaRPr lang="en-US" sz="1100" dirty="0"/>
+          </a:p>
+        </p:txBody>
+      </p:sp>
+      <p:sp>
+        <p:nvSpPr>
+          <p:cNvPr id="39" name="Text 37"/>
+          <p:cNvSpPr/>
+          <p:nvPr/>
+        </p:nvSpPr>
+        <p:spPr>
+          <a:xfrm>
+            <a:off x="530352" y="3799332"/>
+            <a:ext cx="1689354" cy="512064"/>
+          </a:xfrm>
+          <a:prstGeom prst="rect">
+            <a:avLst/>
+          </a:prstGeom>
+          <a:noFill/>
+          <a:ln/>
+        </p:spPr>
+        <p:txBody>
+          <a:bodyPr wrap="square" lIns="0" tIns="0" rIns="0" bIns="0" rtlCol="0" anchor="t"/>
+          <a:lstStyle/>
+          <a:p>
+            <a:pPr algn="l" indent="0" marL="0">
+              <a:lnSpc>
+                <a:spcPct val="95000"/>
+              </a:lnSpc>
+              <a:buNone/>
+            </a:pPr>
+            <a:r>
+              <a:rPr lang="en-US" sz="850" b="1" dirty="0">
+                <a:solidFill>
+                  <a:srgbClr val="6B7785"/>
+                </a:solidFill>
+                <a:latin typeface="Arial" pitchFamily="34" charset="0"/>
+                <a:ea typeface="Arial" pitchFamily="34" charset="-122"/>
+                <a:cs typeface="Arial" pitchFamily="34" charset="-120"/>
+              </a:rPr>
+              <a:t>Key artifacts:  </a:t>
+            </a:r>
+            <a:pPr algn="l" indent="0" marL="0">
+              <a:lnSpc>
+                <a:spcPct val="95000"/>
+              </a:lnSpc>
+              <a:buNone/>
+            </a:pPr>
+            <a:r>
+              <a:rPr lang="en-US" sz="850" dirty="0">
+                <a:solidFill>
+                  <a:srgbClr val="6B7785"/>
+                </a:solidFill>
+                <a:latin typeface="Arial" pitchFamily="34" charset="0"/>
+                <a:ea typeface="Arial" pitchFamily="34" charset="-122"/>
+                <a:cs typeface="Arial" pitchFamily="34" charset="-120"/>
+              </a:rPr>
+              <a:t>Peer review sign-off, review comments log</a:t>
+            </a:r>
+            <a:endParaRPr lang="en-US" sz="850" dirty="0"/>
+          </a:p>
+        </p:txBody>
+      </p:sp>
+      <p:sp>
+        <p:nvSpPr>
+          <p:cNvPr id="40" name="Shape 38"/>
           <p:cNvSpPr/>
           <p:nvPr/>
         </p:nvSpPr>
         <p:spPr>
           <a:xfrm rot="5400000">
-            <a:off x="2375154" y="2793492"/>
+            <a:off x="2375154" y="3707892"/>
             <a:ext cx="118872" cy="128016"/>
           </a:xfrm>
           <a:prstGeom prst="rtTriangle">
@@ -4471,14 +4946,14 @@
       </p:sp>
       <p:sp>
         <p:nvSpPr>
-          <p:cNvPr id="36" name="Shape 34"/>
-          <p:cNvSpPr/>
-          <p:nvPr/>
-        </p:nvSpPr>
-        <p:spPr>
-          <a:xfrm>
-            <a:off x="2503170" y="2423160"/>
-            <a:ext cx="2000250" cy="868680"/>
+          <p:cNvPr id="41" name="Shape 39"/>
+          <p:cNvSpPr/>
+          <p:nvPr/>
+        </p:nvSpPr>
+        <p:spPr>
+          <a:xfrm>
+            <a:off x="2503170" y="3177540"/>
+            <a:ext cx="2000250" cy="1188720"/>
           </a:xfrm>
           <a:prstGeom prst="rect">
             <a:avLst/>
@@ -4496,14 +4971,14 @@
       </p:sp>
       <p:sp>
         <p:nvSpPr>
-          <p:cNvPr id="37" name="Shape 35"/>
-          <p:cNvSpPr/>
-          <p:nvPr/>
-        </p:nvSpPr>
-        <p:spPr>
-          <a:xfrm>
-            <a:off x="2503170" y="2423160"/>
-            <a:ext cx="73152" cy="868680"/>
+          <p:cNvPr id="42" name="Shape 40"/>
+          <p:cNvSpPr/>
+          <p:nvPr/>
+        </p:nvSpPr>
+        <p:spPr>
+          <a:xfrm>
+            <a:off x="2503170" y="3177540"/>
+            <a:ext cx="73152" cy="1188720"/>
           </a:xfrm>
           <a:prstGeom prst="rect">
             <a:avLst/>
@@ -4521,13 +4996,13 @@
       </p:sp>
       <p:sp>
         <p:nvSpPr>
-          <p:cNvPr id="38" name="Shape 36"/>
-          <p:cNvSpPr/>
-          <p:nvPr/>
-        </p:nvSpPr>
-        <p:spPr>
-          <a:xfrm>
-            <a:off x="2667762" y="2514600"/>
+          <p:cNvPr id="43" name="Shape 41"/>
+          <p:cNvSpPr/>
+          <p:nvPr/>
+        </p:nvSpPr>
+        <p:spPr>
+          <a:xfrm>
+            <a:off x="2667762" y="3268980"/>
             <a:ext cx="384048" cy="384048"/>
           </a:xfrm>
           <a:prstGeom prst="ellipse">
@@ -4546,13 +5021,13 @@
       </p:sp>
       <p:sp>
         <p:nvSpPr>
-          <p:cNvPr id="39" name="Text 37"/>
-          <p:cNvSpPr/>
-          <p:nvPr/>
-        </p:nvSpPr>
-        <p:spPr>
-          <a:xfrm>
-            <a:off x="2667762" y="2514600"/>
+          <p:cNvPr id="44" name="Text 42"/>
+          <p:cNvSpPr/>
+          <p:nvPr/>
+        </p:nvSpPr>
+        <p:spPr>
+          <a:xfrm>
+            <a:off x="2667762" y="3268980"/>
             <a:ext cx="384048" cy="384048"/>
           </a:xfrm>
           <a:prstGeom prst="rect">
@@ -4585,14 +5060,14 @@
       </p:sp>
       <p:sp>
         <p:nvSpPr>
-          <p:cNvPr id="40" name="Text 38"/>
-          <p:cNvSpPr/>
-          <p:nvPr/>
-        </p:nvSpPr>
-        <p:spPr>
-          <a:xfrm>
-            <a:off x="3106674" y="2496312"/>
-            <a:ext cx="1287018" cy="722376"/>
+          <p:cNvPr id="45" name="Text 43"/>
+          <p:cNvSpPr/>
+          <p:nvPr/>
+        </p:nvSpPr>
+        <p:spPr>
+          <a:xfrm>
+            <a:off x="3106674" y="3250692"/>
+            <a:ext cx="1287018" cy="457200"/>
           </a:xfrm>
           <a:prstGeom prst="rect">
             <a:avLst/>
@@ -4608,7 +5083,7 @@
               <a:buNone/>
             </a:pPr>
             <a:r>
-              <a:rPr lang="en-US" sz="1150" b="1" dirty="0">
+              <a:rPr lang="en-US" sz="1100" b="1" dirty="0">
                 <a:solidFill>
                   <a:srgbClr val="1A2530"/>
                 </a:solidFill>
@@ -4618,19 +5093,78 @@
               </a:rPr>
               <a:t>Output Verification</a:t>
             </a:r>
-            <a:endParaRPr lang="en-US" sz="1150" dirty="0"/>
-          </a:p>
-        </p:txBody>
-      </p:sp>
-      <p:sp>
-        <p:nvSpPr>
-          <p:cNvPr id="41" name="Shape 39"/>
+            <a:endParaRPr lang="en-US" sz="1100" dirty="0"/>
+          </a:p>
+        </p:txBody>
+      </p:sp>
+      <p:sp>
+        <p:nvSpPr>
+          <p:cNvPr id="46" name="Text 44"/>
+          <p:cNvSpPr/>
+          <p:nvPr/>
+        </p:nvSpPr>
+        <p:spPr>
+          <a:xfrm>
+            <a:off x="2667762" y="3799332"/>
+            <a:ext cx="1689354" cy="512064"/>
+          </a:xfrm>
+          <a:prstGeom prst="rect">
+            <a:avLst/>
+          </a:prstGeom>
+          <a:noFill/>
+          <a:ln/>
+        </p:spPr>
+        <p:txBody>
+          <a:bodyPr wrap="square" lIns="0" tIns="0" rIns="0" bIns="0" rtlCol="0" anchor="t"/>
+          <a:lstStyle/>
+          <a:p>
+            <a:pPr algn="l" indent="0" marL="0">
+              <a:lnSpc>
+                <a:spcPct val="95000"/>
+              </a:lnSpc>
+              <a:buNone/>
+            </a:pPr>
+            <a:r>
+              <a:rPr lang="en-US" sz="850" b="1" dirty="0">
+                <a:solidFill>
+                  <a:srgbClr val="6B7785"/>
+                </a:solidFill>
+                <a:latin typeface="Arial" pitchFamily="34" charset="0"/>
+                <a:ea typeface="Arial" pitchFamily="34" charset="-122"/>
+                <a:cs typeface="Arial" pitchFamily="34" charset="-120"/>
+              </a:rPr>
+              <a:t>Key artifacts:  </a:t>
+            </a:r>
+            <a:pPr algn="l" indent="0" marL="0">
+              <a:lnSpc>
+                <a:spcPct val="95000"/>
+              </a:lnSpc>
+              <a:buNone/>
+            </a:pPr>
+            <a:r>
+              <a:rPr lang="en-US" sz="850" dirty="0">
+                <a:solidFill>
+                  <a:srgbClr val="6B7785"/>
+                </a:solidFill>
+                <a:latin typeface="Arial" pitchFamily="34" charset="0"/>
+                <a:ea typeface="Arial" pitchFamily="34" charset="-122"/>
+                <a:cs typeface="Arial" pitchFamily="34" charset="-120"/>
+              </a:rPr>
+              <a:t>Output verification report, format compliance log</a:t>
+            </a:r>
+            <a:endParaRPr lang="en-US" sz="850" dirty="0"/>
+          </a:p>
+        </p:txBody>
+      </p:sp>
+      <p:sp>
+        <p:nvSpPr>
+          <p:cNvPr id="47" name="Shape 45"/>
           <p:cNvSpPr/>
           <p:nvPr/>
         </p:nvSpPr>
         <p:spPr>
           <a:xfrm rot="5400000">
-            <a:off x="4512564" y="2793492"/>
+            <a:off x="4512564" y="3707892"/>
             <a:ext cx="118872" cy="128016"/>
           </a:xfrm>
           <a:prstGeom prst="rtTriangle">
@@ -4649,14 +5183,14 @@
       </p:sp>
       <p:sp>
         <p:nvSpPr>
-          <p:cNvPr id="42" name="Shape 40"/>
-          <p:cNvSpPr/>
-          <p:nvPr/>
-        </p:nvSpPr>
-        <p:spPr>
-          <a:xfrm>
-            <a:off x="4640580" y="2423160"/>
-            <a:ext cx="2000250" cy="868680"/>
+          <p:cNvPr id="48" name="Shape 46"/>
+          <p:cNvSpPr/>
+          <p:nvPr/>
+        </p:nvSpPr>
+        <p:spPr>
+          <a:xfrm>
+            <a:off x="4640580" y="3177540"/>
+            <a:ext cx="2000250" cy="1188720"/>
           </a:xfrm>
           <a:prstGeom prst="rect">
             <a:avLst/>
@@ -4674,14 +5208,14 @@
       </p:sp>
       <p:sp>
         <p:nvSpPr>
-          <p:cNvPr id="43" name="Shape 41"/>
-          <p:cNvSpPr/>
-          <p:nvPr/>
-        </p:nvSpPr>
-        <p:spPr>
-          <a:xfrm>
-            <a:off x="4640580" y="2423160"/>
-            <a:ext cx="73152" cy="868680"/>
+          <p:cNvPr id="49" name="Shape 47"/>
+          <p:cNvSpPr/>
+          <p:nvPr/>
+        </p:nvSpPr>
+        <p:spPr>
+          <a:xfrm>
+            <a:off x="4640580" y="3177540"/>
+            <a:ext cx="73152" cy="1188720"/>
           </a:xfrm>
           <a:prstGeom prst="rect">
             <a:avLst/>
@@ -4699,13 +5233,13 @@
       </p:sp>
       <p:sp>
         <p:nvSpPr>
-          <p:cNvPr id="44" name="Shape 42"/>
-          <p:cNvSpPr/>
-          <p:nvPr/>
-        </p:nvSpPr>
-        <p:spPr>
-          <a:xfrm>
-            <a:off x="4805172" y="2514600"/>
+          <p:cNvPr id="50" name="Shape 48"/>
+          <p:cNvSpPr/>
+          <p:nvPr/>
+        </p:nvSpPr>
+        <p:spPr>
+          <a:xfrm>
+            <a:off x="4805172" y="3268980"/>
             <a:ext cx="384048" cy="384048"/>
           </a:xfrm>
           <a:prstGeom prst="ellipse">
@@ -4724,13 +5258,13 @@
       </p:sp>
       <p:sp>
         <p:nvSpPr>
-          <p:cNvPr id="45" name="Text 43"/>
-          <p:cNvSpPr/>
-          <p:nvPr/>
-        </p:nvSpPr>
-        <p:spPr>
-          <a:xfrm>
-            <a:off x="4805172" y="2514600"/>
+          <p:cNvPr id="51" name="Text 49"/>
+          <p:cNvSpPr/>
+          <p:nvPr/>
+        </p:nvSpPr>
+        <p:spPr>
+          <a:xfrm>
+            <a:off x="4805172" y="3268980"/>
             <a:ext cx="384048" cy="384048"/>
           </a:xfrm>
           <a:prstGeom prst="rect">
@@ -4763,14 +5297,14 @@
       </p:sp>
       <p:sp>
         <p:nvSpPr>
-          <p:cNvPr id="46" name="Text 44"/>
-          <p:cNvSpPr/>
-          <p:nvPr/>
-        </p:nvSpPr>
-        <p:spPr>
-          <a:xfrm>
-            <a:off x="5244084" y="2496312"/>
-            <a:ext cx="1287018" cy="722376"/>
+          <p:cNvPr id="52" name="Text 50"/>
+          <p:cNvSpPr/>
+          <p:nvPr/>
+        </p:nvSpPr>
+        <p:spPr>
+          <a:xfrm>
+            <a:off x="5244084" y="3250692"/>
+            <a:ext cx="1287018" cy="457200"/>
           </a:xfrm>
           <a:prstGeom prst="rect">
             <a:avLst/>
@@ -4786,7 +5320,7 @@
               <a:buNone/>
             </a:pPr>
             <a:r>
-              <a:rPr lang="en-US" sz="1150" b="1" dirty="0">
+              <a:rPr lang="en-US" sz="1100" b="1" dirty="0">
                 <a:solidFill>
                   <a:srgbClr val="1A2530"/>
                 </a:solidFill>
@@ -4796,19 +5330,78 @@
               </a:rPr>
               <a:t>Issue Logging</a:t>
             </a:r>
-            <a:endParaRPr lang="en-US" sz="1150" dirty="0"/>
-          </a:p>
-        </p:txBody>
-      </p:sp>
-      <p:sp>
-        <p:nvSpPr>
-          <p:cNvPr id="47" name="Shape 45"/>
+            <a:endParaRPr lang="en-US" sz="1100" dirty="0"/>
+          </a:p>
+        </p:txBody>
+      </p:sp>
+      <p:sp>
+        <p:nvSpPr>
+          <p:cNvPr id="53" name="Text 51"/>
+          <p:cNvSpPr/>
+          <p:nvPr/>
+        </p:nvSpPr>
+        <p:spPr>
+          <a:xfrm>
+            <a:off x="4805172" y="3799332"/>
+            <a:ext cx="1689354" cy="512064"/>
+          </a:xfrm>
+          <a:prstGeom prst="rect">
+            <a:avLst/>
+          </a:prstGeom>
+          <a:noFill/>
+          <a:ln/>
+        </p:spPr>
+        <p:txBody>
+          <a:bodyPr wrap="square" lIns="0" tIns="0" rIns="0" bIns="0" rtlCol="0" anchor="t"/>
+          <a:lstStyle/>
+          <a:p>
+            <a:pPr algn="l" indent="0" marL="0">
+              <a:lnSpc>
+                <a:spcPct val="95000"/>
+              </a:lnSpc>
+              <a:buNone/>
+            </a:pPr>
+            <a:r>
+              <a:rPr lang="en-US" sz="850" b="1" dirty="0">
+                <a:solidFill>
+                  <a:srgbClr val="6B7785"/>
+                </a:solidFill>
+                <a:latin typeface="Arial" pitchFamily="34" charset="0"/>
+                <a:ea typeface="Arial" pitchFamily="34" charset="-122"/>
+                <a:cs typeface="Arial" pitchFamily="34" charset="-120"/>
+              </a:rPr>
+              <a:t>Key artifacts:  </a:t>
+            </a:r>
+            <a:pPr algn="l" indent="0" marL="0">
+              <a:lnSpc>
+                <a:spcPct val="95000"/>
+              </a:lnSpc>
+              <a:buNone/>
+            </a:pPr>
+            <a:r>
+              <a:rPr lang="en-US" sz="850" dirty="0">
+                <a:solidFill>
+                  <a:srgbClr val="6B7785"/>
+                </a:solidFill>
+                <a:latin typeface="Arial" pitchFamily="34" charset="0"/>
+                <a:ea typeface="Arial" pitchFamily="34" charset="-122"/>
+                <a:cs typeface="Arial" pitchFamily="34" charset="-120"/>
+              </a:rPr>
+              <a:t>RAID log entry, BLOCKED Jira ticket</a:t>
+            </a:r>
+            <a:endParaRPr lang="en-US" sz="850" dirty="0"/>
+          </a:p>
+        </p:txBody>
+      </p:sp>
+      <p:sp>
+        <p:nvSpPr>
+          <p:cNvPr id="54" name="Shape 52"/>
           <p:cNvSpPr/>
           <p:nvPr/>
         </p:nvSpPr>
         <p:spPr>
           <a:xfrm rot="5400000">
-            <a:off x="6649974" y="2793492"/>
+            <a:off x="6649974" y="3707892"/>
             <a:ext cx="118872" cy="128016"/>
           </a:xfrm>
           <a:prstGeom prst="rtTriangle">
@@ -4827,14 +5420,14 @@
       </p:sp>
       <p:sp>
         <p:nvSpPr>
-          <p:cNvPr id="48" name="Shape 46"/>
-          <p:cNvSpPr/>
-          <p:nvPr/>
-        </p:nvSpPr>
-        <p:spPr>
-          <a:xfrm>
-            <a:off x="6777990" y="2423160"/>
-            <a:ext cx="2000250" cy="868680"/>
+          <p:cNvPr id="55" name="Shape 53"/>
+          <p:cNvSpPr/>
+          <p:nvPr/>
+        </p:nvSpPr>
+        <p:spPr>
+          <a:xfrm>
+            <a:off x="6777990" y="3177540"/>
+            <a:ext cx="2000250" cy="1188720"/>
           </a:xfrm>
           <a:prstGeom prst="rect">
             <a:avLst/>
@@ -4852,14 +5445,14 @@
       </p:sp>
       <p:sp>
         <p:nvSpPr>
-          <p:cNvPr id="49" name="Shape 47"/>
-          <p:cNvSpPr/>
-          <p:nvPr/>
-        </p:nvSpPr>
-        <p:spPr>
-          <a:xfrm>
-            <a:off x="6777990" y="2423160"/>
-            <a:ext cx="73152" cy="868680"/>
+          <p:cNvPr id="56" name="Shape 54"/>
+          <p:cNvSpPr/>
+          <p:nvPr/>
+        </p:nvSpPr>
+        <p:spPr>
+          <a:xfrm>
+            <a:off x="6777990" y="3177540"/>
+            <a:ext cx="73152" cy="1188720"/>
           </a:xfrm>
           <a:prstGeom prst="rect">
             <a:avLst/>
@@ -4877,13 +5470,13 @@
       </p:sp>
       <p:sp>
         <p:nvSpPr>
-          <p:cNvPr id="50" name="Shape 48"/>
-          <p:cNvSpPr/>
-          <p:nvPr/>
-        </p:nvSpPr>
-        <p:spPr>
-          <a:xfrm>
-            <a:off x="6942582" y="2514600"/>
+          <p:cNvPr id="57" name="Shape 55"/>
+          <p:cNvSpPr/>
+          <p:nvPr/>
+        </p:nvSpPr>
+        <p:spPr>
+          <a:xfrm>
+            <a:off x="6942582" y="3268980"/>
             <a:ext cx="384048" cy="384048"/>
           </a:xfrm>
           <a:prstGeom prst="ellipse">
@@ -4902,13 +5495,13 @@
       </p:sp>
       <p:sp>
         <p:nvSpPr>
-          <p:cNvPr id="51" name="Text 49"/>
-          <p:cNvSpPr/>
-          <p:nvPr/>
-        </p:nvSpPr>
-        <p:spPr>
-          <a:xfrm>
-            <a:off x="6942582" y="2514600"/>
+          <p:cNvPr id="58" name="Text 56"/>
+          <p:cNvSpPr/>
+          <p:nvPr/>
+        </p:nvSpPr>
+        <p:spPr>
+          <a:xfrm>
+            <a:off x="6942582" y="3268980"/>
             <a:ext cx="384048" cy="384048"/>
           </a:xfrm>
           <a:prstGeom prst="rect">
@@ -4941,14 +5534,14 @@
       </p:sp>
       <p:sp>
         <p:nvSpPr>
-          <p:cNvPr id="52" name="Text 50"/>
-          <p:cNvSpPr/>
-          <p:nvPr/>
-        </p:nvSpPr>
-        <p:spPr>
-          <a:xfrm>
-            <a:off x="7381494" y="2496312"/>
-            <a:ext cx="1287018" cy="722376"/>
+          <p:cNvPr id="59" name="Text 57"/>
+          <p:cNvSpPr/>
+          <p:nvPr/>
+        </p:nvSpPr>
+        <p:spPr>
+          <a:xfrm>
+            <a:off x="7381494" y="3250692"/>
+            <a:ext cx="1287018" cy="457200"/>
           </a:xfrm>
           <a:prstGeom prst="rect">
             <a:avLst/>
@@ -4964,7 +5557,7 @@
               <a:buNone/>
             </a:pPr>
             <a:r>
-              <a:rPr lang="en-US" sz="1150" b="1" dirty="0">
+              <a:rPr lang="en-US" sz="1100" b="1" dirty="0">
                 <a:solidFill>
                   <a:srgbClr val="1A2530"/>
                 </a:solidFill>
@@ -4974,300 +5567,91 @@
               </a:rPr>
               <a:t>Sign-Off &amp; Approval</a:t>
             </a:r>
-            <a:endParaRPr lang="en-US" sz="1150" dirty="0"/>
-          </a:p>
-        </p:txBody>
-      </p:sp>
-      <p:sp>
-        <p:nvSpPr>
-          <p:cNvPr id="53" name="Shape 51"/>
-          <p:cNvSpPr/>
-          <p:nvPr/>
-        </p:nvSpPr>
-        <p:spPr>
-          <a:xfrm>
-            <a:off x="365760" y="3611880"/>
-            <a:ext cx="8412480" cy="1188720"/>
-          </a:xfrm>
-          <a:prstGeom prst="rect">
-            <a:avLst/>
-          </a:prstGeom>
-          <a:solidFill>
-            <a:srgbClr val="F4F6F8"/>
-          </a:solidFill>
-          <a:ln w="6350">
-            <a:solidFill>
-              <a:srgbClr val="D6DBE2"/>
-            </a:solidFill>
-            <a:prstDash val="solid"/>
-          </a:ln>
-        </p:spPr>
-      </p:sp>
-      <p:sp>
-        <p:nvSpPr>
-          <p:cNvPr id="54" name="Text 52"/>
-          <p:cNvSpPr/>
-          <p:nvPr/>
-        </p:nvSpPr>
-        <p:spPr>
-          <a:xfrm>
-            <a:off x="502920" y="3657600"/>
-            <a:ext cx="1828800" cy="228600"/>
-          </a:xfrm>
-          <a:prstGeom prst="rect">
-            <a:avLst/>
-          </a:prstGeom>
-          <a:noFill/>
-          <a:ln/>
-        </p:spPr>
-        <p:txBody>
-          <a:bodyPr wrap="square" lIns="0" tIns="0" rIns="0" bIns="0" rtlCol="0" anchor="ctr"/>
+            <a:endParaRPr lang="en-US" sz="1100" dirty="0"/>
+          </a:p>
+        </p:txBody>
+      </p:sp>
+      <p:sp>
+        <p:nvSpPr>
+          <p:cNvPr id="60" name="Text 58"/>
+          <p:cNvSpPr/>
+          <p:nvPr/>
+        </p:nvSpPr>
+        <p:spPr>
+          <a:xfrm>
+            <a:off x="6942582" y="3799332"/>
+            <a:ext cx="1689354" cy="512064"/>
+          </a:xfrm>
+          <a:prstGeom prst="rect">
+            <a:avLst/>
+          </a:prstGeom>
+          <a:noFill/>
+          <a:ln/>
+        </p:spPr>
+        <p:txBody>
+          <a:bodyPr wrap="square" lIns="0" tIns="0" rIns="0" bIns="0" rtlCol="0" anchor="t"/>
           <a:lstStyle/>
           <a:p>
             <a:pPr algn="l" indent="0" marL="0">
-              <a:buNone/>
-            </a:pPr>
-            <a:r>
-              <a:rPr lang="en-US" sz="1000" b="1" dirty="0">
-                <a:solidFill>
-                  <a:srgbClr val="1B365D"/>
-                </a:solidFill>
-                <a:latin typeface="Arial" pitchFamily="34" charset="0"/>
-                <a:ea typeface="Arial" pitchFamily="34" charset="-122"/>
-                <a:cs typeface="Arial" pitchFamily="34" charset="-120"/>
-              </a:rPr>
-              <a:t>Key Artifacts</a:t>
-            </a:r>
-            <a:endParaRPr lang="en-US" sz="1000" dirty="0"/>
-          </a:p>
-        </p:txBody>
-      </p:sp>
-      <p:sp>
-        <p:nvSpPr>
-          <p:cNvPr id="55" name="Text 53"/>
-          <p:cNvSpPr/>
-          <p:nvPr/>
-        </p:nvSpPr>
-        <p:spPr>
-          <a:xfrm>
-            <a:off x="502920" y="3904488"/>
-            <a:ext cx="4023360" cy="868680"/>
-          </a:xfrm>
-          <a:prstGeom prst="rect">
-            <a:avLst/>
-          </a:prstGeom>
-          <a:noFill/>
-          <a:ln/>
-        </p:spPr>
-        <p:txBody>
-          <a:bodyPr wrap="square" lIns="0" tIns="0" rIns="0" bIns="0" rtlCol="0" anchor="t"/>
-          <a:lstStyle/>
-          <a:p>
+              <a:lnSpc>
+                <a:spcPct val="95000"/>
+              </a:lnSpc>
+              <a:buNone/>
+            </a:pPr>
+            <a:r>
+              <a:rPr lang="en-US" sz="850" b="1" dirty="0">
+                <a:solidFill>
+                  <a:srgbClr val="6B7785"/>
+                </a:solidFill>
+                <a:latin typeface="Arial" pitchFamily="34" charset="0"/>
+                <a:ea typeface="Arial" pitchFamily="34" charset="-122"/>
+                <a:cs typeface="Arial" pitchFamily="34" charset="-120"/>
+              </a:rPr>
+              <a:t>Key artifacts:  </a:t>
+            </a:r>
             <a:pPr algn="l" indent="0" marL="0">
-              <a:spcAft>
-                <a:spcPts val="100"/>
-              </a:spcAft>
+              <a:lnSpc>
+                <a:spcPct val="95000"/>
+              </a:lnSpc>
               <a:buNone/>
             </a:pPr>
             <a:r>
               <a:rPr lang="en-US" sz="850" dirty="0">
                 <a:solidFill>
-                  <a:srgbClr val="1A2530"/>
-                </a:solidFill>
-                <a:latin typeface="Arial" pitchFamily="34" charset="0"/>
-                <a:ea typeface="Arial" pitchFamily="34" charset="-122"/>
-                <a:cs typeface="Arial" pitchFamily="34" charset="-120"/>
-              </a:rPr>
-              <a:t>1.  Validation Plan doc · Risk Assessment Matrix</a:t>
+                  <a:srgbClr val="6B7785"/>
+                </a:solidFill>
+                <a:latin typeface="Arial" pitchFamily="34" charset="0"/>
+                <a:ea typeface="Arial" pitchFamily="34" charset="-122"/>
+                <a:cs typeface="Arial" pitchFamily="34" charset="-120"/>
+              </a:rPr>
+              <a:t>Signed approval record, final validation report</a:t>
             </a:r>
             <a:endParaRPr lang="en-US" sz="850" dirty="0"/>
           </a:p>
+        </p:txBody>
+      </p:sp>
+      <p:sp>
+        <p:nvSpPr>
+          <p:cNvPr id="61" name="Text 59"/>
+          <p:cNvSpPr/>
+          <p:nvPr/>
+        </p:nvSpPr>
+        <p:spPr>
+          <a:xfrm>
+            <a:off x="365760" y="4850892"/>
+            <a:ext cx="7315200" cy="201168"/>
+          </a:xfrm>
+          <a:prstGeom prst="rect">
+            <a:avLst/>
+          </a:prstGeom>
+          <a:noFill/>
+          <a:ln/>
+        </p:spPr>
+        <p:txBody>
+          <a:bodyPr wrap="square" lIns="0" tIns="0" rIns="0" bIns="0" rtlCol="0" anchor="ctr"/>
+          <a:lstStyle/>
           <a:p>
             <a:pPr algn="l" indent="0" marL="0">
-              <a:spcAft>
-                <a:spcPts val="100"/>
-              </a:spcAft>
-              <a:buNone/>
-            </a:pPr>
-            <a:r>
-              <a:rPr lang="en-US" sz="850" dirty="0">
-                <a:solidFill>
-                  <a:srgbClr val="1A2530"/>
-                </a:solidFill>
-                <a:latin typeface="Arial" pitchFamily="34" charset="0"/>
-                <a:ea typeface="Arial" pitchFamily="34" charset="-122"/>
-                <a:cs typeface="Arial" pitchFamily="34" charset="-120"/>
-              </a:rPr>
-              <a:t>2.  DQ check results · availability_pct in cde_da_by_lob_segment</a:t>
-            </a:r>
-            <a:endParaRPr lang="en-US" sz="850" dirty="0"/>
-          </a:p>
-          <a:p>
-            <a:pPr algn="l" indent="0" marL="0">
-              <a:spcAft>
-                <a:spcPts val="100"/>
-              </a:spcAft>
-              <a:buNone/>
-            </a:pPr>
-            <a:r>
-              <a:rPr lang="en-US" sz="850" dirty="0">
-                <a:solidFill>
-                  <a:srgbClr val="1A2530"/>
-                </a:solidFill>
-                <a:latin typeface="Arial" pitchFamily="34" charset="0"/>
-                <a:ea typeface="Arial" pitchFamily="34" charset="-122"/>
-                <a:cs typeface="Arial" pitchFamily="34" charset="-120"/>
-              </a:rPr>
-              <a:t>3.  Reconciliation reports · variance analysis logs</a:t>
-            </a:r>
-            <a:endParaRPr lang="en-US" sz="850" dirty="0"/>
-          </a:p>
-          <a:p>
-            <a:pPr algn="l" indent="0" marL="0">
-              <a:spcAft>
-                <a:spcPts val="100"/>
-              </a:spcAft>
-              <a:buNone/>
-            </a:pPr>
-            <a:r>
-              <a:rPr lang="en-US" sz="850" dirty="0">
-                <a:solidFill>
-                  <a:srgbClr val="1A2530"/>
-                </a:solidFill>
-                <a:latin typeface="Arial" pitchFamily="34" charset="0"/>
-                <a:ea typeface="Arial" pitchFamily="34" charset="-122"/>
-                <a:cs typeface="Arial" pitchFamily="34" charset="-120"/>
-              </a:rPr>
-              <a:t>4.  Trend analysis · outlier detection log</a:t>
-            </a:r>
-            <a:endParaRPr lang="en-US" sz="850" dirty="0"/>
-          </a:p>
-        </p:txBody>
-      </p:sp>
-      <p:sp>
-        <p:nvSpPr>
-          <p:cNvPr id="56" name="Text 54"/>
-          <p:cNvSpPr/>
-          <p:nvPr/>
-        </p:nvSpPr>
-        <p:spPr>
-          <a:xfrm>
-            <a:off x="4709160" y="3904488"/>
-            <a:ext cx="4023360" cy="868680"/>
-          </a:xfrm>
-          <a:prstGeom prst="rect">
-            <a:avLst/>
-          </a:prstGeom>
-          <a:noFill/>
-          <a:ln/>
-        </p:spPr>
-        <p:txBody>
-          <a:bodyPr wrap="square" lIns="0" tIns="0" rIns="0" bIns="0" rtlCol="0" anchor="t"/>
-          <a:lstStyle/>
-          <a:p>
-            <a:pPr algn="l" indent="0" marL="0">
-              <a:spcAft>
-                <a:spcPts val="100"/>
-              </a:spcAft>
-              <a:buNone/>
-            </a:pPr>
-            <a:r>
-              <a:rPr lang="en-US" sz="850" dirty="0">
-                <a:solidFill>
-                  <a:srgbClr val="1A2530"/>
-                </a:solidFill>
-                <a:latin typeface="Arial" pitchFamily="34" charset="0"/>
-                <a:ea typeface="Arial" pitchFamily="34" charset="-122"/>
-                <a:cs typeface="Arial" pitchFamily="34" charset="-120"/>
-              </a:rPr>
-              <a:t>5.  Peer review sign-off · AU REVIEW APPROVAL Jira state</a:t>
-            </a:r>
-            <a:endParaRPr lang="en-US" sz="850" dirty="0"/>
-          </a:p>
-          <a:p>
-            <a:pPr algn="l" indent="0" marL="0">
-              <a:spcAft>
-                <a:spcPts val="100"/>
-              </a:spcAft>
-              <a:buNone/>
-            </a:pPr>
-            <a:r>
-              <a:rPr lang="en-US" sz="850" dirty="0">
-                <a:solidFill>
-                  <a:srgbClr val="1A2530"/>
-                </a:solidFill>
-                <a:latin typeface="Arial" pitchFamily="34" charset="0"/>
-                <a:ea typeface="Arial" pitchFamily="34" charset="-122"/>
-                <a:cs typeface="Arial" pitchFamily="34" charset="-120"/>
-              </a:rPr>
-              <a:t>6.  Output verification report · format compliance log</a:t>
-            </a:r>
-            <a:endParaRPr lang="en-US" sz="850" dirty="0"/>
-          </a:p>
-          <a:p>
-            <a:pPr algn="l" indent="0" marL="0">
-              <a:spcAft>
-                <a:spcPts val="100"/>
-              </a:spcAft>
-              <a:buNone/>
-            </a:pPr>
-            <a:r>
-              <a:rPr lang="en-US" sz="850" dirty="0">
-                <a:solidFill>
-                  <a:srgbClr val="1A2530"/>
-                </a:solidFill>
-                <a:latin typeface="Arial" pitchFamily="34" charset="0"/>
-                <a:ea typeface="Arial" pitchFamily="34" charset="-122"/>
-                <a:cs typeface="Arial" pitchFamily="34" charset="-120"/>
-              </a:rPr>
-              <a:t>7.  RAID log entry · BLOCKED Jira ticket</a:t>
-            </a:r>
-            <a:endParaRPr lang="en-US" sz="850" dirty="0"/>
-          </a:p>
-          <a:p>
-            <a:pPr algn="l" indent="0" marL="0">
-              <a:spcAft>
-                <a:spcPts val="100"/>
-              </a:spcAft>
-              <a:buNone/>
-            </a:pPr>
-            <a:r>
-              <a:rPr lang="en-US" sz="850" dirty="0">
-                <a:solidFill>
-                  <a:srgbClr val="1A2530"/>
-                </a:solidFill>
-                <a:latin typeface="Arial" pitchFamily="34" charset="0"/>
-                <a:ea typeface="Arial" pitchFamily="34" charset="-122"/>
-                <a:cs typeface="Arial" pitchFamily="34" charset="-120"/>
-              </a:rPr>
-              <a:t>8.  Signed approval record · final validation report</a:t>
-            </a:r>
-            <a:endParaRPr lang="en-US" sz="850" dirty="0"/>
-          </a:p>
-        </p:txBody>
-      </p:sp>
-      <p:sp>
-        <p:nvSpPr>
-          <p:cNvPr id="57" name="Text 55"/>
-          <p:cNvSpPr/>
-          <p:nvPr/>
-        </p:nvSpPr>
-        <p:spPr>
-          <a:xfrm>
-            <a:off x="365760" y="4850892"/>
-            <a:ext cx="5486400" cy="201168"/>
-          </a:xfrm>
-          <a:prstGeom prst="rect">
-            <a:avLst/>
-          </a:prstGeom>
-          <a:noFill/>
-          <a:ln/>
-        </p:spPr>
-        <p:txBody>
-          <a:bodyPr wrap="square" lIns="0" tIns="0" rIns="0" bIns="0" rtlCol="0" anchor="ctr"/>
-          <a:lstStyle/>
-          <a:p>
-            <a:pPr algn="l" indent="0" marL="0">
               <a:buNone/>
             </a:pPr>
             <a:r>
@@ -5279,7 +5663,7 @@
                 <a:ea typeface="Arial" pitchFamily="34" charset="-122"/>
                 <a:cs typeface="Arial" pitchFamily="34" charset="-120"/>
               </a:rPr>
-              <a:t>FCRM Risk Assessment FY2025 · MCC Team · Internal</a:t>
+              <a:t>FCRM Risk Assessment FY2025 · MCC Team · Internal · Right-click any → label to add a hyperlink</a:t>
             </a:r>
             <a:endParaRPr lang="en-US" sz="800" dirty="0"/>
           </a:p>
@@ -5287,7 +5671,7 @@
       </p:sp>
       <p:sp>
         <p:nvSpPr>
-          <p:cNvPr id="58" name="Text 56"/>
+          <p:cNvPr id="62" name="Text 60"/>
           <p:cNvSpPr/>
           <p:nvPr/>
         </p:nvSpPr>
@@ -5506,8 +5890,8 @@
         </p:nvSpPr>
         <p:spPr>
           <a:xfrm>
-            <a:off x="365760" y="1325880"/>
-            <a:ext cx="2000250" cy="868680"/>
+            <a:off x="365760" y="1760220"/>
+            <a:ext cx="2000250" cy="1188720"/>
           </a:xfrm>
           <a:prstGeom prst="rect">
             <a:avLst/>
@@ -5531,8 +5915,8 @@
         </p:nvSpPr>
         <p:spPr>
           <a:xfrm>
-            <a:off x="365760" y="1325880"/>
-            <a:ext cx="73152" cy="868680"/>
+            <a:off x="365760" y="1760220"/>
+            <a:ext cx="73152" cy="1188720"/>
           </a:xfrm>
           <a:prstGeom prst="rect">
             <a:avLst/>
@@ -5556,7 +5940,7 @@
         </p:nvSpPr>
         <p:spPr>
           <a:xfrm>
-            <a:off x="530352" y="1417320"/>
+            <a:off x="530352" y="1851660"/>
             <a:ext cx="384048" cy="384048"/>
           </a:xfrm>
           <a:prstGeom prst="ellipse">
@@ -5581,7 +5965,7 @@
         </p:nvSpPr>
         <p:spPr>
           <a:xfrm>
-            <a:off x="530352" y="1417320"/>
+            <a:off x="530352" y="1851660"/>
             <a:ext cx="384048" cy="384048"/>
           </a:xfrm>
           <a:prstGeom prst="rect">
@@ -5620,8 +6004,8 @@
         </p:nvSpPr>
         <p:spPr>
           <a:xfrm>
-            <a:off x="969264" y="1399032"/>
-            <a:ext cx="1287018" cy="722376"/>
+            <a:off x="969264" y="1833372"/>
+            <a:ext cx="1287018" cy="457200"/>
           </a:xfrm>
           <a:prstGeom prst="rect">
             <a:avLst/>
@@ -5637,7 +6021,7 @@
               <a:buNone/>
             </a:pPr>
             <a:r>
-              <a:rPr lang="en-US" sz="1150" b="1" dirty="0">
+              <a:rPr lang="en-US" sz="1100" b="1" dirty="0">
                 <a:solidFill>
                   <a:srgbClr val="1A2530"/>
                 </a:solidFill>
@@ -5647,19 +6031,58 @@
               </a:rPr>
               <a:t>Source Identification</a:t>
             </a:r>
-            <a:endParaRPr lang="en-US" sz="1150" dirty="0"/>
-          </a:p>
-        </p:txBody>
-      </p:sp>
-      <p:sp>
-        <p:nvSpPr>
-          <p:cNvPr id="11" name="Shape 9"/>
+            <a:endParaRPr lang="en-US" sz="1100" dirty="0"/>
+          </a:p>
+        </p:txBody>
+      </p:sp>
+      <p:sp>
+        <p:nvSpPr>
+          <p:cNvPr id="11" name="Text 9"/>
+          <p:cNvSpPr/>
+          <p:nvPr/>
+        </p:nvSpPr>
+        <p:spPr>
+          <a:xfrm>
+            <a:off x="530352" y="2382012"/>
+            <a:ext cx="1725930" cy="219456"/>
+          </a:xfrm>
+          <a:prstGeom prst="rect">
+            <a:avLst/>
+          </a:prstGeom>
+          <a:noFill/>
+          <a:ln/>
+        </p:spPr>
+        <p:txBody>
+          <a:bodyPr wrap="square" lIns="0" tIns="0" rIns="0" bIns="0" rtlCol="0" anchor="ctr"/>
+          <a:lstStyle/>
+          <a:p>
+            <a:pPr algn="l" indent="0" marL="0">
+              <a:buNone/>
+            </a:pPr>
+            <a:r>
+              <a:rPr lang="en-US" sz="900" i="1" dirty="0">
+                <a:solidFill>
+                  <a:srgbClr val="1A5DB0"/>
+                </a:solidFill>
+                <a:latin typeface="Arial" pitchFamily="34" charset="0"/>
+                <a:ea typeface="Arial" pitchFamily="34" charset="-122"/>
+                <a:cs typeface="Arial" pitchFamily="34" charset="-120"/>
+              </a:rPr>
+              <a:t>→ Master_Data_source_FY2025_Segment.xlsx</a:t>
+            </a:r>
+            <a:endParaRPr lang="en-US" sz="900" dirty="0"/>
+          </a:p>
+        </p:txBody>
+      </p:sp>
+      <p:sp>
+        <p:nvSpPr>
+          <p:cNvPr id="12" name="Shape 10"/>
           <p:cNvSpPr/>
           <p:nvPr/>
         </p:nvSpPr>
         <p:spPr>
           <a:xfrm rot="5400000">
-            <a:off x="2375154" y="1696212"/>
+            <a:off x="2375154" y="2290572"/>
             <a:ext cx="118872" cy="128016"/>
           </a:xfrm>
           <a:prstGeom prst="rtTriangle">
@@ -5678,14 +6101,14 @@
       </p:sp>
       <p:sp>
         <p:nvSpPr>
-          <p:cNvPr id="12" name="Shape 10"/>
-          <p:cNvSpPr/>
-          <p:nvPr/>
-        </p:nvSpPr>
-        <p:spPr>
-          <a:xfrm>
-            <a:off x="2503170" y="1325880"/>
-            <a:ext cx="2000250" cy="868680"/>
+          <p:cNvPr id="13" name="Shape 11"/>
+          <p:cNvSpPr/>
+          <p:nvPr/>
+        </p:nvSpPr>
+        <p:spPr>
+          <a:xfrm>
+            <a:off x="2503170" y="1760220"/>
+            <a:ext cx="2000250" cy="1188720"/>
           </a:xfrm>
           <a:prstGeom prst="rect">
             <a:avLst/>
@@ -5703,14 +6126,14 @@
       </p:sp>
       <p:sp>
         <p:nvSpPr>
-          <p:cNvPr id="13" name="Shape 11"/>
-          <p:cNvSpPr/>
-          <p:nvPr/>
-        </p:nvSpPr>
-        <p:spPr>
-          <a:xfrm>
-            <a:off x="2503170" y="1325880"/>
-            <a:ext cx="73152" cy="868680"/>
+          <p:cNvPr id="14" name="Shape 12"/>
+          <p:cNvSpPr/>
+          <p:nvPr/>
+        </p:nvSpPr>
+        <p:spPr>
+          <a:xfrm>
+            <a:off x="2503170" y="1760220"/>
+            <a:ext cx="73152" cy="1188720"/>
           </a:xfrm>
           <a:prstGeom prst="rect">
             <a:avLst/>
@@ -5728,13 +6151,13 @@
       </p:sp>
       <p:sp>
         <p:nvSpPr>
-          <p:cNvPr id="14" name="Shape 12"/>
-          <p:cNvSpPr/>
-          <p:nvPr/>
-        </p:nvSpPr>
-        <p:spPr>
-          <a:xfrm>
-            <a:off x="2667762" y="1417320"/>
+          <p:cNvPr id="15" name="Shape 13"/>
+          <p:cNvSpPr/>
+          <p:nvPr/>
+        </p:nvSpPr>
+        <p:spPr>
+          <a:xfrm>
+            <a:off x="2667762" y="1851660"/>
             <a:ext cx="384048" cy="384048"/>
           </a:xfrm>
           <a:prstGeom prst="ellipse">
@@ -5753,13 +6176,13 @@
       </p:sp>
       <p:sp>
         <p:nvSpPr>
-          <p:cNvPr id="15" name="Text 13"/>
-          <p:cNvSpPr/>
-          <p:nvPr/>
-        </p:nvSpPr>
-        <p:spPr>
-          <a:xfrm>
-            <a:off x="2667762" y="1417320"/>
+          <p:cNvPr id="16" name="Text 14"/>
+          <p:cNvSpPr/>
+          <p:nvPr/>
+        </p:nvSpPr>
+        <p:spPr>
+          <a:xfrm>
+            <a:off x="2667762" y="1851660"/>
             <a:ext cx="384048" cy="384048"/>
           </a:xfrm>
           <a:prstGeom prst="rect">
@@ -5792,14 +6215,14 @@
       </p:sp>
       <p:sp>
         <p:nvSpPr>
-          <p:cNvPr id="16" name="Text 14"/>
-          <p:cNvSpPr/>
-          <p:nvPr/>
-        </p:nvSpPr>
-        <p:spPr>
-          <a:xfrm>
-            <a:off x="3106674" y="1399032"/>
-            <a:ext cx="1287018" cy="722376"/>
+          <p:cNvPr id="17" name="Text 15"/>
+          <p:cNvSpPr/>
+          <p:nvPr/>
+        </p:nvSpPr>
+        <p:spPr>
+          <a:xfrm>
+            <a:off x="3106674" y="1833372"/>
+            <a:ext cx="1287018" cy="457200"/>
           </a:xfrm>
           <a:prstGeom prst="rect">
             <a:avLst/>
@@ -5815,7 +6238,7 @@
               <a:buNone/>
             </a:pPr>
             <a:r>
-              <a:rPr lang="en-US" sz="1150" b="1" dirty="0">
+              <a:rPr lang="en-US" sz="1100" b="1" dirty="0">
                 <a:solidFill>
                   <a:srgbClr val="1A2530"/>
                 </a:solidFill>
@@ -5825,19 +6248,58 @@
               </a:rPr>
               <a:t>Access Enablement</a:t>
             </a:r>
-            <a:endParaRPr lang="en-US" sz="1150" dirty="0"/>
-          </a:p>
-        </p:txBody>
-      </p:sp>
-      <p:sp>
-        <p:nvSpPr>
-          <p:cNvPr id="17" name="Shape 15"/>
+            <a:endParaRPr lang="en-US" sz="1100" dirty="0"/>
+          </a:p>
+        </p:txBody>
+      </p:sp>
+      <p:sp>
+        <p:nvSpPr>
+          <p:cNvPr id="18" name="Text 16"/>
+          <p:cNvSpPr/>
+          <p:nvPr/>
+        </p:nvSpPr>
+        <p:spPr>
+          <a:xfrm>
+            <a:off x="2667762" y="2382012"/>
+            <a:ext cx="1725930" cy="219456"/>
+          </a:xfrm>
+          <a:prstGeom prst="rect">
+            <a:avLst/>
+          </a:prstGeom>
+          <a:noFill/>
+          <a:ln/>
+        </p:spPr>
+        <p:txBody>
+          <a:bodyPr wrap="square" lIns="0" tIns="0" rIns="0" bIns="0" rtlCol="0" anchor="ctr"/>
+          <a:lstStyle/>
+          <a:p>
+            <a:pPr algn="l" indent="0" marL="0">
+              <a:buNone/>
+            </a:pPr>
+            <a:r>
+              <a:rPr lang="en-US" sz="900" i="1" dirty="0">
+                <a:solidFill>
+                  <a:srgbClr val="1A5DB0"/>
+                </a:solidFill>
+                <a:latin typeface="Arial" pitchFamily="34" charset="0"/>
+                <a:ea typeface="Arial" pitchFamily="34" charset="-122"/>
+                <a:cs typeface="Arial" pitchFamily="34" charset="-120"/>
+              </a:rPr>
+              <a:t>→ 2025 PIA Approval Emails</a:t>
+            </a:r>
+            <a:endParaRPr lang="en-US" sz="900" dirty="0"/>
+          </a:p>
+        </p:txBody>
+      </p:sp>
+      <p:sp>
+        <p:nvSpPr>
+          <p:cNvPr id="19" name="Shape 17"/>
           <p:cNvSpPr/>
           <p:nvPr/>
         </p:nvSpPr>
         <p:spPr>
           <a:xfrm rot="5400000">
-            <a:off x="4512564" y="1696212"/>
+            <a:off x="4512564" y="2290572"/>
             <a:ext cx="118872" cy="128016"/>
           </a:xfrm>
           <a:prstGeom prst="rtTriangle">
@@ -5856,14 +6318,14 @@
       </p:sp>
       <p:sp>
         <p:nvSpPr>
-          <p:cNvPr id="18" name="Shape 16"/>
-          <p:cNvSpPr/>
-          <p:nvPr/>
-        </p:nvSpPr>
-        <p:spPr>
-          <a:xfrm>
-            <a:off x="4640580" y="1325880"/>
-            <a:ext cx="2000250" cy="868680"/>
+          <p:cNvPr id="20" name="Shape 18"/>
+          <p:cNvSpPr/>
+          <p:nvPr/>
+        </p:nvSpPr>
+        <p:spPr>
+          <a:xfrm>
+            <a:off x="4640580" y="1760220"/>
+            <a:ext cx="2000250" cy="1188720"/>
           </a:xfrm>
           <a:prstGeom prst="rect">
             <a:avLst/>
@@ -5881,14 +6343,14 @@
       </p:sp>
       <p:sp>
         <p:nvSpPr>
-          <p:cNvPr id="19" name="Shape 17"/>
-          <p:cNvSpPr/>
-          <p:nvPr/>
-        </p:nvSpPr>
-        <p:spPr>
-          <a:xfrm>
-            <a:off x="4640580" y="1325880"/>
-            <a:ext cx="73152" cy="868680"/>
+          <p:cNvPr id="21" name="Shape 19"/>
+          <p:cNvSpPr/>
+          <p:nvPr/>
+        </p:nvSpPr>
+        <p:spPr>
+          <a:xfrm>
+            <a:off x="4640580" y="1760220"/>
+            <a:ext cx="73152" cy="1188720"/>
           </a:xfrm>
           <a:prstGeom prst="rect">
             <a:avLst/>
@@ -5906,13 +6368,13 @@
       </p:sp>
       <p:sp>
         <p:nvSpPr>
-          <p:cNvPr id="20" name="Shape 18"/>
-          <p:cNvSpPr/>
-          <p:nvPr/>
-        </p:nvSpPr>
-        <p:spPr>
-          <a:xfrm>
-            <a:off x="4805172" y="1417320"/>
+          <p:cNvPr id="22" name="Shape 20"/>
+          <p:cNvSpPr/>
+          <p:nvPr/>
+        </p:nvSpPr>
+        <p:spPr>
+          <a:xfrm>
+            <a:off x="4805172" y="1851660"/>
             <a:ext cx="384048" cy="384048"/>
           </a:xfrm>
           <a:prstGeom prst="ellipse">
@@ -5931,13 +6393,13 @@
       </p:sp>
       <p:sp>
         <p:nvSpPr>
-          <p:cNvPr id="21" name="Text 19"/>
-          <p:cNvSpPr/>
-          <p:nvPr/>
-        </p:nvSpPr>
-        <p:spPr>
-          <a:xfrm>
-            <a:off x="4805172" y="1417320"/>
+          <p:cNvPr id="23" name="Text 21"/>
+          <p:cNvSpPr/>
+          <p:nvPr/>
+        </p:nvSpPr>
+        <p:spPr>
+          <a:xfrm>
+            <a:off x="4805172" y="1851660"/>
             <a:ext cx="384048" cy="384048"/>
           </a:xfrm>
           <a:prstGeom prst="rect">
@@ -5970,14 +6432,14 @@
       </p:sp>
       <p:sp>
         <p:nvSpPr>
-          <p:cNvPr id="22" name="Text 20"/>
-          <p:cNvSpPr/>
-          <p:nvPr/>
-        </p:nvSpPr>
-        <p:spPr>
-          <a:xfrm>
-            <a:off x="5244084" y="1399032"/>
-            <a:ext cx="1287018" cy="722376"/>
+          <p:cNvPr id="24" name="Text 22"/>
+          <p:cNvSpPr/>
+          <p:nvPr/>
+        </p:nvSpPr>
+        <p:spPr>
+          <a:xfrm>
+            <a:off x="5244084" y="1833372"/>
+            <a:ext cx="1287018" cy="457200"/>
           </a:xfrm>
           <a:prstGeom prst="rect">
             <a:avLst/>
@@ -5993,7 +6455,7 @@
               <a:buNone/>
             </a:pPr>
             <a:r>
-              <a:rPr lang="en-US" sz="1150" b="1" dirty="0">
+              <a:rPr lang="en-US" sz="1100" b="1" dirty="0">
                 <a:solidFill>
                   <a:srgbClr val="1A2530"/>
                 </a:solidFill>
@@ -6003,19 +6465,58 @@
               </a:rPr>
               <a:t>Data Extraction</a:t>
             </a:r>
-            <a:endParaRPr lang="en-US" sz="1150" dirty="0"/>
-          </a:p>
-        </p:txBody>
-      </p:sp>
-      <p:sp>
-        <p:nvSpPr>
-          <p:cNvPr id="23" name="Shape 21"/>
+            <a:endParaRPr lang="en-US" sz="1100" dirty="0"/>
+          </a:p>
+        </p:txBody>
+      </p:sp>
+      <p:sp>
+        <p:nvSpPr>
+          <p:cNvPr id="25" name="Text 23"/>
+          <p:cNvSpPr/>
+          <p:nvPr/>
+        </p:nvSpPr>
+        <p:spPr>
+          <a:xfrm>
+            <a:off x="4805172" y="2382012"/>
+            <a:ext cx="1725930" cy="219456"/>
+          </a:xfrm>
+          <a:prstGeom prst="rect">
+            <a:avLst/>
+          </a:prstGeom>
+          <a:noFill/>
+          <a:ln/>
+        </p:spPr>
+        <p:txBody>
+          <a:bodyPr wrap="square" lIns="0" tIns="0" rIns="0" bIns="0" rtlCol="0" anchor="ctr"/>
+          <a:lstStyle/>
+          <a:p>
+            <a:pPr algn="l" indent="0" marL="0">
+              <a:buNone/>
+            </a:pPr>
+            <a:r>
+              <a:rPr lang="en-US" sz="900" i="1" dirty="0">
+                <a:solidFill>
+                  <a:srgbClr val="1A5DB0"/>
+                </a:solidFill>
+                <a:latin typeface="Arial" pitchFamily="34" charset="0"/>
+                <a:ea typeface="Arial" pitchFamily="34" charset="-122"/>
+                <a:cs typeface="Arial" pitchFamily="34" charset="-120"/>
+              </a:rPr>
+              <a:t>→ 2025 ADIDO Load Files</a:t>
+            </a:r>
+            <a:endParaRPr lang="en-US" sz="900" dirty="0"/>
+          </a:p>
+        </p:txBody>
+      </p:sp>
+      <p:sp>
+        <p:nvSpPr>
+          <p:cNvPr id="26" name="Shape 24"/>
           <p:cNvSpPr/>
           <p:nvPr/>
         </p:nvSpPr>
         <p:spPr>
           <a:xfrm rot="5400000">
-            <a:off x="6649974" y="1696212"/>
+            <a:off x="6649974" y="2290572"/>
             <a:ext cx="118872" cy="128016"/>
           </a:xfrm>
           <a:prstGeom prst="rtTriangle">
@@ -6034,14 +6535,14 @@
       </p:sp>
       <p:sp>
         <p:nvSpPr>
-          <p:cNvPr id="24" name="Shape 22"/>
-          <p:cNvSpPr/>
-          <p:nvPr/>
-        </p:nvSpPr>
-        <p:spPr>
-          <a:xfrm>
-            <a:off x="6777990" y="1325880"/>
-            <a:ext cx="2000250" cy="868680"/>
+          <p:cNvPr id="27" name="Shape 25"/>
+          <p:cNvSpPr/>
+          <p:nvPr/>
+        </p:nvSpPr>
+        <p:spPr>
+          <a:xfrm>
+            <a:off x="6777990" y="1760220"/>
+            <a:ext cx="2000250" cy="1188720"/>
           </a:xfrm>
           <a:prstGeom prst="rect">
             <a:avLst/>
@@ -6059,14 +6560,14 @@
       </p:sp>
       <p:sp>
         <p:nvSpPr>
-          <p:cNvPr id="25" name="Shape 23"/>
-          <p:cNvSpPr/>
-          <p:nvPr/>
-        </p:nvSpPr>
-        <p:spPr>
-          <a:xfrm>
-            <a:off x="6777990" y="1325880"/>
-            <a:ext cx="73152" cy="868680"/>
+          <p:cNvPr id="28" name="Shape 26"/>
+          <p:cNvSpPr/>
+          <p:nvPr/>
+        </p:nvSpPr>
+        <p:spPr>
+          <a:xfrm>
+            <a:off x="6777990" y="1760220"/>
+            <a:ext cx="73152" cy="1188720"/>
           </a:xfrm>
           <a:prstGeom prst="rect">
             <a:avLst/>
@@ -6084,13 +6585,13 @@
       </p:sp>
       <p:sp>
         <p:nvSpPr>
-          <p:cNvPr id="26" name="Shape 24"/>
-          <p:cNvSpPr/>
-          <p:nvPr/>
-        </p:nvSpPr>
-        <p:spPr>
-          <a:xfrm>
-            <a:off x="6942582" y="1417320"/>
+          <p:cNvPr id="29" name="Shape 27"/>
+          <p:cNvSpPr/>
+          <p:nvPr/>
+        </p:nvSpPr>
+        <p:spPr>
+          <a:xfrm>
+            <a:off x="6942582" y="1851660"/>
             <a:ext cx="384048" cy="384048"/>
           </a:xfrm>
           <a:prstGeom prst="ellipse">
@@ -6109,13 +6610,13 @@
       </p:sp>
       <p:sp>
         <p:nvSpPr>
-          <p:cNvPr id="27" name="Text 25"/>
-          <p:cNvSpPr/>
-          <p:nvPr/>
-        </p:nvSpPr>
-        <p:spPr>
-          <a:xfrm>
-            <a:off x="6942582" y="1417320"/>
+          <p:cNvPr id="30" name="Text 28"/>
+          <p:cNvSpPr/>
+          <p:nvPr/>
+        </p:nvSpPr>
+        <p:spPr>
+          <a:xfrm>
+            <a:off x="6942582" y="1851660"/>
             <a:ext cx="384048" cy="384048"/>
           </a:xfrm>
           <a:prstGeom prst="rect">
@@ -6148,14 +6649,14 @@
       </p:sp>
       <p:sp>
         <p:nvSpPr>
-          <p:cNvPr id="28" name="Text 26"/>
-          <p:cNvSpPr/>
-          <p:nvPr/>
-        </p:nvSpPr>
-        <p:spPr>
-          <a:xfrm>
-            <a:off x="7381494" y="1399032"/>
-            <a:ext cx="1287018" cy="722376"/>
+          <p:cNvPr id="31" name="Text 29"/>
+          <p:cNvSpPr/>
+          <p:nvPr/>
+        </p:nvSpPr>
+        <p:spPr>
+          <a:xfrm>
+            <a:off x="7381494" y="1833372"/>
+            <a:ext cx="1287018" cy="457200"/>
           </a:xfrm>
           <a:prstGeom prst="rect">
             <a:avLst/>
@@ -6171,7 +6672,7 @@
               <a:buNone/>
             </a:pPr>
             <a:r>
-              <a:rPr lang="en-US" sz="1150" b="1" dirty="0">
+              <a:rPr lang="en-US" sz="1100" b="1" dirty="0">
                 <a:solidFill>
                   <a:srgbClr val="1A2530"/>
                 </a:solidFill>
@@ -6181,19 +6682,58 @@
               </a:rPr>
               <a:t>Data Understanding</a:t>
             </a:r>
-            <a:endParaRPr lang="en-US" sz="1150" dirty="0"/>
-          </a:p>
-        </p:txBody>
-      </p:sp>
-      <p:sp>
-        <p:nvSpPr>
-          <p:cNvPr id="29" name="Shape 27"/>
+            <a:endParaRPr lang="en-US" sz="1100" dirty="0"/>
+          </a:p>
+        </p:txBody>
+      </p:sp>
+      <p:sp>
+        <p:nvSpPr>
+          <p:cNvPr id="32" name="Text 30"/>
+          <p:cNvSpPr/>
+          <p:nvPr/>
+        </p:nvSpPr>
+        <p:spPr>
+          <a:xfrm>
+            <a:off x="6942582" y="2382012"/>
+            <a:ext cx="1725930" cy="219456"/>
+          </a:xfrm>
+          <a:prstGeom prst="rect">
+            <a:avLst/>
+          </a:prstGeom>
+          <a:noFill/>
+          <a:ln/>
+        </p:spPr>
+        <p:txBody>
+          <a:bodyPr wrap="square" lIns="0" tIns="0" rIns="0" bIns="0" rtlCol="0" anchor="ctr"/>
+          <a:lstStyle/>
+          <a:p>
+            <a:pPr algn="l" indent="0" marL="0">
+              <a:buNone/>
+            </a:pPr>
+            <a:r>
+              <a:rPr lang="en-US" sz="900" i="1" dirty="0">
+                <a:solidFill>
+                  <a:srgbClr val="1A5DB0"/>
+                </a:solidFill>
+                <a:latin typeface="Arial" pitchFamily="34" charset="0"/>
+                <a:ea typeface="Arial" pitchFamily="34" charset="-122"/>
+                <a:cs typeface="Arial" pitchFamily="34" charset="-120"/>
+              </a:rPr>
+              <a:t>→ 2025 Approved Metadata Templates</a:t>
+            </a:r>
+            <a:endParaRPr lang="en-US" sz="900" dirty="0"/>
+          </a:p>
+        </p:txBody>
+      </p:sp>
+      <p:sp>
+        <p:nvSpPr>
+          <p:cNvPr id="33" name="Shape 31"/>
           <p:cNvSpPr/>
           <p:nvPr/>
         </p:nvSpPr>
         <p:spPr>
           <a:xfrm rot="10800000">
-            <a:off x="8641080" y="2235708"/>
+            <a:off x="8641080" y="2990088"/>
             <a:ext cx="146304" cy="146304"/>
           </a:xfrm>
           <a:prstGeom prst="rtTriangle">
@@ -6212,14 +6752,14 @@
       </p:sp>
       <p:sp>
         <p:nvSpPr>
-          <p:cNvPr id="30" name="Shape 28"/>
-          <p:cNvSpPr/>
-          <p:nvPr/>
-        </p:nvSpPr>
-        <p:spPr>
-          <a:xfrm>
-            <a:off x="365760" y="2423160"/>
-            <a:ext cx="2712720" cy="868680"/>
+          <p:cNvPr id="34" name="Shape 32"/>
+          <p:cNvSpPr/>
+          <p:nvPr/>
+        </p:nvSpPr>
+        <p:spPr>
+          <a:xfrm>
+            <a:off x="365760" y="3177540"/>
+            <a:ext cx="2712720" cy="1188720"/>
           </a:xfrm>
           <a:prstGeom prst="rect">
             <a:avLst/>
@@ -6237,14 +6777,14 @@
       </p:sp>
       <p:sp>
         <p:nvSpPr>
-          <p:cNvPr id="31" name="Shape 29"/>
-          <p:cNvSpPr/>
-          <p:nvPr/>
-        </p:nvSpPr>
-        <p:spPr>
-          <a:xfrm>
-            <a:off x="365760" y="2423160"/>
-            <a:ext cx="73152" cy="868680"/>
+          <p:cNvPr id="35" name="Shape 33"/>
+          <p:cNvSpPr/>
+          <p:nvPr/>
+        </p:nvSpPr>
+        <p:spPr>
+          <a:xfrm>
+            <a:off x="365760" y="3177540"/>
+            <a:ext cx="73152" cy="1188720"/>
           </a:xfrm>
           <a:prstGeom prst="rect">
             <a:avLst/>
@@ -6262,13 +6802,13 @@
       </p:sp>
       <p:sp>
         <p:nvSpPr>
-          <p:cNvPr id="32" name="Shape 30"/>
-          <p:cNvSpPr/>
-          <p:nvPr/>
-        </p:nvSpPr>
-        <p:spPr>
-          <a:xfrm>
-            <a:off x="530352" y="2514600"/>
+          <p:cNvPr id="36" name="Shape 34"/>
+          <p:cNvSpPr/>
+          <p:nvPr/>
+        </p:nvSpPr>
+        <p:spPr>
+          <a:xfrm>
+            <a:off x="530352" y="3268980"/>
             <a:ext cx="384048" cy="384048"/>
           </a:xfrm>
           <a:prstGeom prst="ellipse">
@@ -6287,13 +6827,13 @@
       </p:sp>
       <p:sp>
         <p:nvSpPr>
-          <p:cNvPr id="33" name="Text 31"/>
-          <p:cNvSpPr/>
-          <p:nvPr/>
-        </p:nvSpPr>
-        <p:spPr>
-          <a:xfrm>
-            <a:off x="530352" y="2514600"/>
+          <p:cNvPr id="37" name="Text 35"/>
+          <p:cNvSpPr/>
+          <p:nvPr/>
+        </p:nvSpPr>
+        <p:spPr>
+          <a:xfrm>
+            <a:off x="530352" y="3268980"/>
             <a:ext cx="384048" cy="384048"/>
           </a:xfrm>
           <a:prstGeom prst="rect">
@@ -6326,14 +6866,14 @@
       </p:sp>
       <p:sp>
         <p:nvSpPr>
-          <p:cNvPr id="34" name="Text 32"/>
-          <p:cNvSpPr/>
-          <p:nvPr/>
-        </p:nvSpPr>
-        <p:spPr>
-          <a:xfrm>
-            <a:off x="969264" y="2496312"/>
-            <a:ext cx="1999488" cy="722376"/>
+          <p:cNvPr id="38" name="Text 36"/>
+          <p:cNvSpPr/>
+          <p:nvPr/>
+        </p:nvSpPr>
+        <p:spPr>
+          <a:xfrm>
+            <a:off x="969264" y="3250692"/>
+            <a:ext cx="1999488" cy="457200"/>
           </a:xfrm>
           <a:prstGeom prst="rect">
             <a:avLst/>
@@ -6349,7 +6889,7 @@
               <a:buNone/>
             </a:pPr>
             <a:r>
-              <a:rPr lang="en-US" sz="1150" b="1" dirty="0">
+              <a:rPr lang="en-US" sz="1100" b="1" dirty="0">
                 <a:solidFill>
                   <a:srgbClr val="1A2530"/>
                 </a:solidFill>
@@ -6359,19 +6899,78 @@
               </a:rPr>
               <a:t>Lineage Documentation</a:t>
             </a:r>
-            <a:endParaRPr lang="en-US" sz="1150" dirty="0"/>
-          </a:p>
-        </p:txBody>
-      </p:sp>
-      <p:sp>
-        <p:nvSpPr>
-          <p:cNvPr id="35" name="Shape 33"/>
+            <a:endParaRPr lang="en-US" sz="1100" dirty="0"/>
+          </a:p>
+        </p:txBody>
+      </p:sp>
+      <p:sp>
+        <p:nvSpPr>
+          <p:cNvPr id="39" name="Text 37"/>
+          <p:cNvSpPr/>
+          <p:nvPr/>
+        </p:nvSpPr>
+        <p:spPr>
+          <a:xfrm>
+            <a:off x="530352" y="3799332"/>
+            <a:ext cx="2401824" cy="512064"/>
+          </a:xfrm>
+          <a:prstGeom prst="rect">
+            <a:avLst/>
+          </a:prstGeom>
+          <a:noFill/>
+          <a:ln/>
+        </p:spPr>
+        <p:txBody>
+          <a:bodyPr wrap="square" lIns="0" tIns="0" rIns="0" bIns="0" rtlCol="0" anchor="t"/>
+          <a:lstStyle/>
+          <a:p>
+            <a:pPr algn="l" indent="0" marL="0">
+              <a:lnSpc>
+                <a:spcPct val="95000"/>
+              </a:lnSpc>
+              <a:buNone/>
+            </a:pPr>
+            <a:r>
+              <a:rPr lang="en-US" sz="850" b="1" dirty="0">
+                <a:solidFill>
+                  <a:srgbClr val="6B7785"/>
+                </a:solidFill>
+                <a:latin typeface="Arial" pitchFamily="34" charset="0"/>
+                <a:ea typeface="Arial" pitchFamily="34" charset="-122"/>
+                <a:cs typeface="Arial" pitchFamily="34" charset="-120"/>
+              </a:rPr>
+              <a:t>Key artifacts:  </a:t>
+            </a:r>
+            <a:pPr algn="l" indent="0" marL="0">
+              <a:lnSpc>
+                <a:spcPct val="95000"/>
+              </a:lnSpc>
+              <a:buNone/>
+            </a:pPr>
+            <a:r>
+              <a:rPr lang="en-US" sz="850" dirty="0">
+                <a:solidFill>
+                  <a:srgbClr val="6B7785"/>
+                </a:solidFill>
+                <a:latin typeface="Arial" pitchFamily="34" charset="0"/>
+                <a:ea typeface="Arial" pitchFamily="34" charset="-122"/>
+                <a:cs typeface="Arial" pitchFamily="34" charset="-120"/>
+              </a:rPr>
+              <a:t>Lineage diagrams, transformation logic, lineage register</a:t>
+            </a:r>
+            <a:endParaRPr lang="en-US" sz="850" dirty="0"/>
+          </a:p>
+        </p:txBody>
+      </p:sp>
+      <p:sp>
+        <p:nvSpPr>
+          <p:cNvPr id="40" name="Shape 38"/>
           <p:cNvSpPr/>
           <p:nvPr/>
         </p:nvSpPr>
         <p:spPr>
           <a:xfrm rot="5400000">
-            <a:off x="3087624" y="2793492"/>
+            <a:off x="3087624" y="3707892"/>
             <a:ext cx="118872" cy="128016"/>
           </a:xfrm>
           <a:prstGeom prst="rtTriangle">
@@ -6390,14 +6989,14 @@
       </p:sp>
       <p:sp>
         <p:nvSpPr>
-          <p:cNvPr id="36" name="Shape 34"/>
-          <p:cNvSpPr/>
-          <p:nvPr/>
-        </p:nvSpPr>
-        <p:spPr>
-          <a:xfrm>
-            <a:off x="3215640" y="2423160"/>
-            <a:ext cx="2712720" cy="868680"/>
+          <p:cNvPr id="41" name="Shape 39"/>
+          <p:cNvSpPr/>
+          <p:nvPr/>
+        </p:nvSpPr>
+        <p:spPr>
+          <a:xfrm>
+            <a:off x="3215640" y="3177540"/>
+            <a:ext cx="2712720" cy="1188720"/>
           </a:xfrm>
           <a:prstGeom prst="rect">
             <a:avLst/>
@@ -6415,14 +7014,14 @@
       </p:sp>
       <p:sp>
         <p:nvSpPr>
-          <p:cNvPr id="37" name="Shape 35"/>
-          <p:cNvSpPr/>
-          <p:nvPr/>
-        </p:nvSpPr>
-        <p:spPr>
-          <a:xfrm>
-            <a:off x="3215640" y="2423160"/>
-            <a:ext cx="73152" cy="868680"/>
+          <p:cNvPr id="42" name="Shape 40"/>
+          <p:cNvSpPr/>
+          <p:nvPr/>
+        </p:nvSpPr>
+        <p:spPr>
+          <a:xfrm>
+            <a:off x="3215640" y="3177540"/>
+            <a:ext cx="73152" cy="1188720"/>
           </a:xfrm>
           <a:prstGeom prst="rect">
             <a:avLst/>
@@ -6440,13 +7039,13 @@
       </p:sp>
       <p:sp>
         <p:nvSpPr>
-          <p:cNvPr id="38" name="Shape 36"/>
-          <p:cNvSpPr/>
-          <p:nvPr/>
-        </p:nvSpPr>
-        <p:spPr>
-          <a:xfrm>
-            <a:off x="3380232" y="2514600"/>
+          <p:cNvPr id="43" name="Shape 41"/>
+          <p:cNvSpPr/>
+          <p:nvPr/>
+        </p:nvSpPr>
+        <p:spPr>
+          <a:xfrm>
+            <a:off x="3380232" y="3268980"/>
             <a:ext cx="384048" cy="384048"/>
           </a:xfrm>
           <a:prstGeom prst="ellipse">
@@ -6465,13 +7064,13 @@
       </p:sp>
       <p:sp>
         <p:nvSpPr>
-          <p:cNvPr id="39" name="Text 37"/>
-          <p:cNvSpPr/>
-          <p:nvPr/>
-        </p:nvSpPr>
-        <p:spPr>
-          <a:xfrm>
-            <a:off x="3380232" y="2514600"/>
+          <p:cNvPr id="44" name="Text 42"/>
+          <p:cNvSpPr/>
+          <p:nvPr/>
+        </p:nvSpPr>
+        <p:spPr>
+          <a:xfrm>
+            <a:off x="3380232" y="3268980"/>
             <a:ext cx="384048" cy="384048"/>
           </a:xfrm>
           <a:prstGeom prst="rect">
@@ -6504,14 +7103,14 @@
       </p:sp>
       <p:sp>
         <p:nvSpPr>
-          <p:cNvPr id="40" name="Text 38"/>
-          <p:cNvSpPr/>
-          <p:nvPr/>
-        </p:nvSpPr>
-        <p:spPr>
-          <a:xfrm>
-            <a:off x="3819144" y="2496312"/>
-            <a:ext cx="1999488" cy="722376"/>
+          <p:cNvPr id="45" name="Text 43"/>
+          <p:cNvSpPr/>
+          <p:nvPr/>
+        </p:nvSpPr>
+        <p:spPr>
+          <a:xfrm>
+            <a:off x="3819144" y="3250692"/>
+            <a:ext cx="1999488" cy="457200"/>
           </a:xfrm>
           <a:prstGeom prst="rect">
             <a:avLst/>
@@ -6527,7 +7126,7 @@
               <a:buNone/>
             </a:pPr>
             <a:r>
-              <a:rPr lang="en-US" sz="1150" b="1" dirty="0">
+              <a:rPr lang="en-US" sz="1100" b="1" dirty="0">
                 <a:solidFill>
                   <a:srgbClr val="1A2530"/>
                 </a:solidFill>
@@ -6537,19 +7136,78 @@
               </a:rPr>
               <a:t>Refresh Management</a:t>
             </a:r>
-            <a:endParaRPr lang="en-US" sz="1150" dirty="0"/>
-          </a:p>
-        </p:txBody>
-      </p:sp>
-      <p:sp>
-        <p:nvSpPr>
-          <p:cNvPr id="41" name="Shape 39"/>
+            <a:endParaRPr lang="en-US" sz="1100" dirty="0"/>
+          </a:p>
+        </p:txBody>
+      </p:sp>
+      <p:sp>
+        <p:nvSpPr>
+          <p:cNvPr id="46" name="Text 44"/>
+          <p:cNvSpPr/>
+          <p:nvPr/>
+        </p:nvSpPr>
+        <p:spPr>
+          <a:xfrm>
+            <a:off x="3380232" y="3799332"/>
+            <a:ext cx="2401824" cy="512064"/>
+          </a:xfrm>
+          <a:prstGeom prst="rect">
+            <a:avLst/>
+          </a:prstGeom>
+          <a:noFill/>
+          <a:ln/>
+        </p:spPr>
+        <p:txBody>
+          <a:bodyPr wrap="square" lIns="0" tIns="0" rIns="0" bIns="0" rtlCol="0" anchor="t"/>
+          <a:lstStyle/>
+          <a:p>
+            <a:pPr algn="l" indent="0" marL="0">
+              <a:lnSpc>
+                <a:spcPct val="95000"/>
+              </a:lnSpc>
+              <a:buNone/>
+            </a:pPr>
+            <a:r>
+              <a:rPr lang="en-US" sz="850" b="1" dirty="0">
+                <a:solidFill>
+                  <a:srgbClr val="6B7785"/>
+                </a:solidFill>
+                <a:latin typeface="Arial" pitchFamily="34" charset="0"/>
+                <a:ea typeface="Arial" pitchFamily="34" charset="-122"/>
+                <a:cs typeface="Arial" pitchFamily="34" charset="-120"/>
+              </a:rPr>
+              <a:t>Key artifacts:  </a:t>
+            </a:r>
+            <a:pPr algn="l" indent="0" marL="0">
+              <a:lnSpc>
+                <a:spcPct val="95000"/>
+              </a:lnSpc>
+              <a:buNone/>
+            </a:pPr>
+            <a:r>
+              <a:rPr lang="en-US" sz="850" dirty="0">
+                <a:solidFill>
+                  <a:srgbClr val="6B7785"/>
+                </a:solidFill>
+                <a:latin typeface="Arial" pitchFamily="34" charset="0"/>
+                <a:ea typeface="Arial" pitchFamily="34" charset="-122"/>
+                <a:cs typeface="Arial" pitchFamily="34" charset="-120"/>
+              </a:rPr>
+              <a:t>Refresh schedule, refresh activity log, job logs</a:t>
+            </a:r>
+            <a:endParaRPr lang="en-US" sz="850" dirty="0"/>
+          </a:p>
+        </p:txBody>
+      </p:sp>
+      <p:sp>
+        <p:nvSpPr>
+          <p:cNvPr id="47" name="Shape 45"/>
           <p:cNvSpPr/>
           <p:nvPr/>
         </p:nvSpPr>
         <p:spPr>
           <a:xfrm rot="5400000">
-            <a:off x="5937504" y="2793492"/>
+            <a:off x="5937504" y="3707892"/>
             <a:ext cx="118872" cy="128016"/>
           </a:xfrm>
           <a:prstGeom prst="rtTriangle">
@@ -6568,14 +7226,14 @@
       </p:sp>
       <p:sp>
         <p:nvSpPr>
-          <p:cNvPr id="42" name="Shape 40"/>
-          <p:cNvSpPr/>
-          <p:nvPr/>
-        </p:nvSpPr>
-        <p:spPr>
-          <a:xfrm>
-            <a:off x="6065520" y="2423160"/>
-            <a:ext cx="2712720" cy="868680"/>
+          <p:cNvPr id="48" name="Shape 46"/>
+          <p:cNvSpPr/>
+          <p:nvPr/>
+        </p:nvSpPr>
+        <p:spPr>
+          <a:xfrm>
+            <a:off x="6065520" y="3177540"/>
+            <a:ext cx="2712720" cy="1188720"/>
           </a:xfrm>
           <a:prstGeom prst="rect">
             <a:avLst/>
@@ -6593,14 +7251,14 @@
       </p:sp>
       <p:sp>
         <p:nvSpPr>
-          <p:cNvPr id="43" name="Shape 41"/>
-          <p:cNvSpPr/>
-          <p:nvPr/>
-        </p:nvSpPr>
-        <p:spPr>
-          <a:xfrm>
-            <a:off x="6065520" y="2423160"/>
-            <a:ext cx="73152" cy="868680"/>
+          <p:cNvPr id="49" name="Shape 47"/>
+          <p:cNvSpPr/>
+          <p:nvPr/>
+        </p:nvSpPr>
+        <p:spPr>
+          <a:xfrm>
+            <a:off x="6065520" y="3177540"/>
+            <a:ext cx="73152" cy="1188720"/>
           </a:xfrm>
           <a:prstGeom prst="rect">
             <a:avLst/>
@@ -6618,13 +7276,13 @@
       </p:sp>
       <p:sp>
         <p:nvSpPr>
-          <p:cNvPr id="44" name="Shape 42"/>
-          <p:cNvSpPr/>
-          <p:nvPr/>
-        </p:nvSpPr>
-        <p:spPr>
-          <a:xfrm>
-            <a:off x="6230112" y="2514600"/>
+          <p:cNvPr id="50" name="Shape 48"/>
+          <p:cNvSpPr/>
+          <p:nvPr/>
+        </p:nvSpPr>
+        <p:spPr>
+          <a:xfrm>
+            <a:off x="6230112" y="3268980"/>
             <a:ext cx="384048" cy="384048"/>
           </a:xfrm>
           <a:prstGeom prst="ellipse">
@@ -6643,13 +7301,13 @@
       </p:sp>
       <p:sp>
         <p:nvSpPr>
-          <p:cNvPr id="45" name="Text 43"/>
-          <p:cNvSpPr/>
-          <p:nvPr/>
-        </p:nvSpPr>
-        <p:spPr>
-          <a:xfrm>
-            <a:off x="6230112" y="2514600"/>
+          <p:cNvPr id="51" name="Text 49"/>
+          <p:cNvSpPr/>
+          <p:nvPr/>
+        </p:nvSpPr>
+        <p:spPr>
+          <a:xfrm>
+            <a:off x="6230112" y="3268980"/>
             <a:ext cx="384048" cy="384048"/>
           </a:xfrm>
           <a:prstGeom prst="rect">
@@ -6682,14 +7340,14 @@
       </p:sp>
       <p:sp>
         <p:nvSpPr>
-          <p:cNvPr id="46" name="Text 44"/>
-          <p:cNvSpPr/>
-          <p:nvPr/>
-        </p:nvSpPr>
-        <p:spPr>
-          <a:xfrm>
-            <a:off x="6669024" y="2496312"/>
-            <a:ext cx="1999488" cy="722376"/>
+          <p:cNvPr id="52" name="Text 50"/>
+          <p:cNvSpPr/>
+          <p:nvPr/>
+        </p:nvSpPr>
+        <p:spPr>
+          <a:xfrm>
+            <a:off x="6669024" y="3250692"/>
+            <a:ext cx="1999488" cy="457200"/>
           </a:xfrm>
           <a:prstGeom prst="rect">
             <a:avLst/>
@@ -6705,7 +7363,7 @@
               <a:buNone/>
             </a:pPr>
             <a:r>
-              <a:rPr lang="en-US" sz="1150" b="1" dirty="0">
+              <a:rPr lang="en-US" sz="1100" b="1" dirty="0">
                 <a:solidFill>
                   <a:srgbClr val="1A2530"/>
                 </a:solidFill>
@@ -6715,45 +7373,20 @@
               </a:rPr>
               <a:t>Data Retention</a:t>
             </a:r>
-            <a:endParaRPr lang="en-US" sz="1150" dirty="0"/>
-          </a:p>
-        </p:txBody>
-      </p:sp>
-      <p:sp>
-        <p:nvSpPr>
-          <p:cNvPr id="47" name="Shape 45"/>
-          <p:cNvSpPr/>
-          <p:nvPr/>
-        </p:nvSpPr>
-        <p:spPr>
-          <a:xfrm>
-            <a:off x="365760" y="3611880"/>
-            <a:ext cx="8412480" cy="1188720"/>
-          </a:xfrm>
-          <a:prstGeom prst="rect">
-            <a:avLst/>
-          </a:prstGeom>
-          <a:solidFill>
-            <a:srgbClr val="F4F6F8"/>
-          </a:solidFill>
-          <a:ln w="6350">
-            <a:solidFill>
-              <a:srgbClr val="D6DBE2"/>
-            </a:solidFill>
-            <a:prstDash val="solid"/>
-          </a:ln>
-        </p:spPr>
-      </p:sp>
-      <p:sp>
-        <p:nvSpPr>
-          <p:cNvPr id="48" name="Text 46"/>
-          <p:cNvSpPr/>
-          <p:nvPr/>
-        </p:nvSpPr>
-        <p:spPr>
-          <a:xfrm>
-            <a:off x="502920" y="3657600"/>
-            <a:ext cx="1828800" cy="228600"/>
+            <a:endParaRPr lang="en-US" sz="1100" dirty="0"/>
+          </a:p>
+        </p:txBody>
+      </p:sp>
+      <p:sp>
+        <p:nvSpPr>
+          <p:cNvPr id="53" name="Text 51"/>
+          <p:cNvSpPr/>
+          <p:nvPr/>
+        </p:nvSpPr>
+        <p:spPr>
+          <a:xfrm>
+            <a:off x="6230112" y="3799332"/>
+            <a:ext cx="2438400" cy="219456"/>
           </a:xfrm>
           <a:prstGeom prst="rect">
             <a:avLst/>
@@ -6769,226 +7402,42 @@
               <a:buNone/>
             </a:pPr>
             <a:r>
-              <a:rPr lang="en-US" sz="1000" b="1" dirty="0">
-                <a:solidFill>
-                  <a:srgbClr val="1B365D"/>
-                </a:solidFill>
-                <a:latin typeface="Arial" pitchFamily="34" charset="0"/>
-                <a:ea typeface="Arial" pitchFamily="34" charset="-122"/>
-                <a:cs typeface="Arial" pitchFamily="34" charset="-120"/>
-              </a:rPr>
-              <a:t>Key Artifacts</a:t>
-            </a:r>
-            <a:endParaRPr lang="en-US" sz="1000" dirty="0"/>
-          </a:p>
-        </p:txBody>
-      </p:sp>
-      <p:sp>
-        <p:nvSpPr>
-          <p:cNvPr id="49" name="Text 47"/>
-          <p:cNvSpPr/>
-          <p:nvPr/>
-        </p:nvSpPr>
-        <p:spPr>
-          <a:xfrm>
-            <a:off x="502920" y="3904488"/>
-            <a:ext cx="4023360" cy="868680"/>
-          </a:xfrm>
-          <a:prstGeom prst="rect">
-            <a:avLst/>
-          </a:prstGeom>
-          <a:noFill/>
-          <a:ln/>
-        </p:spPr>
-        <p:txBody>
-          <a:bodyPr wrap="square" lIns="0" tIns="0" rIns="0" bIns="0" rtlCol="0" anchor="t"/>
+              <a:rPr lang="en-US" sz="900" i="1" dirty="0">
+                <a:solidFill>
+                  <a:srgbClr val="1A5DB0"/>
+                </a:solidFill>
+                <a:latin typeface="Arial" pitchFamily="34" charset="0"/>
+                <a:ea typeface="Arial" pitchFamily="34" charset="-122"/>
+                <a:cs typeface="Arial" pitchFamily="34" charset="-120"/>
+              </a:rPr>
+              <a:t>→ Rahona SRZ DRD</a:t>
+            </a:r>
+            <a:endParaRPr lang="en-US" sz="900" dirty="0"/>
+          </a:p>
+        </p:txBody>
+      </p:sp>
+      <p:sp>
+        <p:nvSpPr>
+          <p:cNvPr id="54" name="Text 52"/>
+          <p:cNvSpPr/>
+          <p:nvPr/>
+        </p:nvSpPr>
+        <p:spPr>
+          <a:xfrm>
+            <a:off x="365760" y="4850892"/>
+            <a:ext cx="7315200" cy="201168"/>
+          </a:xfrm>
+          <a:prstGeom prst="rect">
+            <a:avLst/>
+          </a:prstGeom>
+          <a:noFill/>
+          <a:ln/>
+        </p:spPr>
+        <p:txBody>
+          <a:bodyPr wrap="square" lIns="0" tIns="0" rIns="0" bIns="0" rtlCol="0" anchor="ctr"/>
           <a:lstStyle/>
           <a:p>
             <a:pPr algn="l" indent="0" marL="0">
-              <a:spcAft>
-                <a:spcPts val="100"/>
-              </a:spcAft>
-              <a:buNone/>
-            </a:pPr>
-            <a:r>
-              <a:rPr lang="en-US" sz="850" dirty="0">
-                <a:solidFill>
-                  <a:srgbClr val="1A2530"/>
-                </a:solidFill>
-                <a:latin typeface="Arial" pitchFamily="34" charset="0"/>
-                <a:ea typeface="Arial" pitchFamily="34" charset="-122"/>
-                <a:cs typeface="Arial" pitchFamily="34" charset="-120"/>
-              </a:rPr>
-              <a:t>1.  Master_Data_source_FY2025_Segment.xlsx</a:t>
-            </a:r>
-            <a:endParaRPr lang="en-US" sz="850" dirty="0"/>
-          </a:p>
-          <a:p>
-            <a:pPr algn="l" indent="0" marL="0">
-              <a:spcAft>
-                <a:spcPts val="100"/>
-              </a:spcAft>
-              <a:buNone/>
-            </a:pPr>
-            <a:r>
-              <a:rPr lang="en-US" sz="850" dirty="0">
-                <a:solidFill>
-                  <a:srgbClr val="1A2530"/>
-                </a:solidFill>
-                <a:latin typeface="Arial" pitchFamily="34" charset="0"/>
-                <a:ea typeface="Arial" pitchFamily="34" charset="-122"/>
-                <a:cs typeface="Arial" pitchFamily="34" charset="-120"/>
-              </a:rPr>
-              <a:t>2.  PIA approval emails · access approval log</a:t>
-            </a:r>
-            <a:endParaRPr lang="en-US" sz="850" dirty="0"/>
-          </a:p>
-          <a:p>
-            <a:pPr algn="l" indent="0" marL="0">
-              <a:spcAft>
-                <a:spcPts val="100"/>
-              </a:spcAft>
-              <a:buNone/>
-            </a:pPr>
-            <a:r>
-              <a:rPr lang="en-US" sz="850" dirty="0">
-                <a:solidFill>
-                  <a:srgbClr val="1A2530"/>
-                </a:solidFill>
-                <a:latin typeface="Arial" pitchFamily="34" charset="0"/>
-                <a:ea typeface="Arial" pitchFamily="34" charset="-122"/>
-                <a:cs typeface="Arial" pitchFamily="34" charset="-120"/>
-              </a:rPr>
-              <a:t>3.  Extracted dataset files · extraction scripts</a:t>
-            </a:r>
-            <a:endParaRPr lang="en-US" sz="850" dirty="0"/>
-          </a:p>
-          <a:p>
-            <a:pPr algn="l" indent="0" marL="0">
-              <a:spcAft>
-                <a:spcPts val="100"/>
-              </a:spcAft>
-              <a:buNone/>
-            </a:pPr>
-            <a:r>
-              <a:rPr lang="en-US" sz="850" dirty="0">
-                <a:solidFill>
-                  <a:srgbClr val="1A2530"/>
-                </a:solidFill>
-                <a:latin typeface="Arial" pitchFamily="34" charset="0"/>
-                <a:ea typeface="Arial" pitchFamily="34" charset="-122"/>
-                <a:cs typeface="Arial" pitchFamily="34" charset="-120"/>
-              </a:rPr>
-              <a:t>4.  Profiling reports · approved metadata templates</a:t>
-            </a:r>
-            <a:endParaRPr lang="en-US" sz="850" dirty="0"/>
-          </a:p>
-        </p:txBody>
-      </p:sp>
-      <p:sp>
-        <p:nvSpPr>
-          <p:cNvPr id="50" name="Text 48"/>
-          <p:cNvSpPr/>
-          <p:nvPr/>
-        </p:nvSpPr>
-        <p:spPr>
-          <a:xfrm>
-            <a:off x="4709160" y="3904488"/>
-            <a:ext cx="4023360" cy="868680"/>
-          </a:xfrm>
-          <a:prstGeom prst="rect">
-            <a:avLst/>
-          </a:prstGeom>
-          <a:noFill/>
-          <a:ln/>
-        </p:spPr>
-        <p:txBody>
-          <a:bodyPr wrap="square" lIns="0" tIns="0" rIns="0" bIns="0" rtlCol="0" anchor="t"/>
-          <a:lstStyle/>
-          <a:p>
-            <a:pPr algn="l" indent="0" marL="0">
-              <a:spcAft>
-                <a:spcPts val="100"/>
-              </a:spcAft>
-              <a:buNone/>
-            </a:pPr>
-            <a:r>
-              <a:rPr lang="en-US" sz="850" dirty="0">
-                <a:solidFill>
-                  <a:srgbClr val="1A2530"/>
-                </a:solidFill>
-                <a:latin typeface="Arial" pitchFamily="34" charset="0"/>
-                <a:ea typeface="Arial" pitchFamily="34" charset="-122"/>
-                <a:cs typeface="Arial" pitchFamily="34" charset="-120"/>
-              </a:rPr>
-              <a:t>5.  Source-to-report mapping · field-level lineage (WIP)</a:t>
-            </a:r>
-            <a:endParaRPr lang="en-US" sz="850" dirty="0"/>
-          </a:p>
-          <a:p>
-            <a:pPr algn="l" indent="0" marL="0">
-              <a:spcAft>
-                <a:spcPts val="100"/>
-              </a:spcAft>
-              <a:buNone/>
-            </a:pPr>
-            <a:r>
-              <a:rPr lang="en-US" sz="850" dirty="0">
-                <a:solidFill>
-                  <a:srgbClr val="1A2530"/>
-                </a:solidFill>
-                <a:latin typeface="Arial" pitchFamily="34" charset="0"/>
-                <a:ea typeface="Arial" pitchFamily="34" charset="-122"/>
-                <a:cs typeface="Arial" pitchFamily="34" charset="-120"/>
-              </a:rPr>
-              <a:t>6.  Refresh activity log · refresh validation report</a:t>
-            </a:r>
-            <a:endParaRPr lang="en-US" sz="850" dirty="0"/>
-          </a:p>
-          <a:p>
-            <a:pPr algn="l" indent="0" marL="0">
-              <a:spcAft>
-                <a:spcPts val="100"/>
-              </a:spcAft>
-              <a:buNone/>
-            </a:pPr>
-            <a:r>
-              <a:rPr lang="en-US" sz="850" dirty="0">
-                <a:solidFill>
-                  <a:srgbClr val="1A2530"/>
-                </a:solidFill>
-                <a:latin typeface="Arial" pitchFamily="34" charset="0"/>
-                <a:ea typeface="Arial" pitchFamily="34" charset="-122"/>
-                <a:cs typeface="Arial" pitchFamily="34" charset="-120"/>
-              </a:rPr>
-              <a:t>7.  Data retention statement (no defined policy — open gap)</a:t>
-            </a:r>
-            <a:endParaRPr lang="en-US" sz="850" dirty="0"/>
-          </a:p>
-        </p:txBody>
-      </p:sp>
-      <p:sp>
-        <p:nvSpPr>
-          <p:cNvPr id="51" name="Text 49"/>
-          <p:cNvSpPr/>
-          <p:nvPr/>
-        </p:nvSpPr>
-        <p:spPr>
-          <a:xfrm>
-            <a:off x="365760" y="4850892"/>
-            <a:ext cx="5486400" cy="201168"/>
-          </a:xfrm>
-          <a:prstGeom prst="rect">
-            <a:avLst/>
-          </a:prstGeom>
-          <a:noFill/>
-          <a:ln/>
-        </p:spPr>
-        <p:txBody>
-          <a:bodyPr wrap="square" lIns="0" tIns="0" rIns="0" bIns="0" rtlCol="0" anchor="ctr"/>
-          <a:lstStyle/>
-          <a:p>
-            <a:pPr algn="l" indent="0" marL="0">
               <a:buNone/>
             </a:pPr>
             <a:r>
@@ -7000,7 +7449,7 @@
                 <a:ea typeface="Arial" pitchFamily="34" charset="-122"/>
                 <a:cs typeface="Arial" pitchFamily="34" charset="-120"/>
               </a:rPr>
-              <a:t>FCRM Risk Assessment FY2025 · MCC Team · Internal</a:t>
+              <a:t>FCRM Risk Assessment FY2025 · MCC Team · Internal · Right-click any → label to add a hyperlink</a:t>
             </a:r>
             <a:endParaRPr lang="en-US" sz="800" dirty="0"/>
           </a:p>
@@ -7008,7 +7457,7 @@
       </p:sp>
       <p:sp>
         <p:nvSpPr>
-          <p:cNvPr id="52" name="Text 50"/>
+          <p:cNvPr id="55" name="Text 53"/>
           <p:cNvSpPr/>
           <p:nvPr/>
         </p:nvSpPr>
@@ -7227,8 +7676,8 @@
         </p:nvSpPr>
         <p:spPr>
           <a:xfrm>
-            <a:off x="365760" y="1325880"/>
-            <a:ext cx="2000250" cy="868680"/>
+            <a:off x="365760" y="1760220"/>
+            <a:ext cx="2000250" cy="1188720"/>
           </a:xfrm>
           <a:prstGeom prst="rect">
             <a:avLst/>
@@ -7252,8 +7701,8 @@
         </p:nvSpPr>
         <p:spPr>
           <a:xfrm>
-            <a:off x="365760" y="1325880"/>
-            <a:ext cx="73152" cy="868680"/>
+            <a:off x="365760" y="1760220"/>
+            <a:ext cx="73152" cy="1188720"/>
           </a:xfrm>
           <a:prstGeom prst="rect">
             <a:avLst/>
@@ -7277,7 +7726,7 @@
         </p:nvSpPr>
         <p:spPr>
           <a:xfrm>
-            <a:off x="530352" y="1417320"/>
+            <a:off x="530352" y="1851660"/>
             <a:ext cx="384048" cy="384048"/>
           </a:xfrm>
           <a:prstGeom prst="ellipse">
@@ -7302,7 +7751,7 @@
         </p:nvSpPr>
         <p:spPr>
           <a:xfrm>
-            <a:off x="530352" y="1417320"/>
+            <a:off x="530352" y="1851660"/>
             <a:ext cx="384048" cy="384048"/>
           </a:xfrm>
           <a:prstGeom prst="rect">
@@ -7341,8 +7790,8 @@
         </p:nvSpPr>
         <p:spPr>
           <a:xfrm>
-            <a:off x="969264" y="1399032"/>
-            <a:ext cx="1287018" cy="722376"/>
+            <a:off x="969264" y="1833372"/>
+            <a:ext cx="1287018" cy="457200"/>
           </a:xfrm>
           <a:prstGeom prst="rect">
             <a:avLst/>
@@ -7358,7 +7807,7 @@
               <a:buNone/>
             </a:pPr>
             <a:r>
-              <a:rPr lang="en-US" sz="1150" b="1" dirty="0">
+              <a:rPr lang="en-US" sz="1100" b="1" dirty="0">
                 <a:solidFill>
                   <a:srgbClr val="1A2530"/>
                 </a:solidFill>
@@ -7368,19 +7817,58 @@
               </a:rPr>
               <a:t>Decision Logging</a:t>
             </a:r>
-            <a:endParaRPr lang="en-US" sz="1150" dirty="0"/>
-          </a:p>
-        </p:txBody>
-      </p:sp>
-      <p:sp>
-        <p:nvSpPr>
-          <p:cNvPr id="11" name="Shape 9"/>
+            <a:endParaRPr lang="en-US" sz="1100" dirty="0"/>
+          </a:p>
+        </p:txBody>
+      </p:sp>
+      <p:sp>
+        <p:nvSpPr>
+          <p:cNvPr id="11" name="Text 9"/>
+          <p:cNvSpPr/>
+          <p:nvPr/>
+        </p:nvSpPr>
+        <p:spPr>
+          <a:xfrm>
+            <a:off x="530352" y="2382012"/>
+            <a:ext cx="1725930" cy="219456"/>
+          </a:xfrm>
+          <a:prstGeom prst="rect">
+            <a:avLst/>
+          </a:prstGeom>
+          <a:noFill/>
+          <a:ln/>
+        </p:spPr>
+        <p:txBody>
+          <a:bodyPr wrap="square" lIns="0" tIns="0" rIns="0" bIns="0" rtlCol="0" anchor="ctr"/>
+          <a:lstStyle/>
+          <a:p>
+            <a:pPr algn="l" indent="0" marL="0">
+              <a:buNone/>
+            </a:pPr>
+            <a:r>
+              <a:rPr lang="en-US" sz="900" i="1" dirty="0">
+                <a:solidFill>
+                  <a:srgbClr val="1A5DB0"/>
+                </a:solidFill>
+                <a:latin typeface="Arial" pitchFamily="34" charset="0"/>
+                <a:ea typeface="Arial" pitchFamily="34" charset="-122"/>
+                <a:cs typeface="Arial" pitchFamily="34" charset="-120"/>
+              </a:rPr>
+              <a:t>→ Evidence</a:t>
+            </a:r>
+            <a:endParaRPr lang="en-US" sz="900" dirty="0"/>
+          </a:p>
+        </p:txBody>
+      </p:sp>
+      <p:sp>
+        <p:nvSpPr>
+          <p:cNvPr id="12" name="Shape 10"/>
           <p:cNvSpPr/>
           <p:nvPr/>
         </p:nvSpPr>
         <p:spPr>
           <a:xfrm rot="5400000">
-            <a:off x="2375154" y="1696212"/>
+            <a:off x="2375154" y="2290572"/>
             <a:ext cx="118872" cy="128016"/>
           </a:xfrm>
           <a:prstGeom prst="rtTriangle">
@@ -7399,14 +7887,14 @@
       </p:sp>
       <p:sp>
         <p:nvSpPr>
-          <p:cNvPr id="12" name="Shape 10"/>
-          <p:cNvSpPr/>
-          <p:nvPr/>
-        </p:nvSpPr>
-        <p:spPr>
-          <a:xfrm>
-            <a:off x="2503170" y="1325880"/>
-            <a:ext cx="2000250" cy="868680"/>
+          <p:cNvPr id="13" name="Shape 11"/>
+          <p:cNvSpPr/>
+          <p:nvPr/>
+        </p:nvSpPr>
+        <p:spPr>
+          <a:xfrm>
+            <a:off x="2503170" y="1760220"/>
+            <a:ext cx="2000250" cy="1188720"/>
           </a:xfrm>
           <a:prstGeom prst="rect">
             <a:avLst/>
@@ -7424,14 +7912,14 @@
       </p:sp>
       <p:sp>
         <p:nvSpPr>
-          <p:cNvPr id="13" name="Shape 11"/>
-          <p:cNvSpPr/>
-          <p:nvPr/>
-        </p:nvSpPr>
-        <p:spPr>
-          <a:xfrm>
-            <a:off x="2503170" y="1325880"/>
-            <a:ext cx="73152" cy="868680"/>
+          <p:cNvPr id="14" name="Shape 12"/>
+          <p:cNvSpPr/>
+          <p:nvPr/>
+        </p:nvSpPr>
+        <p:spPr>
+          <a:xfrm>
+            <a:off x="2503170" y="1760220"/>
+            <a:ext cx="73152" cy="1188720"/>
           </a:xfrm>
           <a:prstGeom prst="rect">
             <a:avLst/>
@@ -7449,13 +7937,13 @@
       </p:sp>
       <p:sp>
         <p:nvSpPr>
-          <p:cNvPr id="14" name="Shape 12"/>
-          <p:cNvSpPr/>
-          <p:nvPr/>
-        </p:nvSpPr>
-        <p:spPr>
-          <a:xfrm>
-            <a:off x="2667762" y="1417320"/>
+          <p:cNvPr id="15" name="Shape 13"/>
+          <p:cNvSpPr/>
+          <p:nvPr/>
+        </p:nvSpPr>
+        <p:spPr>
+          <a:xfrm>
+            <a:off x="2667762" y="1851660"/>
             <a:ext cx="384048" cy="384048"/>
           </a:xfrm>
           <a:prstGeom prst="ellipse">
@@ -7474,13 +7962,13 @@
       </p:sp>
       <p:sp>
         <p:nvSpPr>
-          <p:cNvPr id="15" name="Text 13"/>
-          <p:cNvSpPr/>
-          <p:nvPr/>
-        </p:nvSpPr>
-        <p:spPr>
-          <a:xfrm>
-            <a:off x="2667762" y="1417320"/>
+          <p:cNvPr id="16" name="Text 14"/>
+          <p:cNvSpPr/>
+          <p:nvPr/>
+        </p:nvSpPr>
+        <p:spPr>
+          <a:xfrm>
+            <a:off x="2667762" y="1851660"/>
             <a:ext cx="384048" cy="384048"/>
           </a:xfrm>
           <a:prstGeom prst="rect">
@@ -7513,14 +8001,14 @@
       </p:sp>
       <p:sp>
         <p:nvSpPr>
-          <p:cNvPr id="16" name="Text 14"/>
-          <p:cNvSpPr/>
-          <p:nvPr/>
-        </p:nvSpPr>
-        <p:spPr>
-          <a:xfrm>
-            <a:off x="3106674" y="1399032"/>
-            <a:ext cx="1287018" cy="722376"/>
+          <p:cNvPr id="17" name="Text 15"/>
+          <p:cNvSpPr/>
+          <p:nvPr/>
+        </p:nvSpPr>
+        <p:spPr>
+          <a:xfrm>
+            <a:off x="3106674" y="1833372"/>
+            <a:ext cx="1287018" cy="457200"/>
           </a:xfrm>
           <a:prstGeom prst="rect">
             <a:avLst/>
@@ -7536,7 +8024,7 @@
               <a:buNone/>
             </a:pPr>
             <a:r>
-              <a:rPr lang="en-US" sz="1150" b="1" dirty="0">
+              <a:rPr lang="en-US" sz="1100" b="1" dirty="0">
                 <a:solidFill>
                   <a:srgbClr val="1A2530"/>
                 </a:solidFill>
@@ -7546,19 +8034,58 @@
               </a:rPr>
               <a:t>Assumption Tracking</a:t>
             </a:r>
-            <a:endParaRPr lang="en-US" sz="1150" dirty="0"/>
-          </a:p>
-        </p:txBody>
-      </p:sp>
-      <p:sp>
-        <p:nvSpPr>
-          <p:cNvPr id="17" name="Shape 15"/>
+            <a:endParaRPr lang="en-US" sz="1100" dirty="0"/>
+          </a:p>
+        </p:txBody>
+      </p:sp>
+      <p:sp>
+        <p:nvSpPr>
+          <p:cNvPr id="18" name="Text 16"/>
+          <p:cNvSpPr/>
+          <p:nvPr/>
+        </p:nvSpPr>
+        <p:spPr>
+          <a:xfrm>
+            <a:off x="2667762" y="2382012"/>
+            <a:ext cx="1725930" cy="219456"/>
+          </a:xfrm>
+          <a:prstGeom prst="rect">
+            <a:avLst/>
+          </a:prstGeom>
+          <a:noFill/>
+          <a:ln/>
+        </p:spPr>
+        <p:txBody>
+          <a:bodyPr wrap="square" lIns="0" tIns="0" rIns="0" bIns="0" rtlCol="0" anchor="ctr"/>
+          <a:lstStyle/>
+          <a:p>
+            <a:pPr algn="l" indent="0" marL="0">
+              <a:buNone/>
+            </a:pPr>
+            <a:r>
+              <a:rPr lang="en-US" sz="900" i="1" dirty="0">
+                <a:solidFill>
+                  <a:srgbClr val="1A5DB0"/>
+                </a:solidFill>
+                <a:latin typeface="Arial" pitchFamily="34" charset="0"/>
+                <a:ea typeface="Arial" pitchFamily="34" charset="-122"/>
+                <a:cs typeface="Arial" pitchFamily="34" charset="-120"/>
+              </a:rPr>
+              <a:t>→ Evidence</a:t>
+            </a:r>
+            <a:endParaRPr lang="en-US" sz="900" dirty="0"/>
+          </a:p>
+        </p:txBody>
+      </p:sp>
+      <p:sp>
+        <p:nvSpPr>
+          <p:cNvPr id="19" name="Shape 17"/>
           <p:cNvSpPr/>
           <p:nvPr/>
         </p:nvSpPr>
         <p:spPr>
           <a:xfrm rot="5400000">
-            <a:off x="4512564" y="1696212"/>
+            <a:off x="4512564" y="2290572"/>
             <a:ext cx="118872" cy="128016"/>
           </a:xfrm>
           <a:prstGeom prst="rtTriangle">
@@ -7577,14 +8104,14 @@
       </p:sp>
       <p:sp>
         <p:nvSpPr>
-          <p:cNvPr id="18" name="Shape 16"/>
-          <p:cNvSpPr/>
-          <p:nvPr/>
-        </p:nvSpPr>
-        <p:spPr>
-          <a:xfrm>
-            <a:off x="4640580" y="1325880"/>
-            <a:ext cx="2000250" cy="868680"/>
+          <p:cNvPr id="20" name="Shape 18"/>
+          <p:cNvSpPr/>
+          <p:nvPr/>
+        </p:nvSpPr>
+        <p:spPr>
+          <a:xfrm>
+            <a:off x="4640580" y="1760220"/>
+            <a:ext cx="2000250" cy="1188720"/>
           </a:xfrm>
           <a:prstGeom prst="rect">
             <a:avLst/>
@@ -7602,14 +8129,14 @@
       </p:sp>
       <p:sp>
         <p:nvSpPr>
-          <p:cNvPr id="19" name="Shape 17"/>
-          <p:cNvSpPr/>
-          <p:nvPr/>
-        </p:nvSpPr>
-        <p:spPr>
-          <a:xfrm>
-            <a:off x="4640580" y="1325880"/>
-            <a:ext cx="73152" cy="868680"/>
+          <p:cNvPr id="21" name="Shape 19"/>
+          <p:cNvSpPr/>
+          <p:nvPr/>
+        </p:nvSpPr>
+        <p:spPr>
+          <a:xfrm>
+            <a:off x="4640580" y="1760220"/>
+            <a:ext cx="73152" cy="1188720"/>
           </a:xfrm>
           <a:prstGeom prst="rect">
             <a:avLst/>
@@ -7627,13 +8154,13 @@
       </p:sp>
       <p:sp>
         <p:nvSpPr>
-          <p:cNvPr id="20" name="Shape 18"/>
-          <p:cNvSpPr/>
-          <p:nvPr/>
-        </p:nvSpPr>
-        <p:spPr>
-          <a:xfrm>
-            <a:off x="4805172" y="1417320"/>
+          <p:cNvPr id="22" name="Shape 20"/>
+          <p:cNvSpPr/>
+          <p:nvPr/>
+        </p:nvSpPr>
+        <p:spPr>
+          <a:xfrm>
+            <a:off x="4805172" y="1851660"/>
             <a:ext cx="384048" cy="384048"/>
           </a:xfrm>
           <a:prstGeom prst="ellipse">
@@ -7652,13 +8179,13 @@
       </p:sp>
       <p:sp>
         <p:nvSpPr>
-          <p:cNvPr id="21" name="Text 19"/>
-          <p:cNvSpPr/>
-          <p:nvPr/>
-        </p:nvSpPr>
-        <p:spPr>
-          <a:xfrm>
-            <a:off x="4805172" y="1417320"/>
+          <p:cNvPr id="23" name="Text 21"/>
+          <p:cNvSpPr/>
+          <p:nvPr/>
+        </p:nvSpPr>
+        <p:spPr>
+          <a:xfrm>
+            <a:off x="4805172" y="1851660"/>
             <a:ext cx="384048" cy="384048"/>
           </a:xfrm>
           <a:prstGeom prst="rect">
@@ -7691,14 +8218,14 @@
       </p:sp>
       <p:sp>
         <p:nvSpPr>
-          <p:cNvPr id="22" name="Text 20"/>
-          <p:cNvSpPr/>
-          <p:nvPr/>
-        </p:nvSpPr>
-        <p:spPr>
-          <a:xfrm>
-            <a:off x="5244084" y="1399032"/>
-            <a:ext cx="1287018" cy="722376"/>
+          <p:cNvPr id="24" name="Text 22"/>
+          <p:cNvSpPr/>
+          <p:nvPr/>
+        </p:nvSpPr>
+        <p:spPr>
+          <a:xfrm>
+            <a:off x="5244084" y="1833372"/>
+            <a:ext cx="1287018" cy="457200"/>
           </a:xfrm>
           <a:prstGeom prst="rect">
             <a:avLst/>
@@ -7714,7 +8241,7 @@
               <a:buNone/>
             </a:pPr>
             <a:r>
-              <a:rPr lang="en-US" sz="1150" b="1" dirty="0">
+              <a:rPr lang="en-US" sz="1100" b="1" dirty="0">
                 <a:solidFill>
                   <a:srgbClr val="1A2530"/>
                 </a:solidFill>
@@ -7724,19 +8251,58 @@
               </a:rPr>
               <a:t>Issue Logging</a:t>
             </a:r>
-            <a:endParaRPr lang="en-US" sz="1150" dirty="0"/>
-          </a:p>
-        </p:txBody>
-      </p:sp>
-      <p:sp>
-        <p:nvSpPr>
-          <p:cNvPr id="23" name="Shape 21"/>
+            <a:endParaRPr lang="en-US" sz="1100" dirty="0"/>
+          </a:p>
+        </p:txBody>
+      </p:sp>
+      <p:sp>
+        <p:nvSpPr>
+          <p:cNvPr id="25" name="Text 23"/>
+          <p:cNvSpPr/>
+          <p:nvPr/>
+        </p:nvSpPr>
+        <p:spPr>
+          <a:xfrm>
+            <a:off x="4805172" y="2382012"/>
+            <a:ext cx="1725930" cy="219456"/>
+          </a:xfrm>
+          <a:prstGeom prst="rect">
+            <a:avLst/>
+          </a:prstGeom>
+          <a:noFill/>
+          <a:ln/>
+        </p:spPr>
+        <p:txBody>
+          <a:bodyPr wrap="square" lIns="0" tIns="0" rIns="0" bIns="0" rtlCol="0" anchor="ctr"/>
+          <a:lstStyle/>
+          <a:p>
+            <a:pPr algn="l" indent="0" marL="0">
+              <a:buNone/>
+            </a:pPr>
+            <a:r>
+              <a:rPr lang="en-US" sz="900" i="1" dirty="0">
+                <a:solidFill>
+                  <a:srgbClr val="1A5DB0"/>
+                </a:solidFill>
+                <a:latin typeface="Arial" pitchFamily="34" charset="0"/>
+                <a:ea typeface="Arial" pitchFamily="34" charset="-122"/>
+                <a:cs typeface="Arial" pitchFamily="34" charset="-120"/>
+              </a:rPr>
+              <a:t>→ Evidence</a:t>
+            </a:r>
+            <a:endParaRPr lang="en-US" sz="900" dirty="0"/>
+          </a:p>
+        </p:txBody>
+      </p:sp>
+      <p:sp>
+        <p:nvSpPr>
+          <p:cNvPr id="26" name="Shape 24"/>
           <p:cNvSpPr/>
           <p:nvPr/>
         </p:nvSpPr>
         <p:spPr>
           <a:xfrm rot="5400000">
-            <a:off x="6649974" y="1696212"/>
+            <a:off x="6649974" y="2290572"/>
             <a:ext cx="118872" cy="128016"/>
           </a:xfrm>
           <a:prstGeom prst="rtTriangle">
@@ -7755,14 +8321,14 @@
       </p:sp>
       <p:sp>
         <p:nvSpPr>
-          <p:cNvPr id="24" name="Shape 22"/>
-          <p:cNvSpPr/>
-          <p:nvPr/>
-        </p:nvSpPr>
-        <p:spPr>
-          <a:xfrm>
-            <a:off x="6777990" y="1325880"/>
-            <a:ext cx="2000250" cy="868680"/>
+          <p:cNvPr id="27" name="Shape 25"/>
+          <p:cNvSpPr/>
+          <p:nvPr/>
+        </p:nvSpPr>
+        <p:spPr>
+          <a:xfrm>
+            <a:off x="6777990" y="1760220"/>
+            <a:ext cx="2000250" cy="1188720"/>
           </a:xfrm>
           <a:prstGeom prst="rect">
             <a:avLst/>
@@ -7780,14 +8346,14 @@
       </p:sp>
       <p:sp>
         <p:nvSpPr>
-          <p:cNvPr id="25" name="Shape 23"/>
-          <p:cNvSpPr/>
-          <p:nvPr/>
-        </p:nvSpPr>
-        <p:spPr>
-          <a:xfrm>
-            <a:off x="6777990" y="1325880"/>
-            <a:ext cx="73152" cy="868680"/>
+          <p:cNvPr id="28" name="Shape 26"/>
+          <p:cNvSpPr/>
+          <p:nvPr/>
+        </p:nvSpPr>
+        <p:spPr>
+          <a:xfrm>
+            <a:off x="6777990" y="1760220"/>
+            <a:ext cx="73152" cy="1188720"/>
           </a:xfrm>
           <a:prstGeom prst="rect">
             <a:avLst/>
@@ -7805,13 +8371,13 @@
       </p:sp>
       <p:sp>
         <p:nvSpPr>
-          <p:cNvPr id="26" name="Shape 24"/>
-          <p:cNvSpPr/>
-          <p:nvPr/>
-        </p:nvSpPr>
-        <p:spPr>
-          <a:xfrm>
-            <a:off x="6942582" y="1417320"/>
+          <p:cNvPr id="29" name="Shape 27"/>
+          <p:cNvSpPr/>
+          <p:nvPr/>
+        </p:nvSpPr>
+        <p:spPr>
+          <a:xfrm>
+            <a:off x="6942582" y="1851660"/>
             <a:ext cx="384048" cy="384048"/>
           </a:xfrm>
           <a:prstGeom prst="ellipse">
@@ -7830,13 +8396,13 @@
       </p:sp>
       <p:sp>
         <p:nvSpPr>
-          <p:cNvPr id="27" name="Text 25"/>
-          <p:cNvSpPr/>
-          <p:nvPr/>
-        </p:nvSpPr>
-        <p:spPr>
-          <a:xfrm>
-            <a:off x="6942582" y="1417320"/>
+          <p:cNvPr id="30" name="Text 28"/>
+          <p:cNvSpPr/>
+          <p:nvPr/>
+        </p:nvSpPr>
+        <p:spPr>
+          <a:xfrm>
+            <a:off x="6942582" y="1851660"/>
             <a:ext cx="384048" cy="384048"/>
           </a:xfrm>
           <a:prstGeom prst="rect">
@@ -7869,14 +8435,14 @@
       </p:sp>
       <p:sp>
         <p:nvSpPr>
-          <p:cNvPr id="28" name="Text 26"/>
-          <p:cNvSpPr/>
-          <p:nvPr/>
-        </p:nvSpPr>
-        <p:spPr>
-          <a:xfrm>
-            <a:off x="7381494" y="1399032"/>
-            <a:ext cx="1287018" cy="722376"/>
+          <p:cNvPr id="31" name="Text 29"/>
+          <p:cNvSpPr/>
+          <p:nvPr/>
+        </p:nvSpPr>
+        <p:spPr>
+          <a:xfrm>
+            <a:off x="7381494" y="1833372"/>
+            <a:ext cx="1287018" cy="457200"/>
           </a:xfrm>
           <a:prstGeom prst="rect">
             <a:avLst/>
@@ -7892,7 +8458,7 @@
               <a:buNone/>
             </a:pPr>
             <a:r>
-              <a:rPr lang="en-US" sz="1150" b="1" dirty="0">
+              <a:rPr lang="en-US" sz="1100" b="1" dirty="0">
                 <a:solidFill>
                   <a:srgbClr val="1A2530"/>
                 </a:solidFill>
@@ -7902,19 +8468,58 @@
               </a:rPr>
               <a:t>Severity Assessment</a:t>
             </a:r>
-            <a:endParaRPr lang="en-US" sz="1150" dirty="0"/>
-          </a:p>
-        </p:txBody>
-      </p:sp>
-      <p:sp>
-        <p:nvSpPr>
-          <p:cNvPr id="29" name="Shape 27"/>
+            <a:endParaRPr lang="en-US" sz="1100" dirty="0"/>
+          </a:p>
+        </p:txBody>
+      </p:sp>
+      <p:sp>
+        <p:nvSpPr>
+          <p:cNvPr id="32" name="Text 30"/>
+          <p:cNvSpPr/>
+          <p:nvPr/>
+        </p:nvSpPr>
+        <p:spPr>
+          <a:xfrm>
+            <a:off x="6942582" y="2382012"/>
+            <a:ext cx="1725930" cy="219456"/>
+          </a:xfrm>
+          <a:prstGeom prst="rect">
+            <a:avLst/>
+          </a:prstGeom>
+          <a:noFill/>
+          <a:ln/>
+        </p:spPr>
+        <p:txBody>
+          <a:bodyPr wrap="square" lIns="0" tIns="0" rIns="0" bIns="0" rtlCol="0" anchor="ctr"/>
+          <a:lstStyle/>
+          <a:p>
+            <a:pPr algn="l" indent="0" marL="0">
+              <a:buNone/>
+            </a:pPr>
+            <a:r>
+              <a:rPr lang="en-US" sz="900" i="1" dirty="0">
+                <a:solidFill>
+                  <a:srgbClr val="1A5DB0"/>
+                </a:solidFill>
+                <a:latin typeface="Arial" pitchFamily="34" charset="0"/>
+                <a:ea typeface="Arial" pitchFamily="34" charset="-122"/>
+                <a:cs typeface="Arial" pitchFamily="34" charset="-120"/>
+              </a:rPr>
+              <a:t>→ Evidence</a:t>
+            </a:r>
+            <a:endParaRPr lang="en-US" sz="900" dirty="0"/>
+          </a:p>
+        </p:txBody>
+      </p:sp>
+      <p:sp>
+        <p:nvSpPr>
+          <p:cNvPr id="33" name="Shape 31"/>
           <p:cNvSpPr/>
           <p:nvPr/>
         </p:nvSpPr>
         <p:spPr>
           <a:xfrm rot="10800000">
-            <a:off x="8641080" y="2235708"/>
+            <a:off x="8641080" y="2990088"/>
             <a:ext cx="146304" cy="146304"/>
           </a:xfrm>
           <a:prstGeom prst="rtTriangle">
@@ -7933,14 +8538,14 @@
       </p:sp>
       <p:sp>
         <p:nvSpPr>
-          <p:cNvPr id="30" name="Shape 28"/>
-          <p:cNvSpPr/>
-          <p:nvPr/>
-        </p:nvSpPr>
-        <p:spPr>
-          <a:xfrm>
-            <a:off x="365760" y="2423160"/>
-            <a:ext cx="2000250" cy="868680"/>
+          <p:cNvPr id="34" name="Shape 32"/>
+          <p:cNvSpPr/>
+          <p:nvPr/>
+        </p:nvSpPr>
+        <p:spPr>
+          <a:xfrm>
+            <a:off x="365760" y="3177540"/>
+            <a:ext cx="2000250" cy="1188720"/>
           </a:xfrm>
           <a:prstGeom prst="rect">
             <a:avLst/>
@@ -7958,14 +8563,14 @@
       </p:sp>
       <p:sp>
         <p:nvSpPr>
-          <p:cNvPr id="31" name="Shape 29"/>
-          <p:cNvSpPr/>
-          <p:nvPr/>
-        </p:nvSpPr>
-        <p:spPr>
-          <a:xfrm>
-            <a:off x="365760" y="2423160"/>
-            <a:ext cx="73152" cy="868680"/>
+          <p:cNvPr id="35" name="Shape 33"/>
+          <p:cNvSpPr/>
+          <p:nvPr/>
+        </p:nvSpPr>
+        <p:spPr>
+          <a:xfrm>
+            <a:off x="365760" y="3177540"/>
+            <a:ext cx="73152" cy="1188720"/>
           </a:xfrm>
           <a:prstGeom prst="rect">
             <a:avLst/>
@@ -7983,13 +8588,13 @@
       </p:sp>
       <p:sp>
         <p:nvSpPr>
-          <p:cNvPr id="32" name="Shape 30"/>
-          <p:cNvSpPr/>
-          <p:nvPr/>
-        </p:nvSpPr>
-        <p:spPr>
-          <a:xfrm>
-            <a:off x="530352" y="2514600"/>
+          <p:cNvPr id="36" name="Shape 34"/>
+          <p:cNvSpPr/>
+          <p:nvPr/>
+        </p:nvSpPr>
+        <p:spPr>
+          <a:xfrm>
+            <a:off x="530352" y="3268980"/>
             <a:ext cx="384048" cy="384048"/>
           </a:xfrm>
           <a:prstGeom prst="ellipse">
@@ -8008,13 +8613,13 @@
       </p:sp>
       <p:sp>
         <p:nvSpPr>
-          <p:cNvPr id="33" name="Text 31"/>
-          <p:cNvSpPr/>
-          <p:nvPr/>
-        </p:nvSpPr>
-        <p:spPr>
-          <a:xfrm>
-            <a:off x="530352" y="2514600"/>
+          <p:cNvPr id="37" name="Text 35"/>
+          <p:cNvSpPr/>
+          <p:nvPr/>
+        </p:nvSpPr>
+        <p:spPr>
+          <a:xfrm>
+            <a:off x="530352" y="3268980"/>
             <a:ext cx="384048" cy="384048"/>
           </a:xfrm>
           <a:prstGeom prst="rect">
@@ -8047,14 +8652,14 @@
       </p:sp>
       <p:sp>
         <p:nvSpPr>
-          <p:cNvPr id="34" name="Text 32"/>
-          <p:cNvSpPr/>
-          <p:nvPr/>
-        </p:nvSpPr>
-        <p:spPr>
-          <a:xfrm>
-            <a:off x="969264" y="2496312"/>
-            <a:ext cx="1287018" cy="722376"/>
+          <p:cNvPr id="38" name="Text 36"/>
+          <p:cNvSpPr/>
+          <p:nvPr/>
+        </p:nvSpPr>
+        <p:spPr>
+          <a:xfrm>
+            <a:off x="969264" y="3250692"/>
+            <a:ext cx="1287018" cy="457200"/>
           </a:xfrm>
           <a:prstGeom prst="rect">
             <a:avLst/>
@@ -8070,7 +8675,7 @@
               <a:buNone/>
             </a:pPr>
             <a:r>
-              <a:rPr lang="en-US" sz="1150" b="1" dirty="0">
+              <a:rPr lang="en-US" sz="1100" b="1" dirty="0">
                 <a:solidFill>
                   <a:srgbClr val="1A2530"/>
                 </a:solidFill>
@@ -8080,19 +8685,58 @@
               </a:rPr>
               <a:t>Escalation Pathways</a:t>
             </a:r>
-            <a:endParaRPr lang="en-US" sz="1150" dirty="0"/>
-          </a:p>
-        </p:txBody>
-      </p:sp>
-      <p:sp>
-        <p:nvSpPr>
-          <p:cNvPr id="35" name="Shape 33"/>
+            <a:endParaRPr lang="en-US" sz="1100" dirty="0"/>
+          </a:p>
+        </p:txBody>
+      </p:sp>
+      <p:sp>
+        <p:nvSpPr>
+          <p:cNvPr id="39" name="Text 37"/>
+          <p:cNvSpPr/>
+          <p:nvPr/>
+        </p:nvSpPr>
+        <p:spPr>
+          <a:xfrm>
+            <a:off x="530352" y="3799332"/>
+            <a:ext cx="1725930" cy="219456"/>
+          </a:xfrm>
+          <a:prstGeom prst="rect">
+            <a:avLst/>
+          </a:prstGeom>
+          <a:noFill/>
+          <a:ln/>
+        </p:spPr>
+        <p:txBody>
+          <a:bodyPr wrap="square" lIns="0" tIns="0" rIns="0" bIns="0" rtlCol="0" anchor="ctr"/>
+          <a:lstStyle/>
+          <a:p>
+            <a:pPr algn="l" indent="0" marL="0">
+              <a:buNone/>
+            </a:pPr>
+            <a:r>
+              <a:rPr lang="en-US" sz="900" i="1" dirty="0">
+                <a:solidFill>
+                  <a:srgbClr val="1A5DB0"/>
+                </a:solidFill>
+                <a:latin typeface="Arial" pitchFamily="34" charset="0"/>
+                <a:ea typeface="Arial" pitchFamily="34" charset="-122"/>
+                <a:cs typeface="Arial" pitchFamily="34" charset="-120"/>
+              </a:rPr>
+              <a:t>→ Evidence</a:t>
+            </a:r>
+            <a:endParaRPr lang="en-US" sz="900" dirty="0"/>
+          </a:p>
+        </p:txBody>
+      </p:sp>
+      <p:sp>
+        <p:nvSpPr>
+          <p:cNvPr id="40" name="Shape 38"/>
           <p:cNvSpPr/>
           <p:nvPr/>
         </p:nvSpPr>
         <p:spPr>
           <a:xfrm rot="5400000">
-            <a:off x="2375154" y="2793492"/>
+            <a:off x="2375154" y="3707892"/>
             <a:ext cx="118872" cy="128016"/>
           </a:xfrm>
           <a:prstGeom prst="rtTriangle">
@@ -8111,14 +8755,14 @@
       </p:sp>
       <p:sp>
         <p:nvSpPr>
-          <p:cNvPr id="36" name="Shape 34"/>
-          <p:cNvSpPr/>
-          <p:nvPr/>
-        </p:nvSpPr>
-        <p:spPr>
-          <a:xfrm>
-            <a:off x="2503170" y="2423160"/>
-            <a:ext cx="2000250" cy="868680"/>
+          <p:cNvPr id="41" name="Shape 39"/>
+          <p:cNvSpPr/>
+          <p:nvPr/>
+        </p:nvSpPr>
+        <p:spPr>
+          <a:xfrm>
+            <a:off x="2503170" y="3177540"/>
+            <a:ext cx="2000250" cy="1188720"/>
           </a:xfrm>
           <a:prstGeom prst="rect">
             <a:avLst/>
@@ -8136,14 +8780,14 @@
       </p:sp>
       <p:sp>
         <p:nvSpPr>
-          <p:cNvPr id="37" name="Shape 35"/>
-          <p:cNvSpPr/>
-          <p:nvPr/>
-        </p:nvSpPr>
-        <p:spPr>
-          <a:xfrm>
-            <a:off x="2503170" y="2423160"/>
-            <a:ext cx="73152" cy="868680"/>
+          <p:cNvPr id="42" name="Shape 40"/>
+          <p:cNvSpPr/>
+          <p:nvPr/>
+        </p:nvSpPr>
+        <p:spPr>
+          <a:xfrm>
+            <a:off x="2503170" y="3177540"/>
+            <a:ext cx="73152" cy="1188720"/>
           </a:xfrm>
           <a:prstGeom prst="rect">
             <a:avLst/>
@@ -8161,13 +8805,13 @@
       </p:sp>
       <p:sp>
         <p:nvSpPr>
-          <p:cNvPr id="38" name="Shape 36"/>
-          <p:cNvSpPr/>
-          <p:nvPr/>
-        </p:nvSpPr>
-        <p:spPr>
-          <a:xfrm>
-            <a:off x="2667762" y="2514600"/>
+          <p:cNvPr id="43" name="Shape 41"/>
+          <p:cNvSpPr/>
+          <p:nvPr/>
+        </p:nvSpPr>
+        <p:spPr>
+          <a:xfrm>
+            <a:off x="2667762" y="3268980"/>
             <a:ext cx="384048" cy="384048"/>
           </a:xfrm>
           <a:prstGeom prst="ellipse">
@@ -8186,13 +8830,13 @@
       </p:sp>
       <p:sp>
         <p:nvSpPr>
-          <p:cNvPr id="39" name="Text 37"/>
-          <p:cNvSpPr/>
-          <p:nvPr/>
-        </p:nvSpPr>
-        <p:spPr>
-          <a:xfrm>
-            <a:off x="2667762" y="2514600"/>
+          <p:cNvPr id="44" name="Text 42"/>
+          <p:cNvSpPr/>
+          <p:nvPr/>
+        </p:nvSpPr>
+        <p:spPr>
+          <a:xfrm>
+            <a:off x="2667762" y="3268980"/>
             <a:ext cx="384048" cy="384048"/>
           </a:xfrm>
           <a:prstGeom prst="rect">
@@ -8225,14 +8869,14 @@
       </p:sp>
       <p:sp>
         <p:nvSpPr>
-          <p:cNvPr id="40" name="Text 38"/>
-          <p:cNvSpPr/>
-          <p:nvPr/>
-        </p:nvSpPr>
-        <p:spPr>
-          <a:xfrm>
-            <a:off x="3106674" y="2496312"/>
-            <a:ext cx="1287018" cy="722376"/>
+          <p:cNvPr id="45" name="Text 43"/>
+          <p:cNvSpPr/>
+          <p:nvPr/>
+        </p:nvSpPr>
+        <p:spPr>
+          <a:xfrm>
+            <a:off x="3106674" y="3250692"/>
+            <a:ext cx="1287018" cy="457200"/>
           </a:xfrm>
           <a:prstGeom prst="rect">
             <a:avLst/>
@@ -8248,7 +8892,7 @@
               <a:buNone/>
             </a:pPr>
             <a:r>
-              <a:rPr lang="en-US" sz="1150" b="1" dirty="0">
+              <a:rPr lang="en-US" sz="1100" b="1" dirty="0">
                 <a:solidFill>
                   <a:srgbClr val="1A2530"/>
                 </a:solidFill>
@@ -8258,19 +8902,58 @@
               </a:rPr>
               <a:t>Resolution &amp; Unblocking</a:t>
             </a:r>
-            <a:endParaRPr lang="en-US" sz="1150" dirty="0"/>
-          </a:p>
-        </p:txBody>
-      </p:sp>
-      <p:sp>
-        <p:nvSpPr>
-          <p:cNvPr id="41" name="Shape 39"/>
+            <a:endParaRPr lang="en-US" sz="1100" dirty="0"/>
+          </a:p>
+        </p:txBody>
+      </p:sp>
+      <p:sp>
+        <p:nvSpPr>
+          <p:cNvPr id="46" name="Text 44"/>
+          <p:cNvSpPr/>
+          <p:nvPr/>
+        </p:nvSpPr>
+        <p:spPr>
+          <a:xfrm>
+            <a:off x="2667762" y="3799332"/>
+            <a:ext cx="1725930" cy="219456"/>
+          </a:xfrm>
+          <a:prstGeom prst="rect">
+            <a:avLst/>
+          </a:prstGeom>
+          <a:noFill/>
+          <a:ln/>
+        </p:spPr>
+        <p:txBody>
+          <a:bodyPr wrap="square" lIns="0" tIns="0" rIns="0" bIns="0" rtlCol="0" anchor="ctr"/>
+          <a:lstStyle/>
+          <a:p>
+            <a:pPr algn="l" indent="0" marL="0">
+              <a:buNone/>
+            </a:pPr>
+            <a:r>
+              <a:rPr lang="en-US" sz="900" i="1" dirty="0">
+                <a:solidFill>
+                  <a:srgbClr val="1A5DB0"/>
+                </a:solidFill>
+                <a:latin typeface="Arial" pitchFamily="34" charset="0"/>
+                <a:ea typeface="Arial" pitchFamily="34" charset="-122"/>
+                <a:cs typeface="Arial" pitchFamily="34" charset="-120"/>
+              </a:rPr>
+              <a:t>→ Evidence</a:t>
+            </a:r>
+            <a:endParaRPr lang="en-US" sz="900" dirty="0"/>
+          </a:p>
+        </p:txBody>
+      </p:sp>
+      <p:sp>
+        <p:nvSpPr>
+          <p:cNvPr id="47" name="Shape 45"/>
           <p:cNvSpPr/>
           <p:nvPr/>
         </p:nvSpPr>
         <p:spPr>
           <a:xfrm rot="5400000">
-            <a:off x="4512564" y="2793492"/>
+            <a:off x="4512564" y="3707892"/>
             <a:ext cx="118872" cy="128016"/>
           </a:xfrm>
           <a:prstGeom prst="rtTriangle">
@@ -8289,14 +8972,14 @@
       </p:sp>
       <p:sp>
         <p:nvSpPr>
-          <p:cNvPr id="42" name="Shape 40"/>
-          <p:cNvSpPr/>
-          <p:nvPr/>
-        </p:nvSpPr>
-        <p:spPr>
-          <a:xfrm>
-            <a:off x="4640580" y="2423160"/>
-            <a:ext cx="2000250" cy="868680"/>
+          <p:cNvPr id="48" name="Shape 46"/>
+          <p:cNvSpPr/>
+          <p:nvPr/>
+        </p:nvSpPr>
+        <p:spPr>
+          <a:xfrm>
+            <a:off x="4640580" y="3177540"/>
+            <a:ext cx="2000250" cy="1188720"/>
           </a:xfrm>
           <a:prstGeom prst="rect">
             <a:avLst/>
@@ -8314,14 +8997,14 @@
       </p:sp>
       <p:sp>
         <p:nvSpPr>
-          <p:cNvPr id="43" name="Shape 41"/>
-          <p:cNvSpPr/>
-          <p:nvPr/>
-        </p:nvSpPr>
-        <p:spPr>
-          <a:xfrm>
-            <a:off x="4640580" y="2423160"/>
-            <a:ext cx="73152" cy="868680"/>
+          <p:cNvPr id="49" name="Shape 47"/>
+          <p:cNvSpPr/>
+          <p:nvPr/>
+        </p:nvSpPr>
+        <p:spPr>
+          <a:xfrm>
+            <a:off x="4640580" y="3177540"/>
+            <a:ext cx="73152" cy="1188720"/>
           </a:xfrm>
           <a:prstGeom prst="rect">
             <a:avLst/>
@@ -8339,13 +9022,13 @@
       </p:sp>
       <p:sp>
         <p:nvSpPr>
-          <p:cNvPr id="44" name="Shape 42"/>
-          <p:cNvSpPr/>
-          <p:nvPr/>
-        </p:nvSpPr>
-        <p:spPr>
-          <a:xfrm>
-            <a:off x="4805172" y="2514600"/>
+          <p:cNvPr id="50" name="Shape 48"/>
+          <p:cNvSpPr/>
+          <p:nvPr/>
+        </p:nvSpPr>
+        <p:spPr>
+          <a:xfrm>
+            <a:off x="4805172" y="3268980"/>
             <a:ext cx="384048" cy="384048"/>
           </a:xfrm>
           <a:prstGeom prst="ellipse">
@@ -8364,13 +9047,13 @@
       </p:sp>
       <p:sp>
         <p:nvSpPr>
-          <p:cNvPr id="45" name="Text 43"/>
-          <p:cNvSpPr/>
-          <p:nvPr/>
-        </p:nvSpPr>
-        <p:spPr>
-          <a:xfrm>
-            <a:off x="4805172" y="2514600"/>
+          <p:cNvPr id="51" name="Text 49"/>
+          <p:cNvSpPr/>
+          <p:nvPr/>
+        </p:nvSpPr>
+        <p:spPr>
+          <a:xfrm>
+            <a:off x="4805172" y="3268980"/>
             <a:ext cx="384048" cy="384048"/>
           </a:xfrm>
           <a:prstGeom prst="rect">
@@ -8403,14 +9086,14 @@
       </p:sp>
       <p:sp>
         <p:nvSpPr>
-          <p:cNvPr id="46" name="Text 44"/>
-          <p:cNvSpPr/>
-          <p:nvPr/>
-        </p:nvSpPr>
-        <p:spPr>
-          <a:xfrm>
-            <a:off x="5244084" y="2496312"/>
-            <a:ext cx="1287018" cy="722376"/>
+          <p:cNvPr id="52" name="Text 50"/>
+          <p:cNvSpPr/>
+          <p:nvPr/>
+        </p:nvSpPr>
+        <p:spPr>
+          <a:xfrm>
+            <a:off x="5244084" y="3250692"/>
+            <a:ext cx="1287018" cy="457200"/>
           </a:xfrm>
           <a:prstGeom prst="rect">
             <a:avLst/>
@@ -8426,7 +9109,7 @@
               <a:buNone/>
             </a:pPr>
             <a:r>
-              <a:rPr lang="en-US" sz="1150" b="1" dirty="0">
+              <a:rPr lang="en-US" sz="1100" b="1" dirty="0">
                 <a:solidFill>
                   <a:srgbClr val="1A2530"/>
                 </a:solidFill>
@@ -8436,19 +9119,58 @@
               </a:rPr>
               <a:t>Risk Acceptance</a:t>
             </a:r>
-            <a:endParaRPr lang="en-US" sz="1150" dirty="0"/>
-          </a:p>
-        </p:txBody>
-      </p:sp>
-      <p:sp>
-        <p:nvSpPr>
-          <p:cNvPr id="47" name="Shape 45"/>
+            <a:endParaRPr lang="en-US" sz="1100" dirty="0"/>
+          </a:p>
+        </p:txBody>
+      </p:sp>
+      <p:sp>
+        <p:nvSpPr>
+          <p:cNvPr id="53" name="Text 51"/>
+          <p:cNvSpPr/>
+          <p:nvPr/>
+        </p:nvSpPr>
+        <p:spPr>
+          <a:xfrm>
+            <a:off x="4805172" y="3799332"/>
+            <a:ext cx="1725930" cy="219456"/>
+          </a:xfrm>
+          <a:prstGeom prst="rect">
+            <a:avLst/>
+          </a:prstGeom>
+          <a:noFill/>
+          <a:ln/>
+        </p:spPr>
+        <p:txBody>
+          <a:bodyPr wrap="square" lIns="0" tIns="0" rIns="0" bIns="0" rtlCol="0" anchor="ctr"/>
+          <a:lstStyle/>
+          <a:p>
+            <a:pPr algn="l" indent="0" marL="0">
+              <a:buNone/>
+            </a:pPr>
+            <a:r>
+              <a:rPr lang="en-US" sz="900" i="1" dirty="0">
+                <a:solidFill>
+                  <a:srgbClr val="1A5DB0"/>
+                </a:solidFill>
+                <a:latin typeface="Arial" pitchFamily="34" charset="0"/>
+                <a:ea typeface="Arial" pitchFamily="34" charset="-122"/>
+                <a:cs typeface="Arial" pitchFamily="34" charset="-120"/>
+              </a:rPr>
+              <a:t>→ Evidence</a:t>
+            </a:r>
+            <a:endParaRPr lang="en-US" sz="900" dirty="0"/>
+          </a:p>
+        </p:txBody>
+      </p:sp>
+      <p:sp>
+        <p:nvSpPr>
+          <p:cNvPr id="54" name="Shape 52"/>
           <p:cNvSpPr/>
           <p:nvPr/>
         </p:nvSpPr>
         <p:spPr>
           <a:xfrm rot="5400000">
-            <a:off x="6649974" y="2793492"/>
+            <a:off x="6649974" y="3707892"/>
             <a:ext cx="118872" cy="128016"/>
           </a:xfrm>
           <a:prstGeom prst="rtTriangle">
@@ -8467,14 +9189,14 @@
       </p:sp>
       <p:sp>
         <p:nvSpPr>
-          <p:cNvPr id="48" name="Shape 46"/>
-          <p:cNvSpPr/>
-          <p:nvPr/>
-        </p:nvSpPr>
-        <p:spPr>
-          <a:xfrm>
-            <a:off x="6777990" y="2423160"/>
-            <a:ext cx="2000250" cy="868680"/>
+          <p:cNvPr id="55" name="Shape 53"/>
+          <p:cNvSpPr/>
+          <p:nvPr/>
+        </p:nvSpPr>
+        <p:spPr>
+          <a:xfrm>
+            <a:off x="6777990" y="3177540"/>
+            <a:ext cx="2000250" cy="1188720"/>
           </a:xfrm>
           <a:prstGeom prst="rect">
             <a:avLst/>
@@ -8492,14 +9214,14 @@
       </p:sp>
       <p:sp>
         <p:nvSpPr>
-          <p:cNvPr id="49" name="Shape 47"/>
-          <p:cNvSpPr/>
-          <p:nvPr/>
-        </p:nvSpPr>
-        <p:spPr>
-          <a:xfrm>
-            <a:off x="6777990" y="2423160"/>
-            <a:ext cx="73152" cy="868680"/>
+          <p:cNvPr id="56" name="Shape 54"/>
+          <p:cNvSpPr/>
+          <p:nvPr/>
+        </p:nvSpPr>
+        <p:spPr>
+          <a:xfrm>
+            <a:off x="6777990" y="3177540"/>
+            <a:ext cx="73152" cy="1188720"/>
           </a:xfrm>
           <a:prstGeom prst="rect">
             <a:avLst/>
@@ -8517,13 +9239,13 @@
       </p:sp>
       <p:sp>
         <p:nvSpPr>
-          <p:cNvPr id="50" name="Shape 48"/>
-          <p:cNvSpPr/>
-          <p:nvPr/>
-        </p:nvSpPr>
-        <p:spPr>
-          <a:xfrm>
-            <a:off x="6942582" y="2514600"/>
+          <p:cNvPr id="57" name="Shape 55"/>
+          <p:cNvSpPr/>
+          <p:nvPr/>
+        </p:nvSpPr>
+        <p:spPr>
+          <a:xfrm>
+            <a:off x="6942582" y="3268980"/>
             <a:ext cx="384048" cy="384048"/>
           </a:xfrm>
           <a:prstGeom prst="ellipse">
@@ -8542,13 +9264,13 @@
       </p:sp>
       <p:sp>
         <p:nvSpPr>
-          <p:cNvPr id="51" name="Text 49"/>
-          <p:cNvSpPr/>
-          <p:nvPr/>
-        </p:nvSpPr>
-        <p:spPr>
-          <a:xfrm>
-            <a:off x="6942582" y="2514600"/>
+          <p:cNvPr id="58" name="Text 56"/>
+          <p:cNvSpPr/>
+          <p:nvPr/>
+        </p:nvSpPr>
+        <p:spPr>
+          <a:xfrm>
+            <a:off x="6942582" y="3268980"/>
             <a:ext cx="384048" cy="384048"/>
           </a:xfrm>
           <a:prstGeom prst="rect">
@@ -8581,14 +9303,14 @@
       </p:sp>
       <p:sp>
         <p:nvSpPr>
-          <p:cNvPr id="52" name="Text 50"/>
-          <p:cNvSpPr/>
-          <p:nvPr/>
-        </p:nvSpPr>
-        <p:spPr>
-          <a:xfrm>
-            <a:off x="7381494" y="2496312"/>
-            <a:ext cx="1287018" cy="722376"/>
+          <p:cNvPr id="59" name="Text 57"/>
+          <p:cNvSpPr/>
+          <p:nvPr/>
+        </p:nvSpPr>
+        <p:spPr>
+          <a:xfrm>
+            <a:off x="7381494" y="3250692"/>
+            <a:ext cx="1287018" cy="457200"/>
           </a:xfrm>
           <a:prstGeom prst="rect">
             <a:avLst/>
@@ -8604,7 +9326,7 @@
               <a:buNone/>
             </a:pPr>
             <a:r>
-              <a:rPr lang="en-US" sz="1150" b="1" dirty="0">
+              <a:rPr lang="en-US" sz="1100" b="1" dirty="0">
                 <a:solidFill>
                   <a:srgbClr val="1A2530"/>
                 </a:solidFill>
@@ -8614,45 +9336,20 @@
               </a:rPr>
               <a:t>Decommissioning</a:t>
             </a:r>
-            <a:endParaRPr lang="en-US" sz="1150" dirty="0"/>
-          </a:p>
-        </p:txBody>
-      </p:sp>
-      <p:sp>
-        <p:nvSpPr>
-          <p:cNvPr id="53" name="Shape 51"/>
-          <p:cNvSpPr/>
-          <p:nvPr/>
-        </p:nvSpPr>
-        <p:spPr>
-          <a:xfrm>
-            <a:off x="365760" y="3611880"/>
-            <a:ext cx="8412480" cy="1188720"/>
-          </a:xfrm>
-          <a:prstGeom prst="rect">
-            <a:avLst/>
-          </a:prstGeom>
-          <a:solidFill>
-            <a:srgbClr val="F4F6F8"/>
-          </a:solidFill>
-          <a:ln w="6350">
-            <a:solidFill>
-              <a:srgbClr val="D6DBE2"/>
-            </a:solidFill>
-            <a:prstDash val="solid"/>
-          </a:ln>
-        </p:spPr>
-      </p:sp>
-      <p:sp>
-        <p:nvSpPr>
-          <p:cNvPr id="54" name="Text 52"/>
-          <p:cNvSpPr/>
-          <p:nvPr/>
-        </p:nvSpPr>
-        <p:spPr>
-          <a:xfrm>
-            <a:off x="502920" y="3657600"/>
-            <a:ext cx="1828800" cy="228600"/>
+            <a:endParaRPr lang="en-US" sz="1100" dirty="0"/>
+          </a:p>
+        </p:txBody>
+      </p:sp>
+      <p:sp>
+        <p:nvSpPr>
+          <p:cNvPr id="60" name="Text 58"/>
+          <p:cNvSpPr/>
+          <p:nvPr/>
+        </p:nvSpPr>
+        <p:spPr>
+          <a:xfrm>
+            <a:off x="6942582" y="3799332"/>
+            <a:ext cx="1725930" cy="219456"/>
           </a:xfrm>
           <a:prstGeom prst="rect">
             <a:avLst/>
@@ -8668,246 +9365,42 @@
               <a:buNone/>
             </a:pPr>
             <a:r>
-              <a:rPr lang="en-US" sz="1000" b="1" dirty="0">
-                <a:solidFill>
-                  <a:srgbClr val="1B365D"/>
-                </a:solidFill>
-                <a:latin typeface="Arial" pitchFamily="34" charset="0"/>
-                <a:ea typeface="Arial" pitchFamily="34" charset="-122"/>
-                <a:cs typeface="Arial" pitchFamily="34" charset="-120"/>
-              </a:rPr>
-              <a:t>Key Artifacts</a:t>
-            </a:r>
-            <a:endParaRPr lang="en-US" sz="1000" dirty="0"/>
-          </a:p>
-        </p:txBody>
-      </p:sp>
-      <p:sp>
-        <p:nvSpPr>
-          <p:cNvPr id="55" name="Text 53"/>
-          <p:cNvSpPr/>
-          <p:nvPr/>
-        </p:nvSpPr>
-        <p:spPr>
-          <a:xfrm>
-            <a:off x="502920" y="3904488"/>
-            <a:ext cx="4023360" cy="868680"/>
-          </a:xfrm>
-          <a:prstGeom prst="rect">
-            <a:avLst/>
-          </a:prstGeom>
-          <a:noFill/>
-          <a:ln/>
-        </p:spPr>
-        <p:txBody>
-          <a:bodyPr wrap="square" lIns="0" tIns="0" rIns="0" bIns="0" rtlCol="0" anchor="t"/>
+              <a:rPr lang="en-US" sz="900" i="1" dirty="0">
+                <a:solidFill>
+                  <a:srgbClr val="1A5DB0"/>
+                </a:solidFill>
+                <a:latin typeface="Arial" pitchFamily="34" charset="0"/>
+                <a:ea typeface="Arial" pitchFamily="34" charset="-122"/>
+                <a:cs typeface="Arial" pitchFamily="34" charset="-120"/>
+              </a:rPr>
+              <a:t>→ Evidence</a:t>
+            </a:r>
+            <a:endParaRPr lang="en-US" sz="900" dirty="0"/>
+          </a:p>
+        </p:txBody>
+      </p:sp>
+      <p:sp>
+        <p:nvSpPr>
+          <p:cNvPr id="61" name="Text 59"/>
+          <p:cNvSpPr/>
+          <p:nvPr/>
+        </p:nvSpPr>
+        <p:spPr>
+          <a:xfrm>
+            <a:off x="365760" y="4850892"/>
+            <a:ext cx="7315200" cy="201168"/>
+          </a:xfrm>
+          <a:prstGeom prst="rect">
+            <a:avLst/>
+          </a:prstGeom>
+          <a:noFill/>
+          <a:ln/>
+        </p:spPr>
+        <p:txBody>
+          <a:bodyPr wrap="square" lIns="0" tIns="0" rIns="0" bIns="0" rtlCol="0" anchor="ctr"/>
           <a:lstStyle/>
           <a:p>
             <a:pPr algn="l" indent="0" marL="0">
-              <a:spcAft>
-                <a:spcPts val="100"/>
-              </a:spcAft>
-              <a:buNone/>
-            </a:pPr>
-            <a:r>
-              <a:rPr lang="en-US" sz="850" dirty="0">
-                <a:solidFill>
-                  <a:srgbClr val="1A2530"/>
-                </a:solidFill>
-                <a:latin typeface="Arial" pitchFamily="34" charset="0"/>
-                <a:ea typeface="Arial" pitchFamily="34" charset="-122"/>
-                <a:cs typeface="Arial" pitchFamily="34" charset="-120"/>
-              </a:rPr>
-              <a:t>1.  Jira decision tickets (BUSINESS LOGIC DESIGN DEF)</a:t>
-            </a:r>
-            <a:endParaRPr lang="en-US" sz="850" dirty="0"/>
-          </a:p>
-          <a:p>
-            <a:pPr algn="l" indent="0" marL="0">
-              <a:spcAft>
-                <a:spcPts val="100"/>
-              </a:spcAft>
-              <a:buNone/>
-            </a:pPr>
-            <a:r>
-              <a:rPr lang="en-US" sz="850" dirty="0">
-                <a:solidFill>
-                  <a:srgbClr val="1A2530"/>
-                </a:solidFill>
-                <a:latin typeface="Arial" pitchFamily="34" charset="0"/>
-                <a:ea typeface="Arial" pitchFamily="34" charset="-122"/>
-                <a:cs typeface="Arial" pitchFamily="34" charset="-120"/>
-              </a:rPr>
-              <a:t>2.  Jira assumption tickets (METRIC DEFINITION CLARIFICATION)</a:t>
-            </a:r>
-            <a:endParaRPr lang="en-US" sz="850" dirty="0"/>
-          </a:p>
-          <a:p>
-            <a:pPr algn="l" indent="0" marL="0">
-              <a:spcAft>
-                <a:spcPts val="100"/>
-              </a:spcAft>
-              <a:buNone/>
-            </a:pPr>
-            <a:r>
-              <a:rPr lang="en-US" sz="850" dirty="0">
-                <a:solidFill>
-                  <a:srgbClr val="1A2530"/>
-                </a:solidFill>
-                <a:latin typeface="Arial" pitchFamily="34" charset="0"/>
-                <a:ea typeface="Arial" pitchFamily="34" charset="-122"/>
-                <a:cs typeface="Arial" pitchFamily="34" charset="-120"/>
-              </a:rPr>
-              <a:t>3.  RAID log entry · BLOCKED Jira ticket</a:t>
-            </a:r>
-            <a:endParaRPr lang="en-US" sz="850" dirty="0"/>
-          </a:p>
-          <a:p>
-            <a:pPr algn="l" indent="0" marL="0">
-              <a:spcAft>
-                <a:spcPts val="100"/>
-              </a:spcAft>
-              <a:buNone/>
-            </a:pPr>
-            <a:r>
-              <a:rPr lang="en-US" sz="850" dirty="0">
-                <a:solidFill>
-                  <a:srgbClr val="1A2530"/>
-                </a:solidFill>
-                <a:latin typeface="Arial" pitchFamily="34" charset="0"/>
-                <a:ea typeface="Arial" pitchFamily="34" charset="-122"/>
-                <a:cs typeface="Arial" pitchFamily="34" charset="-120"/>
-              </a:rPr>
-              <a:t>4.  RAID log with P1/P2/P3 classification</a:t>
-            </a:r>
-            <a:endParaRPr lang="en-US" sz="850" dirty="0"/>
-          </a:p>
-        </p:txBody>
-      </p:sp>
-      <p:sp>
-        <p:nvSpPr>
-          <p:cNvPr id="56" name="Text 54"/>
-          <p:cNvSpPr/>
-          <p:nvPr/>
-        </p:nvSpPr>
-        <p:spPr>
-          <a:xfrm>
-            <a:off x="4709160" y="3904488"/>
-            <a:ext cx="4023360" cy="868680"/>
-          </a:xfrm>
-          <a:prstGeom prst="rect">
-            <a:avLst/>
-          </a:prstGeom>
-          <a:noFill/>
-          <a:ln/>
-        </p:spPr>
-        <p:txBody>
-          <a:bodyPr wrap="square" lIns="0" tIns="0" rIns="0" bIns="0" rtlCol="0" anchor="t"/>
-          <a:lstStyle/>
-          <a:p>
-            <a:pPr algn="l" indent="0" marL="0">
-              <a:spcAft>
-                <a:spcPts val="100"/>
-              </a:spcAft>
-              <a:buNone/>
-            </a:pPr>
-            <a:r>
-              <a:rPr lang="en-US" sz="850" dirty="0">
-                <a:solidFill>
-                  <a:srgbClr val="1A2530"/>
-                </a:solidFill>
-                <a:latin typeface="Arial" pitchFamily="34" charset="0"/>
-                <a:ea typeface="Arial" pitchFamily="34" charset="-122"/>
-                <a:cs typeface="Arial" pitchFamily="34" charset="-120"/>
-              </a:rPr>
-              <a:t>5.  Jira escalation comments · 2LOD notification</a:t>
-            </a:r>
-            <a:endParaRPr lang="en-US" sz="850" dirty="0"/>
-          </a:p>
-          <a:p>
-            <a:pPr algn="l" indent="0" marL="0">
-              <a:spcAft>
-                <a:spcPts val="100"/>
-              </a:spcAft>
-              <a:buNone/>
-            </a:pPr>
-            <a:r>
-              <a:rPr lang="en-US" sz="850" dirty="0">
-                <a:solidFill>
-                  <a:srgbClr val="1A2530"/>
-                </a:solidFill>
-                <a:latin typeface="Arial" pitchFamily="34" charset="0"/>
-                <a:ea typeface="Arial" pitchFamily="34" charset="-122"/>
-                <a:cs typeface="Arial" pitchFamily="34" charset="-120"/>
-              </a:rPr>
-              <a:t>6.  RAID log closure · Jira state off BLOCKED</a:t>
-            </a:r>
-            <a:endParaRPr lang="en-US" sz="850" dirty="0"/>
-          </a:p>
-          <a:p>
-            <a:pPr algn="l" indent="0" marL="0">
-              <a:spcAft>
-                <a:spcPts val="100"/>
-              </a:spcAft>
-              <a:buNone/>
-            </a:pPr>
-            <a:r>
-              <a:rPr lang="en-US" sz="850" dirty="0">
-                <a:solidFill>
-                  <a:srgbClr val="1A2530"/>
-                </a:solidFill>
-                <a:latin typeface="Arial" pitchFamily="34" charset="0"/>
-                <a:ea typeface="Arial" pitchFamily="34" charset="-122"/>
-                <a:cs typeface="Arial" pitchFamily="34" charset="-120"/>
-              </a:rPr>
-              <a:t>7.  Risk acceptance record · NOT AVAILABLE Jira state</a:t>
-            </a:r>
-            <a:endParaRPr lang="en-US" sz="850" dirty="0"/>
-          </a:p>
-          <a:p>
-            <a:pPr algn="l" indent="0" marL="0">
-              <a:spcAft>
-                <a:spcPts val="100"/>
-              </a:spcAft>
-              <a:buNone/>
-            </a:pPr>
-            <a:r>
-              <a:rPr lang="en-US" sz="850" dirty="0">
-                <a:solidFill>
-                  <a:srgbClr val="1A2530"/>
-                </a:solidFill>
-                <a:latin typeface="Arial" pitchFamily="34" charset="0"/>
-                <a:ea typeface="Arial" pitchFamily="34" charset="-122"/>
-                <a:cs typeface="Arial" pitchFamily="34" charset="-120"/>
-              </a:rPr>
-              <a:t>8.  NO LONGER REQUIRED / NOT APPLICABLE state · SOW change log</a:t>
-            </a:r>
-            <a:endParaRPr lang="en-US" sz="850" dirty="0"/>
-          </a:p>
-        </p:txBody>
-      </p:sp>
-      <p:sp>
-        <p:nvSpPr>
-          <p:cNvPr id="57" name="Text 55"/>
-          <p:cNvSpPr/>
-          <p:nvPr/>
-        </p:nvSpPr>
-        <p:spPr>
-          <a:xfrm>
-            <a:off x="365760" y="4850892"/>
-            <a:ext cx="5486400" cy="201168"/>
-          </a:xfrm>
-          <a:prstGeom prst="rect">
-            <a:avLst/>
-          </a:prstGeom>
-          <a:noFill/>
-          <a:ln/>
-        </p:spPr>
-        <p:txBody>
-          <a:bodyPr wrap="square" lIns="0" tIns="0" rIns="0" bIns="0" rtlCol="0" anchor="ctr"/>
-          <a:lstStyle/>
-          <a:p>
-            <a:pPr algn="l" indent="0" marL="0">
               <a:buNone/>
             </a:pPr>
             <a:r>
@@ -8919,7 +9412,7 @@
                 <a:ea typeface="Arial" pitchFamily="34" charset="-122"/>
                 <a:cs typeface="Arial" pitchFamily="34" charset="-120"/>
               </a:rPr>
-              <a:t>FCRM Risk Assessment FY2025 · MCC Team · Internal</a:t>
+              <a:t>FCRM Risk Assessment FY2025 · MCC Team · Internal · Right-click any → label to add a hyperlink</a:t>
             </a:r>
             <a:endParaRPr lang="en-US" sz="800" dirty="0"/>
           </a:p>
@@ -8927,7 +9420,7 @@
       </p:sp>
       <p:sp>
         <p:nvSpPr>
-          <p:cNvPr id="58" name="Text 56"/>
+          <p:cNvPr id="62" name="Text 60"/>
           <p:cNvSpPr/>
           <p:nvPr/>
         </p:nvSpPr>
@@ -9146,8 +9639,8 @@
         </p:nvSpPr>
         <p:spPr>
           <a:xfrm>
-            <a:off x="365760" y="1325880"/>
-            <a:ext cx="2712720" cy="868680"/>
+            <a:off x="365760" y="2468880"/>
+            <a:ext cx="2712720" cy="1188720"/>
           </a:xfrm>
           <a:prstGeom prst="rect">
             <a:avLst/>
@@ -9171,8 +9664,8 @@
         </p:nvSpPr>
         <p:spPr>
           <a:xfrm>
-            <a:off x="365760" y="1325880"/>
-            <a:ext cx="73152" cy="868680"/>
+            <a:off x="365760" y="2468880"/>
+            <a:ext cx="73152" cy="1188720"/>
           </a:xfrm>
           <a:prstGeom prst="rect">
             <a:avLst/>
@@ -9196,7 +9689,7 @@
         </p:nvSpPr>
         <p:spPr>
           <a:xfrm>
-            <a:off x="530352" y="1417320"/>
+            <a:off x="530352" y="2560320"/>
             <a:ext cx="384048" cy="384048"/>
           </a:xfrm>
           <a:prstGeom prst="ellipse">
@@ -9221,7 +9714,7 @@
         </p:nvSpPr>
         <p:spPr>
           <a:xfrm>
-            <a:off x="530352" y="1417320"/>
+            <a:off x="530352" y="2560320"/>
             <a:ext cx="384048" cy="384048"/>
           </a:xfrm>
           <a:prstGeom prst="rect">
@@ -9260,8 +9753,8 @@
         </p:nvSpPr>
         <p:spPr>
           <a:xfrm>
-            <a:off x="969264" y="1399032"/>
-            <a:ext cx="1999488" cy="722376"/>
+            <a:off x="969264" y="2542032"/>
+            <a:ext cx="1999488" cy="457200"/>
           </a:xfrm>
           <a:prstGeom prst="rect">
             <a:avLst/>
@@ -9277,7 +9770,7 @@
               <a:buNone/>
             </a:pPr>
             <a:r>
-              <a:rPr lang="en-US" sz="1150" b="1" dirty="0">
+              <a:rPr lang="en-US" sz="1100" b="1" dirty="0">
                 <a:solidFill>
                   <a:srgbClr val="1A2530"/>
                 </a:solidFill>
@@ -9287,19 +9780,58 @@
               </a:rPr>
               <a:t>PIA Initiation</a:t>
             </a:r>
-            <a:endParaRPr lang="en-US" sz="1150" dirty="0"/>
-          </a:p>
-        </p:txBody>
-      </p:sp>
-      <p:sp>
-        <p:nvSpPr>
-          <p:cNvPr id="11" name="Shape 9"/>
+            <a:endParaRPr lang="en-US" sz="1100" dirty="0"/>
+          </a:p>
+        </p:txBody>
+      </p:sp>
+      <p:sp>
+        <p:nvSpPr>
+          <p:cNvPr id="11" name="Text 9"/>
+          <p:cNvSpPr/>
+          <p:nvPr/>
+        </p:nvSpPr>
+        <p:spPr>
+          <a:xfrm>
+            <a:off x="530352" y="3090672"/>
+            <a:ext cx="2438400" cy="219456"/>
+          </a:xfrm>
+          <a:prstGeom prst="rect">
+            <a:avLst/>
+          </a:prstGeom>
+          <a:noFill/>
+          <a:ln/>
+        </p:spPr>
+        <p:txBody>
+          <a:bodyPr wrap="square" lIns="0" tIns="0" rIns="0" bIns="0" rtlCol="0" anchor="ctr"/>
+          <a:lstStyle/>
+          <a:p>
+            <a:pPr algn="l" indent="0" marL="0">
+              <a:buNone/>
+            </a:pPr>
+            <a:r>
+              <a:rPr lang="en-US" sz="900" i="1" dirty="0">
+                <a:solidFill>
+                  <a:srgbClr val="1A5DB0"/>
+                </a:solidFill>
+                <a:latin typeface="Arial" pitchFamily="34" charset="0"/>
+                <a:ea typeface="Arial" pitchFamily="34" charset="-122"/>
+                <a:cs typeface="Arial" pitchFamily="34" charset="-120"/>
+              </a:rPr>
+              <a:t>→ Canada Privacy Impact Assessment (PIA)</a:t>
+            </a:r>
+            <a:endParaRPr lang="en-US" sz="900" dirty="0"/>
+          </a:p>
+        </p:txBody>
+      </p:sp>
+      <p:sp>
+        <p:nvSpPr>
+          <p:cNvPr id="12" name="Shape 10"/>
           <p:cNvSpPr/>
           <p:nvPr/>
         </p:nvSpPr>
         <p:spPr>
           <a:xfrm rot="5400000">
-            <a:off x="3087624" y="1696212"/>
+            <a:off x="3087624" y="2999232"/>
             <a:ext cx="118872" cy="128016"/>
           </a:xfrm>
           <a:prstGeom prst="rtTriangle">
@@ -9318,14 +9850,14 @@
       </p:sp>
       <p:sp>
         <p:nvSpPr>
-          <p:cNvPr id="12" name="Shape 10"/>
-          <p:cNvSpPr/>
-          <p:nvPr/>
-        </p:nvSpPr>
-        <p:spPr>
-          <a:xfrm>
-            <a:off x="3215640" y="1325880"/>
-            <a:ext cx="2712720" cy="868680"/>
+          <p:cNvPr id="13" name="Shape 11"/>
+          <p:cNvSpPr/>
+          <p:nvPr/>
+        </p:nvSpPr>
+        <p:spPr>
+          <a:xfrm>
+            <a:off x="3215640" y="2468880"/>
+            <a:ext cx="2712720" cy="1188720"/>
           </a:xfrm>
           <a:prstGeom prst="rect">
             <a:avLst/>
@@ -9343,14 +9875,14 @@
       </p:sp>
       <p:sp>
         <p:nvSpPr>
-          <p:cNvPr id="13" name="Shape 11"/>
-          <p:cNvSpPr/>
-          <p:nvPr/>
-        </p:nvSpPr>
-        <p:spPr>
-          <a:xfrm>
-            <a:off x="3215640" y="1325880"/>
-            <a:ext cx="73152" cy="868680"/>
+          <p:cNvPr id="14" name="Shape 12"/>
+          <p:cNvSpPr/>
+          <p:nvPr/>
+        </p:nvSpPr>
+        <p:spPr>
+          <a:xfrm>
+            <a:off x="3215640" y="2468880"/>
+            <a:ext cx="73152" cy="1188720"/>
           </a:xfrm>
           <a:prstGeom prst="rect">
             <a:avLst/>
@@ -9368,13 +9900,13 @@
       </p:sp>
       <p:sp>
         <p:nvSpPr>
-          <p:cNvPr id="14" name="Shape 12"/>
-          <p:cNvSpPr/>
-          <p:nvPr/>
-        </p:nvSpPr>
-        <p:spPr>
-          <a:xfrm>
-            <a:off x="3380232" y="1417320"/>
+          <p:cNvPr id="15" name="Shape 13"/>
+          <p:cNvSpPr/>
+          <p:nvPr/>
+        </p:nvSpPr>
+        <p:spPr>
+          <a:xfrm>
+            <a:off x="3380232" y="2560320"/>
             <a:ext cx="384048" cy="384048"/>
           </a:xfrm>
           <a:prstGeom prst="ellipse">
@@ -9393,13 +9925,13 @@
       </p:sp>
       <p:sp>
         <p:nvSpPr>
-          <p:cNvPr id="15" name="Text 13"/>
-          <p:cNvSpPr/>
-          <p:nvPr/>
-        </p:nvSpPr>
-        <p:spPr>
-          <a:xfrm>
-            <a:off x="3380232" y="1417320"/>
+          <p:cNvPr id="16" name="Text 14"/>
+          <p:cNvSpPr/>
+          <p:nvPr/>
+        </p:nvSpPr>
+        <p:spPr>
+          <a:xfrm>
+            <a:off x="3380232" y="2560320"/>
             <a:ext cx="384048" cy="384048"/>
           </a:xfrm>
           <a:prstGeom prst="rect">
@@ -9432,14 +9964,14 @@
       </p:sp>
       <p:sp>
         <p:nvSpPr>
-          <p:cNvPr id="16" name="Text 14"/>
-          <p:cNvSpPr/>
-          <p:nvPr/>
-        </p:nvSpPr>
-        <p:spPr>
-          <a:xfrm>
-            <a:off x="3819144" y="1399032"/>
-            <a:ext cx="1999488" cy="722376"/>
+          <p:cNvPr id="17" name="Text 15"/>
+          <p:cNvSpPr/>
+          <p:nvPr/>
+        </p:nvSpPr>
+        <p:spPr>
+          <a:xfrm>
+            <a:off x="3819144" y="2542032"/>
+            <a:ext cx="1999488" cy="457200"/>
           </a:xfrm>
           <a:prstGeom prst="rect">
             <a:avLst/>
@@ -9455,7 +9987,7 @@
               <a:buNone/>
             </a:pPr>
             <a:r>
-              <a:rPr lang="en-US" sz="1150" b="1" dirty="0">
+              <a:rPr lang="en-US" sz="1100" b="1" dirty="0">
                 <a:solidFill>
                   <a:srgbClr val="1A2530"/>
                 </a:solidFill>
@@ -9465,19 +9997,97 @@
               </a:rPr>
               <a:t>Access Request &amp; Approval</a:t>
             </a:r>
-            <a:endParaRPr lang="en-US" sz="1150" dirty="0"/>
-          </a:p>
-        </p:txBody>
-      </p:sp>
-      <p:sp>
-        <p:nvSpPr>
-          <p:cNvPr id="17" name="Shape 15"/>
+            <a:endParaRPr lang="en-US" sz="1100" dirty="0"/>
+          </a:p>
+        </p:txBody>
+      </p:sp>
+      <p:sp>
+        <p:nvSpPr>
+          <p:cNvPr id="18" name="Text 16"/>
+          <p:cNvSpPr/>
+          <p:nvPr/>
+        </p:nvSpPr>
+        <p:spPr>
+          <a:xfrm>
+            <a:off x="3380232" y="3090672"/>
+            <a:ext cx="2438400" cy="219456"/>
+          </a:xfrm>
+          <a:prstGeom prst="rect">
+            <a:avLst/>
+          </a:prstGeom>
+          <a:noFill/>
+          <a:ln/>
+        </p:spPr>
+        <p:txBody>
+          <a:bodyPr wrap="square" lIns="0" tIns="0" rIns="0" bIns="0" rtlCol="0" anchor="ctr"/>
+          <a:lstStyle/>
+          <a:p>
+            <a:pPr algn="l" indent="0" marL="0">
+              <a:buNone/>
+            </a:pPr>
+            <a:r>
+              <a:rPr lang="en-US" sz="900" i="1" dirty="0">
+                <a:solidFill>
+                  <a:srgbClr val="1A5DB0"/>
+                </a:solidFill>
+                <a:latin typeface="Arial" pitchFamily="34" charset="0"/>
+                <a:ea typeface="Arial" pitchFamily="34" charset="-122"/>
+                <a:cs typeface="Arial" pitchFamily="34" charset="-120"/>
+              </a:rPr>
+              <a:t>→ Request PIA for AZ Load</a:t>
+            </a:r>
+            <a:endParaRPr lang="en-US" sz="900" dirty="0"/>
+          </a:p>
+        </p:txBody>
+      </p:sp>
+      <p:sp>
+        <p:nvSpPr>
+          <p:cNvPr id="19" name="Text 17"/>
+          <p:cNvSpPr/>
+          <p:nvPr/>
+        </p:nvSpPr>
+        <p:spPr>
+          <a:xfrm>
+            <a:off x="3380232" y="3310128"/>
+            <a:ext cx="2438400" cy="219456"/>
+          </a:xfrm>
+          <a:prstGeom prst="rect">
+            <a:avLst/>
+          </a:prstGeom>
+          <a:noFill/>
+          <a:ln/>
+        </p:spPr>
+        <p:txBody>
+          <a:bodyPr wrap="square" lIns="0" tIns="0" rIns="0" bIns="0" rtlCol="0" anchor="ctr"/>
+          <a:lstStyle/>
+          <a:p>
+            <a:pPr algn="l" indent="0" marL="0">
+              <a:buNone/>
+            </a:pPr>
+            <a:r>
+              <a:rPr lang="en-US" sz="900" i="1" dirty="0">
+                <a:solidFill>
+                  <a:srgbClr val="1A5DB0"/>
+                </a:solidFill>
+                <a:latin typeface="Arial" pitchFamily="34" charset="0"/>
+                <a:ea typeface="Arial" pitchFamily="34" charset="-122"/>
+                <a:cs typeface="Arial" pitchFamily="34" charset="-120"/>
+              </a:rPr>
+              <a:t>→ DAC – Submitted PIAs Canada</a:t>
+            </a:r>
+            <a:endParaRPr lang="en-US" sz="900" dirty="0"/>
+          </a:p>
+        </p:txBody>
+      </p:sp>
+      <p:sp>
+        <p:nvSpPr>
+          <p:cNvPr id="20" name="Shape 18"/>
           <p:cNvSpPr/>
           <p:nvPr/>
         </p:nvSpPr>
         <p:spPr>
           <a:xfrm rot="5400000">
-            <a:off x="5937504" y="1696212"/>
+            <a:off x="5937504" y="2999232"/>
             <a:ext cx="118872" cy="128016"/>
           </a:xfrm>
           <a:prstGeom prst="rtTriangle">
@@ -9496,14 +10106,14 @@
       </p:sp>
       <p:sp>
         <p:nvSpPr>
-          <p:cNvPr id="18" name="Shape 16"/>
-          <p:cNvSpPr/>
-          <p:nvPr/>
-        </p:nvSpPr>
-        <p:spPr>
-          <a:xfrm>
-            <a:off x="6065520" y="1325880"/>
-            <a:ext cx="2712720" cy="868680"/>
+          <p:cNvPr id="21" name="Shape 19"/>
+          <p:cNvSpPr/>
+          <p:nvPr/>
+        </p:nvSpPr>
+        <p:spPr>
+          <a:xfrm>
+            <a:off x="6065520" y="2468880"/>
+            <a:ext cx="2712720" cy="1188720"/>
           </a:xfrm>
           <a:prstGeom prst="rect">
             <a:avLst/>
@@ -9521,14 +10131,14 @@
       </p:sp>
       <p:sp>
         <p:nvSpPr>
-          <p:cNvPr id="19" name="Shape 17"/>
-          <p:cNvSpPr/>
-          <p:nvPr/>
-        </p:nvSpPr>
-        <p:spPr>
-          <a:xfrm>
-            <a:off x="6065520" y="1325880"/>
-            <a:ext cx="73152" cy="868680"/>
+          <p:cNvPr id="22" name="Shape 20"/>
+          <p:cNvSpPr/>
+          <p:nvPr/>
+        </p:nvSpPr>
+        <p:spPr>
+          <a:xfrm>
+            <a:off x="6065520" y="2468880"/>
+            <a:ext cx="73152" cy="1188720"/>
           </a:xfrm>
           <a:prstGeom prst="rect">
             <a:avLst/>
@@ -9546,13 +10156,13 @@
       </p:sp>
       <p:sp>
         <p:nvSpPr>
-          <p:cNvPr id="20" name="Shape 18"/>
-          <p:cNvSpPr/>
-          <p:nvPr/>
-        </p:nvSpPr>
-        <p:spPr>
-          <a:xfrm>
-            <a:off x="6230112" y="1417320"/>
+          <p:cNvPr id="23" name="Shape 21"/>
+          <p:cNvSpPr/>
+          <p:nvPr/>
+        </p:nvSpPr>
+        <p:spPr>
+          <a:xfrm>
+            <a:off x="6230112" y="2560320"/>
             <a:ext cx="384048" cy="384048"/>
           </a:xfrm>
           <a:prstGeom prst="ellipse">
@@ -9571,13 +10181,13 @@
       </p:sp>
       <p:sp>
         <p:nvSpPr>
-          <p:cNvPr id="21" name="Text 19"/>
-          <p:cNvSpPr/>
-          <p:nvPr/>
-        </p:nvSpPr>
-        <p:spPr>
-          <a:xfrm>
-            <a:off x="6230112" y="1417320"/>
+          <p:cNvPr id="24" name="Text 22"/>
+          <p:cNvSpPr/>
+          <p:nvPr/>
+        </p:nvSpPr>
+        <p:spPr>
+          <a:xfrm>
+            <a:off x="6230112" y="2560320"/>
             <a:ext cx="384048" cy="384048"/>
           </a:xfrm>
           <a:prstGeom prst="rect">
@@ -9610,14 +10220,14 @@
       </p:sp>
       <p:sp>
         <p:nvSpPr>
-          <p:cNvPr id="22" name="Text 20"/>
-          <p:cNvSpPr/>
-          <p:nvPr/>
-        </p:nvSpPr>
-        <p:spPr>
-          <a:xfrm>
-            <a:off x="6669024" y="1399032"/>
-            <a:ext cx="1999488" cy="722376"/>
+          <p:cNvPr id="25" name="Text 23"/>
+          <p:cNvSpPr/>
+          <p:nvPr/>
+        </p:nvSpPr>
+        <p:spPr>
+          <a:xfrm>
+            <a:off x="6669024" y="2542032"/>
+            <a:ext cx="1999488" cy="457200"/>
           </a:xfrm>
           <a:prstGeom prst="rect">
             <a:avLst/>
@@ -9633,7 +10243,7 @@
               <a:buNone/>
             </a:pPr>
             <a:r>
-              <a:rPr lang="en-US" sz="1150" b="1" dirty="0">
+              <a:rPr lang="en-US" sz="1100" b="1" dirty="0">
                 <a:solidFill>
                   <a:srgbClr val="1A2530"/>
                 </a:solidFill>
@@ -9643,45 +10253,20 @@
               </a:rPr>
               <a:t>Access Control Matrix</a:t>
             </a:r>
-            <a:endParaRPr lang="en-US" sz="1150" dirty="0"/>
-          </a:p>
-        </p:txBody>
-      </p:sp>
-      <p:sp>
-        <p:nvSpPr>
-          <p:cNvPr id="23" name="Shape 21"/>
-          <p:cNvSpPr/>
-          <p:nvPr/>
-        </p:nvSpPr>
-        <p:spPr>
-          <a:xfrm>
-            <a:off x="365760" y="2834640"/>
-            <a:ext cx="8412480" cy="1965960"/>
-          </a:xfrm>
-          <a:prstGeom prst="rect">
-            <a:avLst/>
-          </a:prstGeom>
-          <a:solidFill>
-            <a:srgbClr val="F4F6F8"/>
-          </a:solidFill>
-          <a:ln w="6350">
-            <a:solidFill>
-              <a:srgbClr val="D6DBE2"/>
-            </a:solidFill>
-            <a:prstDash val="solid"/>
-          </a:ln>
-        </p:spPr>
-      </p:sp>
-      <p:sp>
-        <p:nvSpPr>
-          <p:cNvPr id="24" name="Text 22"/>
-          <p:cNvSpPr/>
-          <p:nvPr/>
-        </p:nvSpPr>
-        <p:spPr>
-          <a:xfrm>
-            <a:off x="502920" y="2880360"/>
-            <a:ext cx="1828800" cy="228600"/>
+            <a:endParaRPr lang="en-US" sz="1100" dirty="0"/>
+          </a:p>
+        </p:txBody>
+      </p:sp>
+      <p:sp>
+        <p:nvSpPr>
+          <p:cNvPr id="26" name="Text 24"/>
+          <p:cNvSpPr/>
+          <p:nvPr/>
+        </p:nvSpPr>
+        <p:spPr>
+          <a:xfrm>
+            <a:off x="6230112" y="3090672"/>
+            <a:ext cx="2438400" cy="219456"/>
           </a:xfrm>
           <a:prstGeom prst="rect">
             <a:avLst/>
@@ -9697,146 +10282,42 @@
               <a:buNone/>
             </a:pPr>
             <a:r>
-              <a:rPr lang="en-US" sz="1000" b="1" dirty="0">
-                <a:solidFill>
-                  <a:srgbClr val="1B365D"/>
-                </a:solidFill>
-                <a:latin typeface="Arial" pitchFamily="34" charset="0"/>
-                <a:ea typeface="Arial" pitchFamily="34" charset="-122"/>
-                <a:cs typeface="Arial" pitchFamily="34" charset="-120"/>
-              </a:rPr>
-              <a:t>Key Artifacts</a:t>
-            </a:r>
-            <a:endParaRPr lang="en-US" sz="1000" dirty="0"/>
-          </a:p>
-        </p:txBody>
-      </p:sp>
-      <p:sp>
-        <p:nvSpPr>
-          <p:cNvPr id="25" name="Text 23"/>
-          <p:cNvSpPr/>
-          <p:nvPr/>
-        </p:nvSpPr>
-        <p:spPr>
-          <a:xfrm>
-            <a:off x="502920" y="3127248"/>
-            <a:ext cx="4023360" cy="1645920"/>
-          </a:xfrm>
-          <a:prstGeom prst="rect">
-            <a:avLst/>
-          </a:prstGeom>
-          <a:noFill/>
-          <a:ln/>
-        </p:spPr>
-        <p:txBody>
-          <a:bodyPr wrap="square" lIns="0" tIns="0" rIns="0" bIns="0" rtlCol="0" anchor="t"/>
+              <a:rPr lang="en-US" sz="900" i="1" dirty="0">
+                <a:solidFill>
+                  <a:srgbClr val="1A5DB0"/>
+                </a:solidFill>
+                <a:latin typeface="Arial" pitchFamily="34" charset="0"/>
+                <a:ea typeface="Arial" pitchFamily="34" charset="-122"/>
+                <a:cs typeface="Arial" pitchFamily="34" charset="-120"/>
+              </a:rPr>
+              <a:t>→ Canada Foundational Tracker</a:t>
+            </a:r>
+            <a:endParaRPr lang="en-US" sz="900" dirty="0"/>
+          </a:p>
+        </p:txBody>
+      </p:sp>
+      <p:sp>
+        <p:nvSpPr>
+          <p:cNvPr id="27" name="Text 25"/>
+          <p:cNvSpPr/>
+          <p:nvPr/>
+        </p:nvSpPr>
+        <p:spPr>
+          <a:xfrm>
+            <a:off x="365760" y="4850892"/>
+            <a:ext cx="7315200" cy="201168"/>
+          </a:xfrm>
+          <a:prstGeom prst="rect">
+            <a:avLst/>
+          </a:prstGeom>
+          <a:noFill/>
+          <a:ln/>
+        </p:spPr>
+        <p:txBody>
+          <a:bodyPr wrap="square" lIns="0" tIns="0" rIns="0" bIns="0" rtlCol="0" anchor="ctr"/>
           <a:lstStyle/>
           <a:p>
             <a:pPr algn="l" indent="0" marL="0">
-              <a:spcAft>
-                <a:spcPts val="100"/>
-              </a:spcAft>
-              <a:buNone/>
-            </a:pPr>
-            <a:r>
-              <a:rPr lang="en-US" sz="850" dirty="0">
-                <a:solidFill>
-                  <a:srgbClr val="1A2530"/>
-                </a:solidFill>
-                <a:latin typeface="Arial" pitchFamily="34" charset="0"/>
-                <a:ea typeface="Arial" pitchFamily="34" charset="-122"/>
-                <a:cs typeface="Arial" pitchFamily="34" charset="-120"/>
-              </a:rPr>
-              <a:t>1.  Canada Privacy Impact Assessment (PIA)</a:t>
-            </a:r>
-            <a:endParaRPr lang="en-US" sz="850" dirty="0"/>
-          </a:p>
-          <a:p>
-            <a:pPr algn="l" indent="0" marL="0">
-              <a:spcAft>
-                <a:spcPts val="100"/>
-              </a:spcAft>
-              <a:buNone/>
-            </a:pPr>
-            <a:r>
-              <a:rPr lang="en-US" sz="850" dirty="0">
-                <a:solidFill>
-                  <a:srgbClr val="1A2530"/>
-                </a:solidFill>
-                <a:latin typeface="Arial" pitchFamily="34" charset="0"/>
-                <a:ea typeface="Arial" pitchFamily="34" charset="-122"/>
-                <a:cs typeface="Arial" pitchFamily="34" charset="-120"/>
-              </a:rPr>
-              <a:t>2.  DAC Submitted PIAs Canada · ADIDO SST Data FY2025 CA · Jira PIA Status</a:t>
-            </a:r>
-            <a:endParaRPr lang="en-US" sz="850" dirty="0"/>
-          </a:p>
-        </p:txBody>
-      </p:sp>
-      <p:sp>
-        <p:nvSpPr>
-          <p:cNvPr id="26" name="Text 24"/>
-          <p:cNvSpPr/>
-          <p:nvPr/>
-        </p:nvSpPr>
-        <p:spPr>
-          <a:xfrm>
-            <a:off x="4709160" y="3127248"/>
-            <a:ext cx="4023360" cy="1645920"/>
-          </a:xfrm>
-          <a:prstGeom prst="rect">
-            <a:avLst/>
-          </a:prstGeom>
-          <a:noFill/>
-          <a:ln/>
-        </p:spPr>
-        <p:txBody>
-          <a:bodyPr wrap="square" lIns="0" tIns="0" rIns="0" bIns="0" rtlCol="0" anchor="t"/>
-          <a:lstStyle/>
-          <a:p>
-            <a:pPr algn="l" indent="0" marL="0">
-              <a:spcAft>
-                <a:spcPts val="100"/>
-              </a:spcAft>
-              <a:buNone/>
-            </a:pPr>
-            <a:r>
-              <a:rPr lang="en-US" sz="850" dirty="0">
-                <a:solidFill>
-                  <a:srgbClr val="1A2530"/>
-                </a:solidFill>
-                <a:latin typeface="Arial" pitchFamily="34" charset="0"/>
-                <a:ea typeface="Arial" pitchFamily="34" charset="-122"/>
-                <a:cs typeface="Arial" pitchFamily="34" charset="-120"/>
-              </a:rPr>
-              <a:t>3.  Canada Foundational Tracker · segregation-of-duties record</a:t>
-            </a:r>
-            <a:endParaRPr lang="en-US" sz="850" dirty="0"/>
-          </a:p>
-        </p:txBody>
-      </p:sp>
-      <p:sp>
-        <p:nvSpPr>
-          <p:cNvPr id="27" name="Text 25"/>
-          <p:cNvSpPr/>
-          <p:nvPr/>
-        </p:nvSpPr>
-        <p:spPr>
-          <a:xfrm>
-            <a:off x="365760" y="4850892"/>
-            <a:ext cx="5486400" cy="201168"/>
-          </a:xfrm>
-          <a:prstGeom prst="rect">
-            <a:avLst/>
-          </a:prstGeom>
-          <a:noFill/>
-          <a:ln/>
-        </p:spPr>
-        <p:txBody>
-          <a:bodyPr wrap="square" lIns="0" tIns="0" rIns="0" bIns="0" rtlCol="0" anchor="ctr"/>
-          <a:lstStyle/>
-          <a:p>
-            <a:pPr algn="l" indent="0" marL="0">
               <a:buNone/>
             </a:pPr>
             <a:r>
@@ -9848,7 +10329,7 @@
                 <a:ea typeface="Arial" pitchFamily="34" charset="-122"/>
                 <a:cs typeface="Arial" pitchFamily="34" charset="-120"/>
               </a:rPr>
-              <a:t>FCRM Risk Assessment FY2025 · MCC Team · Internal</a:t>
+              <a:t>FCRM Risk Assessment FY2025 · MCC Team · Internal · Right-click any → label to add a hyperlink</a:t>
             </a:r>
             <a:endParaRPr lang="en-US" sz="800" dirty="0"/>
           </a:p>
@@ -10075,8 +10556,8 @@
         </p:nvSpPr>
         <p:spPr>
           <a:xfrm>
-            <a:off x="365760" y="1325880"/>
-            <a:ext cx="2712720" cy="868680"/>
+            <a:off x="365760" y="1760220"/>
+            <a:ext cx="2712720" cy="1188720"/>
           </a:xfrm>
           <a:prstGeom prst="rect">
             <a:avLst/>
@@ -10100,8 +10581,8 @@
         </p:nvSpPr>
         <p:spPr>
           <a:xfrm>
-            <a:off x="365760" y="1325880"/>
-            <a:ext cx="73152" cy="868680"/>
+            <a:off x="365760" y="1760220"/>
+            <a:ext cx="73152" cy="1188720"/>
           </a:xfrm>
           <a:prstGeom prst="rect">
             <a:avLst/>
@@ -10125,7 +10606,7 @@
         </p:nvSpPr>
         <p:spPr>
           <a:xfrm>
-            <a:off x="530352" y="1417320"/>
+            <a:off x="530352" y="1851660"/>
             <a:ext cx="384048" cy="384048"/>
           </a:xfrm>
           <a:prstGeom prst="ellipse">
@@ -10150,7 +10631,7 @@
         </p:nvSpPr>
         <p:spPr>
           <a:xfrm>
-            <a:off x="530352" y="1417320"/>
+            <a:off x="530352" y="1851660"/>
             <a:ext cx="384048" cy="384048"/>
           </a:xfrm>
           <a:prstGeom prst="rect">
@@ -10189,8 +10670,8 @@
         </p:nvSpPr>
         <p:spPr>
           <a:xfrm>
-            <a:off x="969264" y="1399032"/>
-            <a:ext cx="1999488" cy="722376"/>
+            <a:off x="969264" y="1833372"/>
+            <a:ext cx="1999488" cy="457200"/>
           </a:xfrm>
           <a:prstGeom prst="rect">
             <a:avLst/>
@@ -10206,7 +10687,7 @@
               <a:buNone/>
             </a:pPr>
             <a:r>
-              <a:rPr lang="en-US" sz="1150" b="1" dirty="0">
+              <a:rPr lang="en-US" sz="1100" b="1" dirty="0">
                 <a:solidFill>
                   <a:srgbClr val="1A2530"/>
                 </a:solidFill>
@@ -10216,19 +10697,58 @@
               </a:rPr>
               <a:t>Change Request</a:t>
             </a:r>
-            <a:endParaRPr lang="en-US" sz="1150" dirty="0"/>
-          </a:p>
-        </p:txBody>
-      </p:sp>
-      <p:sp>
-        <p:nvSpPr>
-          <p:cNvPr id="11" name="Shape 9"/>
+            <a:endParaRPr lang="en-US" sz="1100" dirty="0"/>
+          </a:p>
+        </p:txBody>
+      </p:sp>
+      <p:sp>
+        <p:nvSpPr>
+          <p:cNvPr id="11" name="Text 9"/>
+          <p:cNvSpPr/>
+          <p:nvPr/>
+        </p:nvSpPr>
+        <p:spPr>
+          <a:xfrm>
+            <a:off x="530352" y="2382012"/>
+            <a:ext cx="2438400" cy="219456"/>
+          </a:xfrm>
+          <a:prstGeom prst="rect">
+            <a:avLst/>
+          </a:prstGeom>
+          <a:noFill/>
+          <a:ln/>
+        </p:spPr>
+        <p:txBody>
+          <a:bodyPr wrap="square" lIns="0" tIns="0" rIns="0" bIns="0" rtlCol="0" anchor="ctr"/>
+          <a:lstStyle/>
+          <a:p>
+            <a:pPr algn="l" indent="0" marL="0">
+              <a:buNone/>
+            </a:pPr>
+            <a:r>
+              <a:rPr lang="en-US" sz="900" i="1" dirty="0">
+                <a:solidFill>
+                  <a:srgbClr val="1A5DB0"/>
+                </a:solidFill>
+                <a:latin typeface="Arial" pitchFamily="34" charset="0"/>
+                <a:ea typeface="Arial" pitchFamily="34" charset="-122"/>
+                <a:cs typeface="Arial" pitchFamily="34" charset="-120"/>
+              </a:rPr>
+              <a:t>→ Data Delivery CAN – Agile Board – JIRA</a:t>
+            </a:r>
+            <a:endParaRPr lang="en-US" sz="900" dirty="0"/>
+          </a:p>
+        </p:txBody>
+      </p:sp>
+      <p:sp>
+        <p:nvSpPr>
+          <p:cNvPr id="12" name="Shape 10"/>
           <p:cNvSpPr/>
           <p:nvPr/>
         </p:nvSpPr>
         <p:spPr>
           <a:xfrm rot="5400000">
-            <a:off x="3087624" y="1696212"/>
+            <a:off x="3087624" y="2290572"/>
             <a:ext cx="118872" cy="128016"/>
           </a:xfrm>
           <a:prstGeom prst="rtTriangle">
@@ -10247,14 +10767,14 @@
       </p:sp>
       <p:sp>
         <p:nvSpPr>
-          <p:cNvPr id="12" name="Shape 10"/>
-          <p:cNvSpPr/>
-          <p:nvPr/>
-        </p:nvSpPr>
-        <p:spPr>
-          <a:xfrm>
-            <a:off x="3215640" y="1325880"/>
-            <a:ext cx="2712720" cy="868680"/>
+          <p:cNvPr id="13" name="Shape 11"/>
+          <p:cNvSpPr/>
+          <p:nvPr/>
+        </p:nvSpPr>
+        <p:spPr>
+          <a:xfrm>
+            <a:off x="3215640" y="1760220"/>
+            <a:ext cx="2712720" cy="1188720"/>
           </a:xfrm>
           <a:prstGeom prst="rect">
             <a:avLst/>
@@ -10272,14 +10792,14 @@
       </p:sp>
       <p:sp>
         <p:nvSpPr>
-          <p:cNvPr id="13" name="Shape 11"/>
-          <p:cNvSpPr/>
-          <p:nvPr/>
-        </p:nvSpPr>
-        <p:spPr>
-          <a:xfrm>
-            <a:off x="3215640" y="1325880"/>
-            <a:ext cx="73152" cy="868680"/>
+          <p:cNvPr id="14" name="Shape 12"/>
+          <p:cNvSpPr/>
+          <p:nvPr/>
+        </p:nvSpPr>
+        <p:spPr>
+          <a:xfrm>
+            <a:off x="3215640" y="1760220"/>
+            <a:ext cx="73152" cy="1188720"/>
           </a:xfrm>
           <a:prstGeom prst="rect">
             <a:avLst/>
@@ -10297,13 +10817,13 @@
       </p:sp>
       <p:sp>
         <p:nvSpPr>
-          <p:cNvPr id="14" name="Shape 12"/>
-          <p:cNvSpPr/>
-          <p:nvPr/>
-        </p:nvSpPr>
-        <p:spPr>
-          <a:xfrm>
-            <a:off x="3380232" y="1417320"/>
+          <p:cNvPr id="15" name="Shape 13"/>
+          <p:cNvSpPr/>
+          <p:nvPr/>
+        </p:nvSpPr>
+        <p:spPr>
+          <a:xfrm>
+            <a:off x="3380232" y="1851660"/>
             <a:ext cx="384048" cy="384048"/>
           </a:xfrm>
           <a:prstGeom prst="ellipse">
@@ -10322,13 +10842,13 @@
       </p:sp>
       <p:sp>
         <p:nvSpPr>
-          <p:cNvPr id="15" name="Text 13"/>
-          <p:cNvSpPr/>
-          <p:nvPr/>
-        </p:nvSpPr>
-        <p:spPr>
-          <a:xfrm>
-            <a:off x="3380232" y="1417320"/>
+          <p:cNvPr id="16" name="Text 14"/>
+          <p:cNvSpPr/>
+          <p:nvPr/>
+        </p:nvSpPr>
+        <p:spPr>
+          <a:xfrm>
+            <a:off x="3380232" y="1851660"/>
             <a:ext cx="384048" cy="384048"/>
           </a:xfrm>
           <a:prstGeom prst="rect">
@@ -10361,14 +10881,14 @@
       </p:sp>
       <p:sp>
         <p:nvSpPr>
-          <p:cNvPr id="16" name="Text 14"/>
-          <p:cNvSpPr/>
-          <p:nvPr/>
-        </p:nvSpPr>
-        <p:spPr>
-          <a:xfrm>
-            <a:off x="3819144" y="1399032"/>
-            <a:ext cx="1999488" cy="722376"/>
+          <p:cNvPr id="17" name="Text 15"/>
+          <p:cNvSpPr/>
+          <p:nvPr/>
+        </p:nvSpPr>
+        <p:spPr>
+          <a:xfrm>
+            <a:off x="3819144" y="1833372"/>
+            <a:ext cx="1999488" cy="457200"/>
           </a:xfrm>
           <a:prstGeom prst="rect">
             <a:avLst/>
@@ -10384,7 +10904,7 @@
               <a:buNone/>
             </a:pPr>
             <a:r>
-              <a:rPr lang="en-US" sz="1150" b="1" dirty="0">
+              <a:rPr lang="en-US" sz="1100" b="1" dirty="0">
                 <a:solidFill>
                   <a:srgbClr val="1A2530"/>
                 </a:solidFill>
@@ -10394,19 +10914,58 @@
               </a:rPr>
               <a:t>Impact Assessment</a:t>
             </a:r>
-            <a:endParaRPr lang="en-US" sz="1150" dirty="0"/>
-          </a:p>
-        </p:txBody>
-      </p:sp>
-      <p:sp>
-        <p:nvSpPr>
-          <p:cNvPr id="17" name="Shape 15"/>
+            <a:endParaRPr lang="en-US" sz="1100" dirty="0"/>
+          </a:p>
+        </p:txBody>
+      </p:sp>
+      <p:sp>
+        <p:nvSpPr>
+          <p:cNvPr id="18" name="Text 16"/>
+          <p:cNvSpPr/>
+          <p:nvPr/>
+        </p:nvSpPr>
+        <p:spPr>
+          <a:xfrm>
+            <a:off x="3380232" y="2382012"/>
+            <a:ext cx="2438400" cy="219456"/>
+          </a:xfrm>
+          <a:prstGeom prst="rect">
+            <a:avLst/>
+          </a:prstGeom>
+          <a:noFill/>
+          <a:ln/>
+        </p:spPr>
+        <p:txBody>
+          <a:bodyPr wrap="square" lIns="0" tIns="0" rIns="0" bIns="0" rtlCol="0" anchor="ctr"/>
+          <a:lstStyle/>
+          <a:p>
+            <a:pPr algn="l" indent="0" marL="0">
+              <a:buNone/>
+            </a:pPr>
+            <a:r>
+              <a:rPr lang="en-US" sz="900" i="1" dirty="0">
+                <a:solidFill>
+                  <a:srgbClr val="1A5DB0"/>
+                </a:solidFill>
+                <a:latin typeface="Arial" pitchFamily="34" charset="0"/>
+                <a:ea typeface="Arial" pitchFamily="34" charset="-122"/>
+                <a:cs typeface="Arial" pitchFamily="34" charset="-120"/>
+              </a:rPr>
+              <a:t>→ Data Delivery CAN – Agile Board – JIRA</a:t>
+            </a:r>
+            <a:endParaRPr lang="en-US" sz="900" dirty="0"/>
+          </a:p>
+        </p:txBody>
+      </p:sp>
+      <p:sp>
+        <p:nvSpPr>
+          <p:cNvPr id="19" name="Shape 17"/>
           <p:cNvSpPr/>
           <p:nvPr/>
         </p:nvSpPr>
         <p:spPr>
           <a:xfrm rot="5400000">
-            <a:off x="5937504" y="1696212"/>
+            <a:off x="5937504" y="2290572"/>
             <a:ext cx="118872" cy="128016"/>
           </a:xfrm>
           <a:prstGeom prst="rtTriangle">
@@ -10425,14 +10984,14 @@
       </p:sp>
       <p:sp>
         <p:nvSpPr>
-          <p:cNvPr id="18" name="Shape 16"/>
-          <p:cNvSpPr/>
-          <p:nvPr/>
-        </p:nvSpPr>
-        <p:spPr>
-          <a:xfrm>
-            <a:off x="6065520" y="1325880"/>
-            <a:ext cx="2712720" cy="868680"/>
+          <p:cNvPr id="20" name="Shape 18"/>
+          <p:cNvSpPr/>
+          <p:nvPr/>
+        </p:nvSpPr>
+        <p:spPr>
+          <a:xfrm>
+            <a:off x="6065520" y="1760220"/>
+            <a:ext cx="2712720" cy="1188720"/>
           </a:xfrm>
           <a:prstGeom prst="rect">
             <a:avLst/>
@@ -10450,14 +11009,14 @@
       </p:sp>
       <p:sp>
         <p:nvSpPr>
-          <p:cNvPr id="19" name="Shape 17"/>
-          <p:cNvSpPr/>
-          <p:nvPr/>
-        </p:nvSpPr>
-        <p:spPr>
-          <a:xfrm>
-            <a:off x="6065520" y="1325880"/>
-            <a:ext cx="73152" cy="868680"/>
+          <p:cNvPr id="21" name="Shape 19"/>
+          <p:cNvSpPr/>
+          <p:nvPr/>
+        </p:nvSpPr>
+        <p:spPr>
+          <a:xfrm>
+            <a:off x="6065520" y="1760220"/>
+            <a:ext cx="73152" cy="1188720"/>
           </a:xfrm>
           <a:prstGeom prst="rect">
             <a:avLst/>
@@ -10475,13 +11034,13 @@
       </p:sp>
       <p:sp>
         <p:nvSpPr>
-          <p:cNvPr id="20" name="Shape 18"/>
-          <p:cNvSpPr/>
-          <p:nvPr/>
-        </p:nvSpPr>
-        <p:spPr>
-          <a:xfrm>
-            <a:off x="6230112" y="1417320"/>
+          <p:cNvPr id="22" name="Shape 20"/>
+          <p:cNvSpPr/>
+          <p:nvPr/>
+        </p:nvSpPr>
+        <p:spPr>
+          <a:xfrm>
+            <a:off x="6230112" y="1851660"/>
             <a:ext cx="384048" cy="384048"/>
           </a:xfrm>
           <a:prstGeom prst="ellipse">
@@ -10500,13 +11059,13 @@
       </p:sp>
       <p:sp>
         <p:nvSpPr>
-          <p:cNvPr id="21" name="Text 19"/>
-          <p:cNvSpPr/>
-          <p:nvPr/>
-        </p:nvSpPr>
-        <p:spPr>
-          <a:xfrm>
-            <a:off x="6230112" y="1417320"/>
+          <p:cNvPr id="23" name="Text 21"/>
+          <p:cNvSpPr/>
+          <p:nvPr/>
+        </p:nvSpPr>
+        <p:spPr>
+          <a:xfrm>
+            <a:off x="6230112" y="1851660"/>
             <a:ext cx="384048" cy="384048"/>
           </a:xfrm>
           <a:prstGeom prst="rect">
@@ -10539,14 +11098,14 @@
       </p:sp>
       <p:sp>
         <p:nvSpPr>
-          <p:cNvPr id="22" name="Text 20"/>
-          <p:cNvSpPr/>
-          <p:nvPr/>
-        </p:nvSpPr>
-        <p:spPr>
-          <a:xfrm>
-            <a:off x="6669024" y="1399032"/>
-            <a:ext cx="1999488" cy="722376"/>
+          <p:cNvPr id="24" name="Text 22"/>
+          <p:cNvSpPr/>
+          <p:nvPr/>
+        </p:nvSpPr>
+        <p:spPr>
+          <a:xfrm>
+            <a:off x="6669024" y="1833372"/>
+            <a:ext cx="1999488" cy="457200"/>
           </a:xfrm>
           <a:prstGeom prst="rect">
             <a:avLst/>
@@ -10562,7 +11121,7 @@
               <a:buNone/>
             </a:pPr>
             <a:r>
-              <a:rPr lang="en-US" sz="1150" b="1" dirty="0">
+              <a:rPr lang="en-US" sz="1100" b="1" dirty="0">
                 <a:solidFill>
                   <a:srgbClr val="1A2530"/>
                 </a:solidFill>
@@ -10572,19 +11131,58 @@
               </a:rPr>
               <a:t>Change Approval</a:t>
             </a:r>
-            <a:endParaRPr lang="en-US" sz="1150" dirty="0"/>
-          </a:p>
-        </p:txBody>
-      </p:sp>
-      <p:sp>
-        <p:nvSpPr>
-          <p:cNvPr id="23" name="Shape 21"/>
+            <a:endParaRPr lang="en-US" sz="1100" dirty="0"/>
+          </a:p>
+        </p:txBody>
+      </p:sp>
+      <p:sp>
+        <p:nvSpPr>
+          <p:cNvPr id="25" name="Text 23"/>
+          <p:cNvSpPr/>
+          <p:nvPr/>
+        </p:nvSpPr>
+        <p:spPr>
+          <a:xfrm>
+            <a:off x="6230112" y="2382012"/>
+            <a:ext cx="2438400" cy="219456"/>
+          </a:xfrm>
+          <a:prstGeom prst="rect">
+            <a:avLst/>
+          </a:prstGeom>
+          <a:noFill/>
+          <a:ln/>
+        </p:spPr>
+        <p:txBody>
+          <a:bodyPr wrap="square" lIns="0" tIns="0" rIns="0" bIns="0" rtlCol="0" anchor="ctr"/>
+          <a:lstStyle/>
+          <a:p>
+            <a:pPr algn="l" indent="0" marL="0">
+              <a:buNone/>
+            </a:pPr>
+            <a:r>
+              <a:rPr lang="en-US" sz="900" i="1" dirty="0">
+                <a:solidFill>
+                  <a:srgbClr val="1A5DB0"/>
+                </a:solidFill>
+                <a:latin typeface="Arial" pitchFamily="34" charset="0"/>
+                <a:ea typeface="Arial" pitchFamily="34" charset="-122"/>
+                <a:cs typeface="Arial" pitchFamily="34" charset="-120"/>
+              </a:rPr>
+              <a:t>→ Data Delivery CAN – Agile Board – JIRA</a:t>
+            </a:r>
+            <a:endParaRPr lang="en-US" sz="900" dirty="0"/>
+          </a:p>
+        </p:txBody>
+      </p:sp>
+      <p:sp>
+        <p:nvSpPr>
+          <p:cNvPr id="26" name="Shape 24"/>
           <p:cNvSpPr/>
           <p:nvPr/>
         </p:nvSpPr>
         <p:spPr>
           <a:xfrm rot="10800000">
-            <a:off x="8641080" y="2235708"/>
+            <a:off x="8641080" y="2990088"/>
             <a:ext cx="146304" cy="146304"/>
           </a:xfrm>
           <a:prstGeom prst="rtTriangle">
@@ -10603,14 +11201,14 @@
       </p:sp>
       <p:sp>
         <p:nvSpPr>
-          <p:cNvPr id="24" name="Shape 22"/>
-          <p:cNvSpPr/>
-          <p:nvPr/>
-        </p:nvSpPr>
-        <p:spPr>
-          <a:xfrm>
-            <a:off x="365760" y="2423160"/>
-            <a:ext cx="2712720" cy="868680"/>
+          <p:cNvPr id="27" name="Shape 25"/>
+          <p:cNvSpPr/>
+          <p:nvPr/>
+        </p:nvSpPr>
+        <p:spPr>
+          <a:xfrm>
+            <a:off x="365760" y="3177540"/>
+            <a:ext cx="2712720" cy="1188720"/>
           </a:xfrm>
           <a:prstGeom prst="rect">
             <a:avLst/>
@@ -10628,14 +11226,14 @@
       </p:sp>
       <p:sp>
         <p:nvSpPr>
-          <p:cNvPr id="25" name="Shape 23"/>
-          <p:cNvSpPr/>
-          <p:nvPr/>
-        </p:nvSpPr>
-        <p:spPr>
-          <a:xfrm>
-            <a:off x="365760" y="2423160"/>
-            <a:ext cx="73152" cy="868680"/>
+          <p:cNvPr id="28" name="Shape 26"/>
+          <p:cNvSpPr/>
+          <p:nvPr/>
+        </p:nvSpPr>
+        <p:spPr>
+          <a:xfrm>
+            <a:off x="365760" y="3177540"/>
+            <a:ext cx="73152" cy="1188720"/>
           </a:xfrm>
           <a:prstGeom prst="rect">
             <a:avLst/>
@@ -10653,13 +11251,13 @@
       </p:sp>
       <p:sp>
         <p:nvSpPr>
-          <p:cNvPr id="26" name="Shape 24"/>
-          <p:cNvSpPr/>
-          <p:nvPr/>
-        </p:nvSpPr>
-        <p:spPr>
-          <a:xfrm>
-            <a:off x="530352" y="2514600"/>
+          <p:cNvPr id="29" name="Shape 27"/>
+          <p:cNvSpPr/>
+          <p:nvPr/>
+        </p:nvSpPr>
+        <p:spPr>
+          <a:xfrm>
+            <a:off x="530352" y="3268980"/>
             <a:ext cx="384048" cy="384048"/>
           </a:xfrm>
           <a:prstGeom prst="ellipse">
@@ -10678,13 +11276,13 @@
       </p:sp>
       <p:sp>
         <p:nvSpPr>
-          <p:cNvPr id="27" name="Text 25"/>
-          <p:cNvSpPr/>
-          <p:nvPr/>
-        </p:nvSpPr>
-        <p:spPr>
-          <a:xfrm>
-            <a:off x="530352" y="2514600"/>
+          <p:cNvPr id="30" name="Text 28"/>
+          <p:cNvSpPr/>
+          <p:nvPr/>
+        </p:nvSpPr>
+        <p:spPr>
+          <a:xfrm>
+            <a:off x="530352" y="3268980"/>
             <a:ext cx="384048" cy="384048"/>
           </a:xfrm>
           <a:prstGeom prst="rect">
@@ -10717,14 +11315,14 @@
       </p:sp>
       <p:sp>
         <p:nvSpPr>
-          <p:cNvPr id="28" name="Text 26"/>
-          <p:cNvSpPr/>
-          <p:nvPr/>
-        </p:nvSpPr>
-        <p:spPr>
-          <a:xfrm>
-            <a:off x="969264" y="2496312"/>
-            <a:ext cx="1999488" cy="722376"/>
+          <p:cNvPr id="31" name="Text 29"/>
+          <p:cNvSpPr/>
+          <p:nvPr/>
+        </p:nvSpPr>
+        <p:spPr>
+          <a:xfrm>
+            <a:off x="969264" y="3250692"/>
+            <a:ext cx="1999488" cy="457200"/>
           </a:xfrm>
           <a:prstGeom prst="rect">
             <a:avLst/>
@@ -10740,7 +11338,7 @@
               <a:buNone/>
             </a:pPr>
             <a:r>
-              <a:rPr lang="en-US" sz="1150" b="1" dirty="0">
+              <a:rPr lang="en-US" sz="1100" b="1" dirty="0">
                 <a:solidFill>
                   <a:srgbClr val="1A2530"/>
                 </a:solidFill>
@@ -10750,19 +11348,58 @@
               </a:rPr>
               <a:t>Version Control</a:t>
             </a:r>
-            <a:endParaRPr lang="en-US" sz="1150" dirty="0"/>
-          </a:p>
-        </p:txBody>
-      </p:sp>
-      <p:sp>
-        <p:nvSpPr>
-          <p:cNvPr id="29" name="Shape 27"/>
+            <a:endParaRPr lang="en-US" sz="1100" dirty="0"/>
+          </a:p>
+        </p:txBody>
+      </p:sp>
+      <p:sp>
+        <p:nvSpPr>
+          <p:cNvPr id="32" name="Text 30"/>
+          <p:cNvSpPr/>
+          <p:nvPr/>
+        </p:nvSpPr>
+        <p:spPr>
+          <a:xfrm>
+            <a:off x="530352" y="3799332"/>
+            <a:ext cx="2438400" cy="219456"/>
+          </a:xfrm>
+          <a:prstGeom prst="rect">
+            <a:avLst/>
+          </a:prstGeom>
+          <a:noFill/>
+          <a:ln/>
+        </p:spPr>
+        <p:txBody>
+          <a:bodyPr wrap="square" lIns="0" tIns="0" rIns="0" bIns="0" rtlCol="0" anchor="ctr"/>
+          <a:lstStyle/>
+          <a:p>
+            <a:pPr algn="l" indent="0" marL="0">
+              <a:buNone/>
+            </a:pPr>
+            <a:r>
+              <a:rPr lang="en-US" sz="900" i="1" dirty="0">
+                <a:solidFill>
+                  <a:srgbClr val="1A5DB0"/>
+                </a:solidFill>
+                <a:latin typeface="Arial" pitchFamily="34" charset="0"/>
+                <a:ea typeface="Arial" pitchFamily="34" charset="-122"/>
+                <a:cs typeface="Arial" pitchFamily="34" charset="-120"/>
+              </a:rPr>
+              <a:t>→ github.com/TD-Universe/RAFY2025_CA</a:t>
+            </a:r>
+            <a:endParaRPr lang="en-US" sz="900" dirty="0"/>
+          </a:p>
+        </p:txBody>
+      </p:sp>
+      <p:sp>
+        <p:nvSpPr>
+          <p:cNvPr id="33" name="Shape 31"/>
           <p:cNvSpPr/>
           <p:nvPr/>
         </p:nvSpPr>
         <p:spPr>
           <a:xfrm rot="5400000">
-            <a:off x="3087624" y="2793492"/>
+            <a:off x="3087624" y="3707892"/>
             <a:ext cx="118872" cy="128016"/>
           </a:xfrm>
           <a:prstGeom prst="rtTriangle">
@@ -10781,14 +11418,14 @@
       </p:sp>
       <p:sp>
         <p:nvSpPr>
-          <p:cNvPr id="30" name="Shape 28"/>
-          <p:cNvSpPr/>
-          <p:nvPr/>
-        </p:nvSpPr>
-        <p:spPr>
-          <a:xfrm>
-            <a:off x="3215640" y="2423160"/>
-            <a:ext cx="2712720" cy="868680"/>
+          <p:cNvPr id="34" name="Shape 32"/>
+          <p:cNvSpPr/>
+          <p:nvPr/>
+        </p:nvSpPr>
+        <p:spPr>
+          <a:xfrm>
+            <a:off x="3215640" y="3177540"/>
+            <a:ext cx="2712720" cy="1188720"/>
           </a:xfrm>
           <a:prstGeom prst="rect">
             <a:avLst/>
@@ -10806,14 +11443,14 @@
       </p:sp>
       <p:sp>
         <p:nvSpPr>
-          <p:cNvPr id="31" name="Shape 29"/>
-          <p:cNvSpPr/>
-          <p:nvPr/>
-        </p:nvSpPr>
-        <p:spPr>
-          <a:xfrm>
-            <a:off x="3215640" y="2423160"/>
-            <a:ext cx="73152" cy="868680"/>
+          <p:cNvPr id="35" name="Shape 33"/>
+          <p:cNvSpPr/>
+          <p:nvPr/>
+        </p:nvSpPr>
+        <p:spPr>
+          <a:xfrm>
+            <a:off x="3215640" y="3177540"/>
+            <a:ext cx="73152" cy="1188720"/>
           </a:xfrm>
           <a:prstGeom prst="rect">
             <a:avLst/>
@@ -10831,13 +11468,13 @@
       </p:sp>
       <p:sp>
         <p:nvSpPr>
-          <p:cNvPr id="32" name="Shape 30"/>
-          <p:cNvSpPr/>
-          <p:nvPr/>
-        </p:nvSpPr>
-        <p:spPr>
-          <a:xfrm>
-            <a:off x="3380232" y="2514600"/>
+          <p:cNvPr id="36" name="Shape 34"/>
+          <p:cNvSpPr/>
+          <p:nvPr/>
+        </p:nvSpPr>
+        <p:spPr>
+          <a:xfrm>
+            <a:off x="3380232" y="3268980"/>
             <a:ext cx="384048" cy="384048"/>
           </a:xfrm>
           <a:prstGeom prst="ellipse">
@@ -10856,13 +11493,13 @@
       </p:sp>
       <p:sp>
         <p:nvSpPr>
-          <p:cNvPr id="33" name="Text 31"/>
-          <p:cNvSpPr/>
-          <p:nvPr/>
-        </p:nvSpPr>
-        <p:spPr>
-          <a:xfrm>
-            <a:off x="3380232" y="2514600"/>
+          <p:cNvPr id="37" name="Text 35"/>
+          <p:cNvSpPr/>
+          <p:nvPr/>
+        </p:nvSpPr>
+        <p:spPr>
+          <a:xfrm>
+            <a:off x="3380232" y="3268980"/>
             <a:ext cx="384048" cy="384048"/>
           </a:xfrm>
           <a:prstGeom prst="rect">
@@ -10895,14 +11532,14 @@
       </p:sp>
       <p:sp>
         <p:nvSpPr>
-          <p:cNvPr id="34" name="Text 32"/>
-          <p:cNvSpPr/>
-          <p:nvPr/>
-        </p:nvSpPr>
-        <p:spPr>
-          <a:xfrm>
-            <a:off x="3819144" y="2496312"/>
-            <a:ext cx="1999488" cy="722376"/>
+          <p:cNvPr id="38" name="Text 36"/>
+          <p:cNvSpPr/>
+          <p:nvPr/>
+        </p:nvSpPr>
+        <p:spPr>
+          <a:xfrm>
+            <a:off x="3819144" y="3250692"/>
+            <a:ext cx="1999488" cy="457200"/>
           </a:xfrm>
           <a:prstGeom prst="rect">
             <a:avLst/>
@@ -10918,7 +11555,7 @@
               <a:buNone/>
             </a:pPr>
             <a:r>
-              <a:rPr lang="en-US" sz="1150" b="1" dirty="0">
+              <a:rPr lang="en-US" sz="1100" b="1" dirty="0">
                 <a:solidFill>
                   <a:srgbClr val="1A2530"/>
                 </a:solidFill>
@@ -10928,19 +11565,58 @@
               </a:rPr>
               <a:t>Result Update</a:t>
             </a:r>
-            <a:endParaRPr lang="en-US" sz="1150" dirty="0"/>
-          </a:p>
-        </p:txBody>
-      </p:sp>
-      <p:sp>
-        <p:nvSpPr>
-          <p:cNvPr id="35" name="Shape 33"/>
+            <a:endParaRPr lang="en-US" sz="1100" dirty="0"/>
+          </a:p>
+        </p:txBody>
+      </p:sp>
+      <p:sp>
+        <p:nvSpPr>
+          <p:cNvPr id="39" name="Text 37"/>
+          <p:cNvSpPr/>
+          <p:nvPr/>
+        </p:nvSpPr>
+        <p:spPr>
+          <a:xfrm>
+            <a:off x="3380232" y="3799332"/>
+            <a:ext cx="2438400" cy="219456"/>
+          </a:xfrm>
+          <a:prstGeom prst="rect">
+            <a:avLst/>
+          </a:prstGeom>
+          <a:noFill/>
+          <a:ln/>
+        </p:spPr>
+        <p:txBody>
+          <a:bodyPr wrap="square" lIns="0" tIns="0" rIns="0" bIns="0" rtlCol="0" anchor="ctr"/>
+          <a:lstStyle/>
+          <a:p>
+            <a:pPr algn="l" indent="0" marL="0">
+              <a:buNone/>
+            </a:pPr>
+            <a:r>
+              <a:rPr lang="en-US" sz="900" i="1" dirty="0">
+                <a:solidFill>
+                  <a:srgbClr val="1A5DB0"/>
+                </a:solidFill>
+                <a:latin typeface="Arial" pitchFamily="34" charset="0"/>
+                <a:ea typeface="Arial" pitchFamily="34" charset="-122"/>
+                <a:cs typeface="Arial" pitchFamily="34" charset="-120"/>
+              </a:rPr>
+              <a:t>→ 03 Metric Delivery</a:t>
+            </a:r>
+            <a:endParaRPr lang="en-US" sz="900" dirty="0"/>
+          </a:p>
+        </p:txBody>
+      </p:sp>
+      <p:sp>
+        <p:nvSpPr>
+          <p:cNvPr id="40" name="Shape 38"/>
           <p:cNvSpPr/>
           <p:nvPr/>
         </p:nvSpPr>
         <p:spPr>
           <a:xfrm rot="5400000">
-            <a:off x="5937504" y="2793492"/>
+            <a:off x="5937504" y="3707892"/>
             <a:ext cx="118872" cy="128016"/>
           </a:xfrm>
           <a:prstGeom prst="rtTriangle">
@@ -10959,14 +11635,14 @@
       </p:sp>
       <p:sp>
         <p:nvSpPr>
-          <p:cNvPr id="36" name="Shape 34"/>
-          <p:cNvSpPr/>
-          <p:nvPr/>
-        </p:nvSpPr>
-        <p:spPr>
-          <a:xfrm>
-            <a:off x="6065520" y="2423160"/>
-            <a:ext cx="2712720" cy="868680"/>
+          <p:cNvPr id="41" name="Shape 39"/>
+          <p:cNvSpPr/>
+          <p:nvPr/>
+        </p:nvSpPr>
+        <p:spPr>
+          <a:xfrm>
+            <a:off x="6065520" y="3177540"/>
+            <a:ext cx="2712720" cy="1188720"/>
           </a:xfrm>
           <a:prstGeom prst="rect">
             <a:avLst/>
@@ -10984,14 +11660,14 @@
       </p:sp>
       <p:sp>
         <p:nvSpPr>
-          <p:cNvPr id="37" name="Shape 35"/>
-          <p:cNvSpPr/>
-          <p:nvPr/>
-        </p:nvSpPr>
-        <p:spPr>
-          <a:xfrm>
-            <a:off x="6065520" y="2423160"/>
-            <a:ext cx="73152" cy="868680"/>
+          <p:cNvPr id="42" name="Shape 40"/>
+          <p:cNvSpPr/>
+          <p:nvPr/>
+        </p:nvSpPr>
+        <p:spPr>
+          <a:xfrm>
+            <a:off x="6065520" y="3177540"/>
+            <a:ext cx="73152" cy="1188720"/>
           </a:xfrm>
           <a:prstGeom prst="rect">
             <a:avLst/>
@@ -11009,13 +11685,13 @@
       </p:sp>
       <p:sp>
         <p:nvSpPr>
-          <p:cNvPr id="38" name="Shape 36"/>
-          <p:cNvSpPr/>
-          <p:nvPr/>
-        </p:nvSpPr>
-        <p:spPr>
-          <a:xfrm>
-            <a:off x="6230112" y="2514600"/>
+          <p:cNvPr id="43" name="Shape 41"/>
+          <p:cNvSpPr/>
+          <p:nvPr/>
+        </p:nvSpPr>
+        <p:spPr>
+          <a:xfrm>
+            <a:off x="6230112" y="3268980"/>
             <a:ext cx="384048" cy="384048"/>
           </a:xfrm>
           <a:prstGeom prst="ellipse">
@@ -11034,13 +11710,13 @@
       </p:sp>
       <p:sp>
         <p:nvSpPr>
-          <p:cNvPr id="39" name="Text 37"/>
-          <p:cNvSpPr/>
-          <p:nvPr/>
-        </p:nvSpPr>
-        <p:spPr>
-          <a:xfrm>
-            <a:off x="6230112" y="2514600"/>
+          <p:cNvPr id="44" name="Text 42"/>
+          <p:cNvSpPr/>
+          <p:nvPr/>
+        </p:nvSpPr>
+        <p:spPr>
+          <a:xfrm>
+            <a:off x="6230112" y="3268980"/>
             <a:ext cx="384048" cy="384048"/>
           </a:xfrm>
           <a:prstGeom prst="rect">
@@ -11073,14 +11749,14 @@
       </p:sp>
       <p:sp>
         <p:nvSpPr>
-          <p:cNvPr id="40" name="Text 38"/>
-          <p:cNvSpPr/>
-          <p:nvPr/>
-        </p:nvSpPr>
-        <p:spPr>
-          <a:xfrm>
-            <a:off x="6669024" y="2496312"/>
-            <a:ext cx="1999488" cy="722376"/>
+          <p:cNvPr id="45" name="Text 43"/>
+          <p:cNvSpPr/>
+          <p:nvPr/>
+        </p:nvSpPr>
+        <p:spPr>
+          <a:xfrm>
+            <a:off x="6669024" y="3250692"/>
+            <a:ext cx="1999488" cy="457200"/>
           </a:xfrm>
           <a:prstGeom prst="rect">
             <a:avLst/>
@@ -11096,7 +11772,7 @@
               <a:buNone/>
             </a:pPr>
             <a:r>
-              <a:rPr lang="en-US" sz="1150" b="1" dirty="0">
+              <a:rPr lang="en-US" sz="1100" b="1" dirty="0">
                 <a:solidFill>
                   <a:srgbClr val="1A2530"/>
                 </a:solidFill>
@@ -11106,45 +11782,20 @@
               </a:rPr>
               <a:t>Scope Change Logging</a:t>
             </a:r>
-            <a:endParaRPr lang="en-US" sz="1150" dirty="0"/>
-          </a:p>
-        </p:txBody>
-      </p:sp>
-      <p:sp>
-        <p:nvSpPr>
-          <p:cNvPr id="41" name="Shape 39"/>
-          <p:cNvSpPr/>
-          <p:nvPr/>
-        </p:nvSpPr>
-        <p:spPr>
-          <a:xfrm>
-            <a:off x="365760" y="3611880"/>
-            <a:ext cx="8412480" cy="1188720"/>
-          </a:xfrm>
-          <a:prstGeom prst="rect">
-            <a:avLst/>
-          </a:prstGeom>
-          <a:solidFill>
-            <a:srgbClr val="F4F6F8"/>
-          </a:solidFill>
-          <a:ln w="6350">
-            <a:solidFill>
-              <a:srgbClr val="D6DBE2"/>
-            </a:solidFill>
-            <a:prstDash val="solid"/>
-          </a:ln>
-        </p:spPr>
-      </p:sp>
-      <p:sp>
-        <p:nvSpPr>
-          <p:cNvPr id="42" name="Text 40"/>
-          <p:cNvSpPr/>
-          <p:nvPr/>
-        </p:nvSpPr>
-        <p:spPr>
-          <a:xfrm>
-            <a:off x="502920" y="3657600"/>
-            <a:ext cx="1828800" cy="228600"/>
+            <a:endParaRPr lang="en-US" sz="1100" dirty="0"/>
+          </a:p>
+        </p:txBody>
+      </p:sp>
+      <p:sp>
+        <p:nvSpPr>
+          <p:cNvPr id="46" name="Text 44"/>
+          <p:cNvSpPr/>
+          <p:nvPr/>
+        </p:nvSpPr>
+        <p:spPr>
+          <a:xfrm>
+            <a:off x="6230112" y="3799332"/>
+            <a:ext cx="2438400" cy="219456"/>
           </a:xfrm>
           <a:prstGeom prst="rect">
             <a:avLst/>
@@ -11160,206 +11811,42 @@
               <a:buNone/>
             </a:pPr>
             <a:r>
-              <a:rPr lang="en-US" sz="1000" b="1" dirty="0">
-                <a:solidFill>
-                  <a:srgbClr val="1B365D"/>
-                </a:solidFill>
-                <a:latin typeface="Arial" pitchFamily="34" charset="0"/>
-                <a:ea typeface="Arial" pitchFamily="34" charset="-122"/>
-                <a:cs typeface="Arial" pitchFamily="34" charset="-120"/>
-              </a:rPr>
-              <a:t>Key Artifacts</a:t>
-            </a:r>
-            <a:endParaRPr lang="en-US" sz="1000" dirty="0"/>
-          </a:p>
-        </p:txBody>
-      </p:sp>
-      <p:sp>
-        <p:nvSpPr>
-          <p:cNvPr id="43" name="Text 41"/>
-          <p:cNvSpPr/>
-          <p:nvPr/>
-        </p:nvSpPr>
-        <p:spPr>
-          <a:xfrm>
-            <a:off x="502920" y="3904488"/>
-            <a:ext cx="4023360" cy="868680"/>
-          </a:xfrm>
-          <a:prstGeom prst="rect">
-            <a:avLst/>
-          </a:prstGeom>
-          <a:noFill/>
-          <a:ln/>
-        </p:spPr>
-        <p:txBody>
-          <a:bodyPr wrap="square" lIns="0" tIns="0" rIns="0" bIns="0" rtlCol="0" anchor="t"/>
+              <a:rPr lang="en-US" sz="900" i="1" dirty="0">
+                <a:solidFill>
+                  <a:srgbClr val="1A5DB0"/>
+                </a:solidFill>
+                <a:latin typeface="Arial" pitchFamily="34" charset="0"/>
+                <a:ea typeface="Arial" pitchFamily="34" charset="-122"/>
+                <a:cs typeface="Arial" pitchFamily="34" charset="-120"/>
+              </a:rPr>
+              <a:t>→ Scope Statement of Work (Live).docx</a:t>
+            </a:r>
+            <a:endParaRPr lang="en-US" sz="900" dirty="0"/>
+          </a:p>
+        </p:txBody>
+      </p:sp>
+      <p:sp>
+        <p:nvSpPr>
+          <p:cNvPr id="47" name="Text 45"/>
+          <p:cNvSpPr/>
+          <p:nvPr/>
+        </p:nvSpPr>
+        <p:spPr>
+          <a:xfrm>
+            <a:off x="365760" y="4850892"/>
+            <a:ext cx="7315200" cy="201168"/>
+          </a:xfrm>
+          <a:prstGeom prst="rect">
+            <a:avLst/>
+          </a:prstGeom>
+          <a:noFill/>
+          <a:ln/>
+        </p:spPr>
+        <p:txBody>
+          <a:bodyPr wrap="square" lIns="0" tIns="0" rIns="0" bIns="0" rtlCol="0" anchor="ctr"/>
           <a:lstStyle/>
           <a:p>
             <a:pPr algn="l" indent="0" marL="0">
-              <a:spcAft>
-                <a:spcPts val="100"/>
-              </a:spcAft>
-              <a:buNone/>
-            </a:pPr>
-            <a:r>
-              <a:rPr lang="en-US" sz="850" dirty="0">
-                <a:solidFill>
-                  <a:srgbClr val="1A2530"/>
-                </a:solidFill>
-                <a:latin typeface="Arial" pitchFamily="34" charset="0"/>
-                <a:ea typeface="Arial" pitchFamily="34" charset="-122"/>
-                <a:cs typeface="Arial" pitchFamily="34" charset="-120"/>
-              </a:rPr>
-              <a:t>1.  Jira change ticket (BUSINESS LOGIC DESIGN DEF)</a:t>
-            </a:r>
-            <a:endParaRPr lang="en-US" sz="850" dirty="0"/>
-          </a:p>
-          <a:p>
-            <a:pPr algn="l" indent="0" marL="0">
-              <a:spcAft>
-                <a:spcPts val="100"/>
-              </a:spcAft>
-              <a:buNone/>
-            </a:pPr>
-            <a:r>
-              <a:rPr lang="en-US" sz="850" dirty="0">
-                <a:solidFill>
-                  <a:srgbClr val="1A2530"/>
-                </a:solidFill>
-                <a:latin typeface="Arial" pitchFamily="34" charset="0"/>
-                <a:ea typeface="Arial" pitchFamily="34" charset="-122"/>
-                <a:cs typeface="Arial" pitchFamily="34" charset="-120"/>
-              </a:rPr>
-              <a:t>2.  Impact assessment notes in Jira</a:t>
-            </a:r>
-            <a:endParaRPr lang="en-US" sz="850" dirty="0"/>
-          </a:p>
-          <a:p>
-            <a:pPr algn="l" indent="0" marL="0">
-              <a:spcAft>
-                <a:spcPts val="100"/>
-              </a:spcAft>
-              <a:buNone/>
-            </a:pPr>
-            <a:r>
-              <a:rPr lang="en-US" sz="850" dirty="0">
-                <a:solidFill>
-                  <a:srgbClr val="1A2530"/>
-                </a:solidFill>
-                <a:latin typeface="Arial" pitchFamily="34" charset="0"/>
-                <a:ea typeface="Arial" pitchFamily="34" charset="-122"/>
-                <a:cs typeface="Arial" pitchFamily="34" charset="-120"/>
-              </a:rPr>
-              <a:t>3.  PO CONCURRENCE Jira state · approver sign-off</a:t>
-            </a:r>
-            <a:endParaRPr lang="en-US" sz="850" dirty="0"/>
-          </a:p>
-        </p:txBody>
-      </p:sp>
-      <p:sp>
-        <p:nvSpPr>
-          <p:cNvPr id="44" name="Text 42"/>
-          <p:cNvSpPr/>
-          <p:nvPr/>
-        </p:nvSpPr>
-        <p:spPr>
-          <a:xfrm>
-            <a:off x="4709160" y="3904488"/>
-            <a:ext cx="4023360" cy="868680"/>
-          </a:xfrm>
-          <a:prstGeom prst="rect">
-            <a:avLst/>
-          </a:prstGeom>
-          <a:noFill/>
-          <a:ln/>
-        </p:spPr>
-        <p:txBody>
-          <a:bodyPr wrap="square" lIns="0" tIns="0" rIns="0" bIns="0" rtlCol="0" anchor="t"/>
-          <a:lstStyle/>
-          <a:p>
-            <a:pPr algn="l" indent="0" marL="0">
-              <a:spcAft>
-                <a:spcPts val="100"/>
-              </a:spcAft>
-              <a:buNone/>
-            </a:pPr>
-            <a:r>
-              <a:rPr lang="en-US" sz="850" dirty="0">
-                <a:solidFill>
-                  <a:srgbClr val="1A2530"/>
-                </a:solidFill>
-                <a:latin typeface="Arial" pitchFamily="34" charset="0"/>
-                <a:ea typeface="Arial" pitchFamily="34" charset="-122"/>
-                <a:cs typeface="Arial" pitchFamily="34" charset="-120"/>
-              </a:rPr>
-              <a:t>4.  Git commit (TD-Universe/RAFY2025_CA) · validated Databricks query</a:t>
-            </a:r>
-            <a:endParaRPr lang="en-US" sz="850" dirty="0"/>
-          </a:p>
-          <a:p>
-            <a:pPr algn="l" indent="0" marL="0">
-              <a:spcAft>
-                <a:spcPts val="100"/>
-              </a:spcAft>
-              <a:buNone/>
-            </a:pPr>
-            <a:r>
-              <a:rPr lang="en-US" sz="850" dirty="0">
-                <a:solidFill>
-                  <a:srgbClr val="1A2530"/>
-                </a:solidFill>
-                <a:latin typeface="Arial" pitchFamily="34" charset="0"/>
-                <a:ea typeface="Arial" pitchFamily="34" charset="-122"/>
-                <a:cs typeface="Arial" pitchFamily="34" charset="-120"/>
-              </a:rPr>
-              <a:t>5.  Updated Excel mastersheet · reviewer sign-off · PO APPROVED</a:t>
-            </a:r>
-            <a:endParaRPr lang="en-US" sz="850" dirty="0"/>
-          </a:p>
-          <a:p>
-            <a:pPr algn="l" indent="0" marL="0">
-              <a:spcAft>
-                <a:spcPts val="100"/>
-              </a:spcAft>
-              <a:buNone/>
-            </a:pPr>
-            <a:r>
-              <a:rPr lang="en-US" sz="850" dirty="0">
-                <a:solidFill>
-                  <a:srgbClr val="1A2530"/>
-                </a:solidFill>
-                <a:latin typeface="Arial" pitchFamily="34" charset="0"/>
-                <a:ea typeface="Arial" pitchFamily="34" charset="-122"/>
-                <a:cs typeface="Arial" pitchFamily="34" charset="-120"/>
-              </a:rPr>
-              <a:t>6.  SOW v1.32 weekly change log (Richard Ng)</a:t>
-            </a:r>
-            <a:endParaRPr lang="en-US" sz="850" dirty="0"/>
-          </a:p>
-        </p:txBody>
-      </p:sp>
-      <p:sp>
-        <p:nvSpPr>
-          <p:cNvPr id="45" name="Text 43"/>
-          <p:cNvSpPr/>
-          <p:nvPr/>
-        </p:nvSpPr>
-        <p:spPr>
-          <a:xfrm>
-            <a:off x="365760" y="4850892"/>
-            <a:ext cx="5486400" cy="201168"/>
-          </a:xfrm>
-          <a:prstGeom prst="rect">
-            <a:avLst/>
-          </a:prstGeom>
-          <a:noFill/>
-          <a:ln/>
-        </p:spPr>
-        <p:txBody>
-          <a:bodyPr wrap="square" lIns="0" tIns="0" rIns="0" bIns="0" rtlCol="0" anchor="ctr"/>
-          <a:lstStyle/>
-          <a:p>
-            <a:pPr algn="l" indent="0" marL="0">
               <a:buNone/>
             </a:pPr>
             <a:r>
@@ -11371,7 +11858,7 @@
                 <a:ea typeface="Arial" pitchFamily="34" charset="-122"/>
                 <a:cs typeface="Arial" pitchFamily="34" charset="-120"/>
               </a:rPr>
-              <a:t>FCRM Risk Assessment FY2025 · MCC Team · Internal</a:t>
+              <a:t>FCRM Risk Assessment FY2025 · MCC Team · Internal · Right-click any → label to add a hyperlink</a:t>
             </a:r>
             <a:endParaRPr lang="en-US" sz="800" dirty="0"/>
           </a:p>
@@ -11379,7 +11866,7 @@
       </p:sp>
       <p:sp>
         <p:nvSpPr>
-          <p:cNvPr id="46" name="Text 44"/>
+          <p:cNvPr id="48" name="Text 46"/>
           <p:cNvSpPr/>
           <p:nvPr/>
         </p:nvSpPr>
